--- a/AulasMaisExplicadas.pptx
+++ b/AulasMaisExplicadas.pptx
@@ -5,7 +5,7 @@
     <p:sldMasterId id="2147483648" r:id="rId1"/>
   </p:sldMasterIdLst>
   <p:notesMasterIdLst>
-    <p:notesMasterId r:id="rId33"/>
+    <p:notesMasterId r:id="rId26"/>
   </p:notesMasterIdLst>
   <p:sldIdLst>
     <p:sldId id="256" r:id="rId2"/>
@@ -25,20 +25,13 @@
     <p:sldId id="288" r:id="rId16"/>
     <p:sldId id="279" r:id="rId17"/>
     <p:sldId id="278" r:id="rId18"/>
-    <p:sldId id="264" r:id="rId19"/>
-    <p:sldId id="265" r:id="rId20"/>
-    <p:sldId id="266" r:id="rId21"/>
-    <p:sldId id="267" r:id="rId22"/>
-    <p:sldId id="268" r:id="rId23"/>
-    <p:sldId id="280" r:id="rId24"/>
-    <p:sldId id="284" r:id="rId25"/>
-    <p:sldId id="285" r:id="rId26"/>
-    <p:sldId id="281" r:id="rId27"/>
-    <p:sldId id="271" r:id="rId28"/>
-    <p:sldId id="282" r:id="rId29"/>
-    <p:sldId id="283" r:id="rId30"/>
-    <p:sldId id="272" r:id="rId31"/>
-    <p:sldId id="291" r:id="rId32"/>
+    <p:sldId id="265" r:id="rId19"/>
+    <p:sldId id="266" r:id="rId20"/>
+    <p:sldId id="271" r:id="rId21"/>
+    <p:sldId id="282" r:id="rId22"/>
+    <p:sldId id="283" r:id="rId23"/>
+    <p:sldId id="272" r:id="rId24"/>
+    <p:sldId id="291" r:id="rId25"/>
   </p:sldIdLst>
   <p:sldSz cx="12192000" cy="6858000"/>
   <p:notesSz cx="6858000" cy="9144000"/>
@@ -276,7 +269,7 @@
       <p15:sldGuideLst xmlns:p15="http://schemas.microsoft.com/office/powerpoint/2012/main"/>
     </p:ext>
     <p:ext uri="http://customooxmlschemas.google.com/">
-      <go:slidesCustomData xmlns:go="http://customooxmlschemas.google.com/" xmlns:ahyp="http://schemas.microsoft.com/office/drawing/2018/hyperlinkcolor" xmlns:p15="http://schemas.microsoft.com/office/powerpoint/2012/main" xmlns:p14="http://schemas.microsoft.com/office/powerpoint/2010/main" xmlns:com="http://schemas.openxmlformats.org/drawingml/2006/compatibility" xmlns:pvml="urn:schemas-microsoft-com:office:powerpoint" xmlns:v="urn:schemas-microsoft-com:vml" xmlns:o="urn:schemas-microsoft-com:office:office" xmlns:dgm="http://schemas.openxmlformats.org/drawingml/2006/diagram" xmlns:c="http://schemas.openxmlformats.org/drawingml/2006/chart" xmlns:mv="urn:schemas-microsoft-com:mac:vml" xmlns:mc="http://schemas.openxmlformats.org/markup-compatibility/2006" xmlns="" r:id="rId34" roundtripDataSignature="AMtx7mjFsmb5BTXCHYbaQxFx3sctUX4EHw=="/>
+      <go:slidesCustomData xmlns="" xmlns:mc="http://schemas.openxmlformats.org/markup-compatibility/2006" xmlns:mv="urn:schemas-microsoft-com:mac:vml" xmlns:c="http://schemas.openxmlformats.org/drawingml/2006/chart" xmlns:dgm="http://schemas.openxmlformats.org/drawingml/2006/diagram" xmlns:o="urn:schemas-microsoft-com:office:office" xmlns:v="urn:schemas-microsoft-com:vml" xmlns:pvml="urn:schemas-microsoft-com:office:powerpoint" xmlns:com="http://schemas.openxmlformats.org/drawingml/2006/compatibility" xmlns:p14="http://schemas.microsoft.com/office/powerpoint/2010/main" xmlns:p15="http://schemas.microsoft.com/office/powerpoint/2012/main" xmlns:ahyp="http://schemas.microsoft.com/office/drawing/2018/hyperlinkcolor" xmlns:go="http://customooxmlschemas.google.com/" r:id="rId34" roundtripDataSignature="AMtx7mjFsmb5BTXCHYbaQxFx3sctUX4EHw=="/>
     </p:ext>
   </p:extLst>
 </p:presentation>
@@ -1689,7 +1682,7 @@
   <p:cSld>
     <p:spTree>
       <p:nvGrpSpPr>
-        <p:cNvPr id="1" name="Shape 157"/>
+        <p:cNvPr id="1" name="Shape 166"/>
         <p:cNvGrpSpPr/>
         <p:nvPr/>
       </p:nvGrpSpPr>
@@ -1703,7 +1696,7 @@
       </p:grpSpPr>
       <p:sp>
         <p:nvSpPr>
-          <p:cNvPr id="158" name="Google Shape;158;p9:notes"/>
+          <p:cNvPr id="167" name="Google Shape;167;p10:notes"/>
           <p:cNvSpPr txBox="1">
             <a:spLocks noGrp="1"/>
           </p:cNvSpPr>
@@ -1741,7 +1734,7 @@
       </p:sp>
       <p:sp>
         <p:nvSpPr>
-          <p:cNvPr id="159" name="Google Shape;159;p9:notes"/>
+          <p:cNvPr id="168" name="Google Shape;168;p10:notes"/>
           <p:cNvSpPr>
             <a:spLocks noGrp="1" noRot="1" noChangeAspect="1"/>
           </p:cNvSpPr>
@@ -1793,7 +1786,7 @@
   <p:cSld>
     <p:spTree>
       <p:nvGrpSpPr>
-        <p:cNvPr id="1" name="Shape 166"/>
+        <p:cNvPr id="1" name="Shape 175"/>
         <p:cNvGrpSpPr/>
         <p:nvPr/>
       </p:nvGrpSpPr>
@@ -1807,7 +1800,7 @@
       </p:grpSpPr>
       <p:sp>
         <p:nvSpPr>
-          <p:cNvPr id="167" name="Google Shape;167;p10:notes"/>
+          <p:cNvPr id="176" name="Google Shape;176;p11:notes"/>
           <p:cNvSpPr txBox="1">
             <a:spLocks noGrp="1"/>
           </p:cNvSpPr>
@@ -1845,7 +1838,7 @@
       </p:sp>
       <p:sp>
         <p:nvSpPr>
-          <p:cNvPr id="168" name="Google Shape;168;p10:notes"/>
+          <p:cNvPr id="177" name="Google Shape;177;p11:notes"/>
           <p:cNvSpPr>
             <a:spLocks noGrp="1" noRot="1" noChangeAspect="1"/>
           </p:cNvSpPr>
@@ -2001,754 +1994,6 @@
   <p:cSld>
     <p:spTree>
       <p:nvGrpSpPr>
-        <p:cNvPr id="1" name="Shape 175"/>
-        <p:cNvGrpSpPr/>
-        <p:nvPr/>
-      </p:nvGrpSpPr>
-      <p:grpSpPr>
-        <a:xfrm>
-          <a:off x="0" y="0"/>
-          <a:ext cx="0" cy="0"/>
-          <a:chOff x="0" y="0"/>
-          <a:chExt cx="0" cy="0"/>
-        </a:xfrm>
-      </p:grpSpPr>
-      <p:sp>
-        <p:nvSpPr>
-          <p:cNvPr id="176" name="Google Shape;176;p11:notes"/>
-          <p:cNvSpPr txBox="1">
-            <a:spLocks noGrp="1"/>
-          </p:cNvSpPr>
-          <p:nvPr>
-            <p:ph type="body" idx="1"/>
-          </p:nvPr>
-        </p:nvSpPr>
-        <p:spPr>
-          <a:xfrm>
-            <a:off x="685800" y="4343400"/>
-            <a:ext cx="5486400" cy="4114800"/>
-          </a:xfrm>
-          <a:prstGeom prst="rect">
-            <a:avLst/>
-          </a:prstGeom>
-        </p:spPr>
-        <p:txBody>
-          <a:bodyPr spcFirstLastPara="1" wrap="square" lIns="91425" tIns="91425" rIns="91425" bIns="91425" anchor="t" anchorCtr="0">
-            <a:noAutofit/>
-          </a:bodyPr>
-          <a:lstStyle/>
-          <a:p>
-            <a:pPr marL="0" lvl="0" indent="0" algn="l" rtl="0">
-              <a:spcBef>
-                <a:spcPts val="0"/>
-              </a:spcBef>
-              <a:spcAft>
-                <a:spcPts val="0"/>
-              </a:spcAft>
-              <a:buNone/>
-            </a:pPr>
-            <a:endParaRPr/>
-          </a:p>
-        </p:txBody>
-      </p:sp>
-      <p:sp>
-        <p:nvSpPr>
-          <p:cNvPr id="177" name="Google Shape;177;p11:notes"/>
-          <p:cNvSpPr>
-            <a:spLocks noGrp="1" noRot="1" noChangeAspect="1"/>
-          </p:cNvSpPr>
-          <p:nvPr>
-            <p:ph type="sldImg" idx="2"/>
-          </p:nvPr>
-        </p:nvSpPr>
-        <p:spPr>
-          <a:xfrm>
-            <a:off x="381000" y="685800"/>
-            <a:ext cx="6096000" cy="3429000"/>
-          </a:xfrm>
-          <a:custGeom>
-            <a:avLst/>
-            <a:gdLst/>
-            <a:ahLst/>
-            <a:cxnLst/>
-            <a:rect l="l" t="t" r="r" b="b"/>
-            <a:pathLst>
-              <a:path w="120000" h="120000" extrusionOk="0">
-                <a:moveTo>
-                  <a:pt x="0" y="0"/>
-                </a:moveTo>
-                <a:lnTo>
-                  <a:pt x="120000" y="0"/>
-                </a:lnTo>
-                <a:lnTo>
-                  <a:pt x="120000" y="120000"/>
-                </a:lnTo>
-                <a:lnTo>
-                  <a:pt x="0" y="120000"/>
-                </a:lnTo>
-                <a:close/>
-              </a:path>
-            </a:pathLst>
-          </a:custGeom>
-        </p:spPr>
-      </p:sp>
-    </p:spTree>
-  </p:cSld>
-  <p:clrMapOvr>
-    <a:masterClrMapping/>
-  </p:clrMapOvr>
-</p:notes>
-</file>
-
-<file path=ppt/notesSlides/notesSlide21.xml><?xml version="1.0" encoding="utf-8"?>
-<p:notes xmlns:a="http://schemas.openxmlformats.org/drawingml/2006/main" xmlns:r="http://schemas.openxmlformats.org/officeDocument/2006/relationships" xmlns:p="http://schemas.openxmlformats.org/presentationml/2006/main" showMasterSp="0" showMasterPhAnim="0">
-  <p:cSld>
-    <p:spTree>
-      <p:nvGrpSpPr>
-        <p:cNvPr id="1" name="Shape 187"/>
-        <p:cNvGrpSpPr/>
-        <p:nvPr/>
-      </p:nvGrpSpPr>
-      <p:grpSpPr>
-        <a:xfrm>
-          <a:off x="0" y="0"/>
-          <a:ext cx="0" cy="0"/>
-          <a:chOff x="0" y="0"/>
-          <a:chExt cx="0" cy="0"/>
-        </a:xfrm>
-      </p:grpSpPr>
-      <p:sp>
-        <p:nvSpPr>
-          <p:cNvPr id="188" name="Google Shape;188;p12:notes"/>
-          <p:cNvSpPr txBox="1">
-            <a:spLocks noGrp="1"/>
-          </p:cNvSpPr>
-          <p:nvPr>
-            <p:ph type="body" idx="1"/>
-          </p:nvPr>
-        </p:nvSpPr>
-        <p:spPr>
-          <a:xfrm>
-            <a:off x="685800" y="4343400"/>
-            <a:ext cx="5486400" cy="4114800"/>
-          </a:xfrm>
-          <a:prstGeom prst="rect">
-            <a:avLst/>
-          </a:prstGeom>
-        </p:spPr>
-        <p:txBody>
-          <a:bodyPr spcFirstLastPara="1" wrap="square" lIns="91425" tIns="91425" rIns="91425" bIns="91425" anchor="t" anchorCtr="0">
-            <a:noAutofit/>
-          </a:bodyPr>
-          <a:lstStyle/>
-          <a:p>
-            <a:pPr marL="0" lvl="0" indent="0" algn="l" rtl="0">
-              <a:spcBef>
-                <a:spcPts val="0"/>
-              </a:spcBef>
-              <a:spcAft>
-                <a:spcPts val="0"/>
-              </a:spcAft>
-              <a:buNone/>
-            </a:pPr>
-            <a:endParaRPr/>
-          </a:p>
-        </p:txBody>
-      </p:sp>
-      <p:sp>
-        <p:nvSpPr>
-          <p:cNvPr id="189" name="Google Shape;189;p12:notes"/>
-          <p:cNvSpPr>
-            <a:spLocks noGrp="1" noRot="1" noChangeAspect="1"/>
-          </p:cNvSpPr>
-          <p:nvPr>
-            <p:ph type="sldImg" idx="2"/>
-          </p:nvPr>
-        </p:nvSpPr>
-        <p:spPr>
-          <a:xfrm>
-            <a:off x="381000" y="685800"/>
-            <a:ext cx="6096000" cy="3429000"/>
-          </a:xfrm>
-          <a:custGeom>
-            <a:avLst/>
-            <a:gdLst/>
-            <a:ahLst/>
-            <a:cxnLst/>
-            <a:rect l="l" t="t" r="r" b="b"/>
-            <a:pathLst>
-              <a:path w="120000" h="120000" extrusionOk="0">
-                <a:moveTo>
-                  <a:pt x="0" y="0"/>
-                </a:moveTo>
-                <a:lnTo>
-                  <a:pt x="120000" y="0"/>
-                </a:lnTo>
-                <a:lnTo>
-                  <a:pt x="120000" y="120000"/>
-                </a:lnTo>
-                <a:lnTo>
-                  <a:pt x="0" y="120000"/>
-                </a:lnTo>
-                <a:close/>
-              </a:path>
-            </a:pathLst>
-          </a:custGeom>
-        </p:spPr>
-      </p:sp>
-    </p:spTree>
-  </p:cSld>
-  <p:clrMapOvr>
-    <a:masterClrMapping/>
-  </p:clrMapOvr>
-</p:notes>
-</file>
-
-<file path=ppt/notesSlides/notesSlide22.xml><?xml version="1.0" encoding="utf-8"?>
-<p:notes xmlns:a="http://schemas.openxmlformats.org/drawingml/2006/main" xmlns:r="http://schemas.openxmlformats.org/officeDocument/2006/relationships" xmlns:p="http://schemas.openxmlformats.org/presentationml/2006/main" showMasterSp="0" showMasterPhAnim="0">
-  <p:cSld>
-    <p:spTree>
-      <p:nvGrpSpPr>
-        <p:cNvPr id="1" name="Shape 199"/>
-        <p:cNvGrpSpPr/>
-        <p:nvPr/>
-      </p:nvGrpSpPr>
-      <p:grpSpPr>
-        <a:xfrm>
-          <a:off x="0" y="0"/>
-          <a:ext cx="0" cy="0"/>
-          <a:chOff x="0" y="0"/>
-          <a:chExt cx="0" cy="0"/>
-        </a:xfrm>
-      </p:grpSpPr>
-      <p:sp>
-        <p:nvSpPr>
-          <p:cNvPr id="200" name="Google Shape;200;p13:notes"/>
-          <p:cNvSpPr txBox="1">
-            <a:spLocks noGrp="1"/>
-          </p:cNvSpPr>
-          <p:nvPr>
-            <p:ph type="body" idx="1"/>
-          </p:nvPr>
-        </p:nvSpPr>
-        <p:spPr>
-          <a:xfrm>
-            <a:off x="685800" y="4343400"/>
-            <a:ext cx="5486400" cy="4114800"/>
-          </a:xfrm>
-          <a:prstGeom prst="rect">
-            <a:avLst/>
-          </a:prstGeom>
-        </p:spPr>
-        <p:txBody>
-          <a:bodyPr spcFirstLastPara="1" wrap="square" lIns="91425" tIns="91425" rIns="91425" bIns="91425" anchor="t" anchorCtr="0">
-            <a:noAutofit/>
-          </a:bodyPr>
-          <a:lstStyle/>
-          <a:p>
-            <a:pPr marL="0" lvl="0" indent="0" algn="l" rtl="0">
-              <a:spcBef>
-                <a:spcPts val="0"/>
-              </a:spcBef>
-              <a:spcAft>
-                <a:spcPts val="0"/>
-              </a:spcAft>
-              <a:buNone/>
-            </a:pPr>
-            <a:endParaRPr/>
-          </a:p>
-        </p:txBody>
-      </p:sp>
-      <p:sp>
-        <p:nvSpPr>
-          <p:cNvPr id="201" name="Google Shape;201;p13:notes"/>
-          <p:cNvSpPr>
-            <a:spLocks noGrp="1" noRot="1" noChangeAspect="1"/>
-          </p:cNvSpPr>
-          <p:nvPr>
-            <p:ph type="sldImg" idx="2"/>
-          </p:nvPr>
-        </p:nvSpPr>
-        <p:spPr>
-          <a:xfrm>
-            <a:off x="381000" y="685800"/>
-            <a:ext cx="6096000" cy="3429000"/>
-          </a:xfrm>
-          <a:custGeom>
-            <a:avLst/>
-            <a:gdLst/>
-            <a:ahLst/>
-            <a:cxnLst/>
-            <a:rect l="l" t="t" r="r" b="b"/>
-            <a:pathLst>
-              <a:path w="120000" h="120000" extrusionOk="0">
-                <a:moveTo>
-                  <a:pt x="0" y="0"/>
-                </a:moveTo>
-                <a:lnTo>
-                  <a:pt x="120000" y="0"/>
-                </a:lnTo>
-                <a:lnTo>
-                  <a:pt x="120000" y="120000"/>
-                </a:lnTo>
-                <a:lnTo>
-                  <a:pt x="0" y="120000"/>
-                </a:lnTo>
-                <a:close/>
-              </a:path>
-            </a:pathLst>
-          </a:custGeom>
-        </p:spPr>
-      </p:sp>
-    </p:spTree>
-  </p:cSld>
-  <p:clrMapOvr>
-    <a:masterClrMapping/>
-  </p:clrMapOvr>
-</p:notes>
-</file>
-
-<file path=ppt/notesSlides/notesSlide23.xml><?xml version="1.0" encoding="utf-8"?>
-<p:notes xmlns:a="http://schemas.openxmlformats.org/drawingml/2006/main" xmlns:r="http://schemas.openxmlformats.org/officeDocument/2006/relationships" xmlns:p="http://schemas.openxmlformats.org/presentationml/2006/main" showMasterSp="0" showMasterPhAnim="0">
-  <p:cSld>
-    <p:spTree>
-      <p:nvGrpSpPr>
-        <p:cNvPr id="1" name="Shape 208"/>
-        <p:cNvGrpSpPr/>
-        <p:nvPr/>
-      </p:nvGrpSpPr>
-      <p:grpSpPr>
-        <a:xfrm>
-          <a:off x="0" y="0"/>
-          <a:ext cx="0" cy="0"/>
-          <a:chOff x="0" y="0"/>
-          <a:chExt cx="0" cy="0"/>
-        </a:xfrm>
-      </p:grpSpPr>
-      <p:sp>
-        <p:nvSpPr>
-          <p:cNvPr id="209" name="Google Shape;209;p14:notes"/>
-          <p:cNvSpPr txBox="1">
-            <a:spLocks noGrp="1"/>
-          </p:cNvSpPr>
-          <p:nvPr>
-            <p:ph type="body" idx="1"/>
-          </p:nvPr>
-        </p:nvSpPr>
-        <p:spPr>
-          <a:xfrm>
-            <a:off x="685800" y="4343400"/>
-            <a:ext cx="5486400" cy="4114800"/>
-          </a:xfrm>
-          <a:prstGeom prst="rect">
-            <a:avLst/>
-          </a:prstGeom>
-        </p:spPr>
-        <p:txBody>
-          <a:bodyPr spcFirstLastPara="1" wrap="square" lIns="91425" tIns="91425" rIns="91425" bIns="91425" anchor="t" anchorCtr="0">
-            <a:noAutofit/>
-          </a:bodyPr>
-          <a:lstStyle/>
-          <a:p>
-            <a:pPr marL="0" lvl="0" indent="0" algn="l" rtl="0">
-              <a:spcBef>
-                <a:spcPts val="0"/>
-              </a:spcBef>
-              <a:spcAft>
-                <a:spcPts val="0"/>
-              </a:spcAft>
-              <a:buNone/>
-            </a:pPr>
-            <a:endParaRPr/>
-          </a:p>
-        </p:txBody>
-      </p:sp>
-      <p:sp>
-        <p:nvSpPr>
-          <p:cNvPr id="210" name="Google Shape;210;p14:notes"/>
-          <p:cNvSpPr>
-            <a:spLocks noGrp="1" noRot="1" noChangeAspect="1"/>
-          </p:cNvSpPr>
-          <p:nvPr>
-            <p:ph type="sldImg" idx="2"/>
-          </p:nvPr>
-        </p:nvSpPr>
-        <p:spPr>
-          <a:xfrm>
-            <a:off x="381000" y="685800"/>
-            <a:ext cx="6096000" cy="3429000"/>
-          </a:xfrm>
-          <a:custGeom>
-            <a:avLst/>
-            <a:gdLst/>
-            <a:ahLst/>
-            <a:cxnLst/>
-            <a:rect l="l" t="t" r="r" b="b"/>
-            <a:pathLst>
-              <a:path w="120000" h="120000" extrusionOk="0">
-                <a:moveTo>
-                  <a:pt x="0" y="0"/>
-                </a:moveTo>
-                <a:lnTo>
-                  <a:pt x="120000" y="0"/>
-                </a:lnTo>
-                <a:lnTo>
-                  <a:pt x="120000" y="120000"/>
-                </a:lnTo>
-                <a:lnTo>
-                  <a:pt x="0" y="120000"/>
-                </a:lnTo>
-                <a:close/>
-              </a:path>
-            </a:pathLst>
-          </a:custGeom>
-        </p:spPr>
-      </p:sp>
-    </p:spTree>
-    <p:extLst>
-      <p:ext uri="{BB962C8B-B14F-4D97-AF65-F5344CB8AC3E}">
-        <p14:creationId xmlns:p14="http://schemas.microsoft.com/office/powerpoint/2010/main" val="1544629807"/>
-      </p:ext>
-    </p:extLst>
-  </p:cSld>
-  <p:clrMapOvr>
-    <a:masterClrMapping/>
-  </p:clrMapOvr>
-</p:notes>
-</file>
-
-<file path=ppt/notesSlides/notesSlide24.xml><?xml version="1.0" encoding="utf-8"?>
-<p:notes xmlns:a="http://schemas.openxmlformats.org/drawingml/2006/main" xmlns:r="http://schemas.openxmlformats.org/officeDocument/2006/relationships" xmlns:p="http://schemas.openxmlformats.org/presentationml/2006/main" showMasterSp="0" showMasterPhAnim="0">
-  <p:cSld>
-    <p:spTree>
-      <p:nvGrpSpPr>
-        <p:cNvPr id="1" name="Shape 208"/>
-        <p:cNvGrpSpPr/>
-        <p:nvPr/>
-      </p:nvGrpSpPr>
-      <p:grpSpPr>
-        <a:xfrm>
-          <a:off x="0" y="0"/>
-          <a:ext cx="0" cy="0"/>
-          <a:chOff x="0" y="0"/>
-          <a:chExt cx="0" cy="0"/>
-        </a:xfrm>
-      </p:grpSpPr>
-      <p:sp>
-        <p:nvSpPr>
-          <p:cNvPr id="209" name="Google Shape;209;p14:notes"/>
-          <p:cNvSpPr txBox="1">
-            <a:spLocks noGrp="1"/>
-          </p:cNvSpPr>
-          <p:nvPr>
-            <p:ph type="body" idx="1"/>
-          </p:nvPr>
-        </p:nvSpPr>
-        <p:spPr>
-          <a:xfrm>
-            <a:off x="685800" y="4343400"/>
-            <a:ext cx="5486400" cy="4114800"/>
-          </a:xfrm>
-          <a:prstGeom prst="rect">
-            <a:avLst/>
-          </a:prstGeom>
-        </p:spPr>
-        <p:txBody>
-          <a:bodyPr spcFirstLastPara="1" wrap="square" lIns="91425" tIns="91425" rIns="91425" bIns="91425" anchor="t" anchorCtr="0">
-            <a:noAutofit/>
-          </a:bodyPr>
-          <a:lstStyle/>
-          <a:p>
-            <a:pPr marL="0" lvl="0" indent="0" algn="l" rtl="0">
-              <a:spcBef>
-                <a:spcPts val="0"/>
-              </a:spcBef>
-              <a:spcAft>
-                <a:spcPts val="0"/>
-              </a:spcAft>
-              <a:buNone/>
-            </a:pPr>
-            <a:endParaRPr/>
-          </a:p>
-        </p:txBody>
-      </p:sp>
-      <p:sp>
-        <p:nvSpPr>
-          <p:cNvPr id="210" name="Google Shape;210;p14:notes"/>
-          <p:cNvSpPr>
-            <a:spLocks noGrp="1" noRot="1" noChangeAspect="1"/>
-          </p:cNvSpPr>
-          <p:nvPr>
-            <p:ph type="sldImg" idx="2"/>
-          </p:nvPr>
-        </p:nvSpPr>
-        <p:spPr>
-          <a:xfrm>
-            <a:off x="381000" y="685800"/>
-            <a:ext cx="6096000" cy="3429000"/>
-          </a:xfrm>
-          <a:custGeom>
-            <a:avLst/>
-            <a:gdLst/>
-            <a:ahLst/>
-            <a:cxnLst/>
-            <a:rect l="l" t="t" r="r" b="b"/>
-            <a:pathLst>
-              <a:path w="120000" h="120000" extrusionOk="0">
-                <a:moveTo>
-                  <a:pt x="0" y="0"/>
-                </a:moveTo>
-                <a:lnTo>
-                  <a:pt x="120000" y="0"/>
-                </a:lnTo>
-                <a:lnTo>
-                  <a:pt x="120000" y="120000"/>
-                </a:lnTo>
-                <a:lnTo>
-                  <a:pt x="0" y="120000"/>
-                </a:lnTo>
-                <a:close/>
-              </a:path>
-            </a:pathLst>
-          </a:custGeom>
-        </p:spPr>
-      </p:sp>
-    </p:spTree>
-    <p:extLst>
-      <p:ext uri="{BB962C8B-B14F-4D97-AF65-F5344CB8AC3E}">
-        <p14:creationId xmlns:p14="http://schemas.microsoft.com/office/powerpoint/2010/main" val="2490792730"/>
-      </p:ext>
-    </p:extLst>
-  </p:cSld>
-  <p:clrMapOvr>
-    <a:masterClrMapping/>
-  </p:clrMapOvr>
-</p:notes>
-</file>
-
-<file path=ppt/notesSlides/notesSlide25.xml><?xml version="1.0" encoding="utf-8"?>
-<p:notes xmlns:a="http://schemas.openxmlformats.org/drawingml/2006/main" xmlns:r="http://schemas.openxmlformats.org/officeDocument/2006/relationships" xmlns:p="http://schemas.openxmlformats.org/presentationml/2006/main" showMasterSp="0" showMasterPhAnim="0">
-  <p:cSld>
-    <p:spTree>
-      <p:nvGrpSpPr>
-        <p:cNvPr id="1" name="Shape 208"/>
-        <p:cNvGrpSpPr/>
-        <p:nvPr/>
-      </p:nvGrpSpPr>
-      <p:grpSpPr>
-        <a:xfrm>
-          <a:off x="0" y="0"/>
-          <a:ext cx="0" cy="0"/>
-          <a:chOff x="0" y="0"/>
-          <a:chExt cx="0" cy="0"/>
-        </a:xfrm>
-      </p:grpSpPr>
-      <p:sp>
-        <p:nvSpPr>
-          <p:cNvPr id="209" name="Google Shape;209;p14:notes"/>
-          <p:cNvSpPr txBox="1">
-            <a:spLocks noGrp="1"/>
-          </p:cNvSpPr>
-          <p:nvPr>
-            <p:ph type="body" idx="1"/>
-          </p:nvPr>
-        </p:nvSpPr>
-        <p:spPr>
-          <a:xfrm>
-            <a:off x="685800" y="4343400"/>
-            <a:ext cx="5486400" cy="4114800"/>
-          </a:xfrm>
-          <a:prstGeom prst="rect">
-            <a:avLst/>
-          </a:prstGeom>
-        </p:spPr>
-        <p:txBody>
-          <a:bodyPr spcFirstLastPara="1" wrap="square" lIns="91425" tIns="91425" rIns="91425" bIns="91425" anchor="t" anchorCtr="0">
-            <a:noAutofit/>
-          </a:bodyPr>
-          <a:lstStyle/>
-          <a:p>
-            <a:pPr marL="0" lvl="0" indent="0" algn="l" rtl="0">
-              <a:spcBef>
-                <a:spcPts val="0"/>
-              </a:spcBef>
-              <a:spcAft>
-                <a:spcPts val="0"/>
-              </a:spcAft>
-              <a:buNone/>
-            </a:pPr>
-            <a:endParaRPr/>
-          </a:p>
-        </p:txBody>
-      </p:sp>
-      <p:sp>
-        <p:nvSpPr>
-          <p:cNvPr id="210" name="Google Shape;210;p14:notes"/>
-          <p:cNvSpPr>
-            <a:spLocks noGrp="1" noRot="1" noChangeAspect="1"/>
-          </p:cNvSpPr>
-          <p:nvPr>
-            <p:ph type="sldImg" idx="2"/>
-          </p:nvPr>
-        </p:nvSpPr>
-        <p:spPr>
-          <a:xfrm>
-            <a:off x="381000" y="685800"/>
-            <a:ext cx="6096000" cy="3429000"/>
-          </a:xfrm>
-          <a:custGeom>
-            <a:avLst/>
-            <a:gdLst/>
-            <a:ahLst/>
-            <a:cxnLst/>
-            <a:rect l="l" t="t" r="r" b="b"/>
-            <a:pathLst>
-              <a:path w="120000" h="120000" extrusionOk="0">
-                <a:moveTo>
-                  <a:pt x="0" y="0"/>
-                </a:moveTo>
-                <a:lnTo>
-                  <a:pt x="120000" y="0"/>
-                </a:lnTo>
-                <a:lnTo>
-                  <a:pt x="120000" y="120000"/>
-                </a:lnTo>
-                <a:lnTo>
-                  <a:pt x="0" y="120000"/>
-                </a:lnTo>
-                <a:close/>
-              </a:path>
-            </a:pathLst>
-          </a:custGeom>
-        </p:spPr>
-      </p:sp>
-    </p:spTree>
-    <p:extLst>
-      <p:ext uri="{BB962C8B-B14F-4D97-AF65-F5344CB8AC3E}">
-        <p14:creationId xmlns:p14="http://schemas.microsoft.com/office/powerpoint/2010/main" val="4204342042"/>
-      </p:ext>
-    </p:extLst>
-  </p:cSld>
-  <p:clrMapOvr>
-    <a:masterClrMapping/>
-  </p:clrMapOvr>
-</p:notes>
-</file>
-
-<file path=ppt/notesSlides/notesSlide26.xml><?xml version="1.0" encoding="utf-8"?>
-<p:notes xmlns:a="http://schemas.openxmlformats.org/drawingml/2006/main" xmlns:r="http://schemas.openxmlformats.org/officeDocument/2006/relationships" xmlns:p="http://schemas.openxmlformats.org/presentationml/2006/main" showMasterSp="0" showMasterPhAnim="0">
-  <p:cSld>
-    <p:spTree>
-      <p:nvGrpSpPr>
-        <p:cNvPr id="1" name="Shape 219"/>
-        <p:cNvGrpSpPr/>
-        <p:nvPr/>
-      </p:nvGrpSpPr>
-      <p:grpSpPr>
-        <a:xfrm>
-          <a:off x="0" y="0"/>
-          <a:ext cx="0" cy="0"/>
-          <a:chOff x="0" y="0"/>
-          <a:chExt cx="0" cy="0"/>
-        </a:xfrm>
-      </p:grpSpPr>
-      <p:sp>
-        <p:nvSpPr>
-          <p:cNvPr id="220" name="Google Shape;220;p15:notes"/>
-          <p:cNvSpPr txBox="1">
-            <a:spLocks noGrp="1"/>
-          </p:cNvSpPr>
-          <p:nvPr>
-            <p:ph type="body" idx="1"/>
-          </p:nvPr>
-        </p:nvSpPr>
-        <p:spPr>
-          <a:xfrm>
-            <a:off x="685800" y="4343400"/>
-            <a:ext cx="5486400" cy="4114800"/>
-          </a:xfrm>
-          <a:prstGeom prst="rect">
-            <a:avLst/>
-          </a:prstGeom>
-        </p:spPr>
-        <p:txBody>
-          <a:bodyPr spcFirstLastPara="1" wrap="square" lIns="91425" tIns="91425" rIns="91425" bIns="91425" anchor="t" anchorCtr="0">
-            <a:noAutofit/>
-          </a:bodyPr>
-          <a:lstStyle/>
-          <a:p>
-            <a:pPr marL="0" lvl="0" indent="0" algn="l" rtl="0">
-              <a:spcBef>
-                <a:spcPts val="0"/>
-              </a:spcBef>
-              <a:spcAft>
-                <a:spcPts val="0"/>
-              </a:spcAft>
-              <a:buNone/>
-            </a:pPr>
-            <a:endParaRPr/>
-          </a:p>
-        </p:txBody>
-      </p:sp>
-      <p:sp>
-        <p:nvSpPr>
-          <p:cNvPr id="221" name="Google Shape;221;p15:notes"/>
-          <p:cNvSpPr>
-            <a:spLocks noGrp="1" noRot="1" noChangeAspect="1"/>
-          </p:cNvSpPr>
-          <p:nvPr>
-            <p:ph type="sldImg" idx="2"/>
-          </p:nvPr>
-        </p:nvSpPr>
-        <p:spPr>
-          <a:xfrm>
-            <a:off x="381000" y="685800"/>
-            <a:ext cx="6096000" cy="3429000"/>
-          </a:xfrm>
-          <a:custGeom>
-            <a:avLst/>
-            <a:gdLst/>
-            <a:ahLst/>
-            <a:cxnLst/>
-            <a:rect l="l" t="t" r="r" b="b"/>
-            <a:pathLst>
-              <a:path w="120000" h="120000" extrusionOk="0">
-                <a:moveTo>
-                  <a:pt x="0" y="0"/>
-                </a:moveTo>
-                <a:lnTo>
-                  <a:pt x="120000" y="0"/>
-                </a:lnTo>
-                <a:lnTo>
-                  <a:pt x="120000" y="120000"/>
-                </a:lnTo>
-                <a:lnTo>
-                  <a:pt x="0" y="120000"/>
-                </a:lnTo>
-                <a:close/>
-              </a:path>
-            </a:pathLst>
-          </a:custGeom>
-        </p:spPr>
-      </p:sp>
-    </p:spTree>
-    <p:extLst>
-      <p:ext uri="{BB962C8B-B14F-4D97-AF65-F5344CB8AC3E}">
-        <p14:creationId xmlns:p14="http://schemas.microsoft.com/office/powerpoint/2010/main" val="2065302671"/>
-      </p:ext>
-    </p:extLst>
-  </p:cSld>
-  <p:clrMapOvr>
-    <a:masterClrMapping/>
-  </p:clrMapOvr>
-</p:notes>
-</file>
-
-<file path=ppt/notesSlides/notesSlide27.xml><?xml version="1.0" encoding="utf-8"?>
-<p:notes xmlns:a="http://schemas.openxmlformats.org/drawingml/2006/main" xmlns:r="http://schemas.openxmlformats.org/officeDocument/2006/relationships" xmlns:p="http://schemas.openxmlformats.org/presentationml/2006/main" showMasterSp="0" showMasterPhAnim="0">
-  <p:cSld>
-    <p:spTree>
-      <p:nvGrpSpPr>
         <p:cNvPr id="1" name="Shape 227"/>
         <p:cNvGrpSpPr/>
         <p:nvPr/>
@@ -2848,7 +2093,7 @@
 </p:notes>
 </file>
 
-<file path=ppt/notesSlides/notesSlide28.xml><?xml version="1.0" encoding="utf-8"?>
+<file path=ppt/notesSlides/notesSlide21.xml><?xml version="1.0" encoding="utf-8"?>
 <p:notes xmlns:a="http://schemas.openxmlformats.org/drawingml/2006/main" xmlns:r="http://schemas.openxmlformats.org/officeDocument/2006/relationships" xmlns:p="http://schemas.openxmlformats.org/presentationml/2006/main" showMasterSp="0" showMasterPhAnim="0">
   <p:cSld>
     <p:spTree>
@@ -2957,7 +2202,7 @@
 </p:notes>
 </file>
 
-<file path=ppt/notesSlides/notesSlide29.xml><?xml version="1.0" encoding="utf-8"?>
+<file path=ppt/notesSlides/notesSlide22.xml><?xml version="1.0" encoding="utf-8"?>
 <p:notes xmlns:a="http://schemas.openxmlformats.org/drawingml/2006/main" xmlns:r="http://schemas.openxmlformats.org/officeDocument/2006/relationships" xmlns:p="http://schemas.openxmlformats.org/presentationml/2006/main" showMasterSp="0" showMasterPhAnim="0">
   <p:cSld>
     <p:spTree>
@@ -3066,111 +2311,7 @@
 </p:notes>
 </file>
 
-<file path=ppt/notesSlides/notesSlide3.xml><?xml version="1.0" encoding="utf-8"?>
-<p:notes xmlns:a="http://schemas.openxmlformats.org/drawingml/2006/main" xmlns:r="http://schemas.openxmlformats.org/officeDocument/2006/relationships" xmlns:p="http://schemas.openxmlformats.org/presentationml/2006/main" showMasterSp="0" showMasterPhAnim="0">
-  <p:cSld>
-    <p:spTree>
-      <p:nvGrpSpPr>
-        <p:cNvPr id="1" name="Shape 96"/>
-        <p:cNvGrpSpPr/>
-        <p:nvPr/>
-      </p:nvGrpSpPr>
-      <p:grpSpPr>
-        <a:xfrm>
-          <a:off x="0" y="0"/>
-          <a:ext cx="0" cy="0"/>
-          <a:chOff x="0" y="0"/>
-          <a:chExt cx="0" cy="0"/>
-        </a:xfrm>
-      </p:grpSpPr>
-      <p:sp>
-        <p:nvSpPr>
-          <p:cNvPr id="97" name="Google Shape;97;p3:notes"/>
-          <p:cNvSpPr txBox="1">
-            <a:spLocks noGrp="1"/>
-          </p:cNvSpPr>
-          <p:nvPr>
-            <p:ph type="body" idx="1"/>
-          </p:nvPr>
-        </p:nvSpPr>
-        <p:spPr>
-          <a:xfrm>
-            <a:off x="685800" y="4343400"/>
-            <a:ext cx="5486400" cy="4114800"/>
-          </a:xfrm>
-          <a:prstGeom prst="rect">
-            <a:avLst/>
-          </a:prstGeom>
-        </p:spPr>
-        <p:txBody>
-          <a:bodyPr spcFirstLastPara="1" wrap="square" lIns="91425" tIns="91425" rIns="91425" bIns="91425" anchor="t" anchorCtr="0">
-            <a:noAutofit/>
-          </a:bodyPr>
-          <a:lstStyle/>
-          <a:p>
-            <a:pPr marL="0" lvl="0" indent="0" algn="l" rtl="0">
-              <a:spcBef>
-                <a:spcPts val="0"/>
-              </a:spcBef>
-              <a:spcAft>
-                <a:spcPts val="0"/>
-              </a:spcAft>
-              <a:buNone/>
-            </a:pPr>
-            <a:endParaRPr/>
-          </a:p>
-        </p:txBody>
-      </p:sp>
-      <p:sp>
-        <p:nvSpPr>
-          <p:cNvPr id="98" name="Google Shape;98;p3:notes"/>
-          <p:cNvSpPr>
-            <a:spLocks noGrp="1" noRot="1" noChangeAspect="1"/>
-          </p:cNvSpPr>
-          <p:nvPr>
-            <p:ph type="sldImg" idx="2"/>
-          </p:nvPr>
-        </p:nvSpPr>
-        <p:spPr>
-          <a:xfrm>
-            <a:off x="381000" y="685800"/>
-            <a:ext cx="6096000" cy="3429000"/>
-          </a:xfrm>
-          <a:custGeom>
-            <a:avLst/>
-            <a:gdLst/>
-            <a:ahLst/>
-            <a:cxnLst/>
-            <a:rect l="l" t="t" r="r" b="b"/>
-            <a:pathLst>
-              <a:path w="120000" h="120000" extrusionOk="0">
-                <a:moveTo>
-                  <a:pt x="0" y="0"/>
-                </a:moveTo>
-                <a:lnTo>
-                  <a:pt x="120000" y="0"/>
-                </a:lnTo>
-                <a:lnTo>
-                  <a:pt x="120000" y="120000"/>
-                </a:lnTo>
-                <a:lnTo>
-                  <a:pt x="0" y="120000"/>
-                </a:lnTo>
-                <a:close/>
-              </a:path>
-            </a:pathLst>
-          </a:custGeom>
-        </p:spPr>
-      </p:sp>
-    </p:spTree>
-  </p:cSld>
-  <p:clrMapOvr>
-    <a:masterClrMapping/>
-  </p:clrMapOvr>
-</p:notes>
-</file>
-
-<file path=ppt/notesSlides/notesSlide30.xml><?xml version="1.0" encoding="utf-8"?>
+<file path=ppt/notesSlides/notesSlide23.xml><?xml version="1.0" encoding="utf-8"?>
 <p:notes xmlns:a="http://schemas.openxmlformats.org/drawingml/2006/main" xmlns:r="http://schemas.openxmlformats.org/officeDocument/2006/relationships" xmlns:p="http://schemas.openxmlformats.org/presentationml/2006/main" showMasterSp="0" showMasterPhAnim="0">
   <p:cSld>
     <p:spTree>
@@ -3274,7 +2415,7 @@
 </p:notes>
 </file>
 
-<file path=ppt/notesSlides/notesSlide31.xml><?xml version="1.0" encoding="utf-8"?>
+<file path=ppt/notesSlides/notesSlide24.xml><?xml version="1.0" encoding="utf-8"?>
 <p:notes xmlns:a="http://schemas.openxmlformats.org/drawingml/2006/main" xmlns:r="http://schemas.openxmlformats.org/officeDocument/2006/relationships" xmlns:p="http://schemas.openxmlformats.org/presentationml/2006/main" showMasterSp="0" showMasterPhAnim="0">
   <p:cSld>
     <p:spTree>
@@ -3376,6 +2517,110 @@
         <p14:creationId xmlns:p14="http://schemas.microsoft.com/office/powerpoint/2010/main" val="1961491990"/>
       </p:ext>
     </p:extLst>
+  </p:cSld>
+  <p:clrMapOvr>
+    <a:masterClrMapping/>
+  </p:clrMapOvr>
+</p:notes>
+</file>
+
+<file path=ppt/notesSlides/notesSlide3.xml><?xml version="1.0" encoding="utf-8"?>
+<p:notes xmlns:a="http://schemas.openxmlformats.org/drawingml/2006/main" xmlns:r="http://schemas.openxmlformats.org/officeDocument/2006/relationships" xmlns:p="http://schemas.openxmlformats.org/presentationml/2006/main" showMasterSp="0" showMasterPhAnim="0">
+  <p:cSld>
+    <p:spTree>
+      <p:nvGrpSpPr>
+        <p:cNvPr id="1" name="Shape 96"/>
+        <p:cNvGrpSpPr/>
+        <p:nvPr/>
+      </p:nvGrpSpPr>
+      <p:grpSpPr>
+        <a:xfrm>
+          <a:off x="0" y="0"/>
+          <a:ext cx="0" cy="0"/>
+          <a:chOff x="0" y="0"/>
+          <a:chExt cx="0" cy="0"/>
+        </a:xfrm>
+      </p:grpSpPr>
+      <p:sp>
+        <p:nvSpPr>
+          <p:cNvPr id="97" name="Google Shape;97;p3:notes"/>
+          <p:cNvSpPr txBox="1">
+            <a:spLocks noGrp="1"/>
+          </p:cNvSpPr>
+          <p:nvPr>
+            <p:ph type="body" idx="1"/>
+          </p:nvPr>
+        </p:nvSpPr>
+        <p:spPr>
+          <a:xfrm>
+            <a:off x="685800" y="4343400"/>
+            <a:ext cx="5486400" cy="4114800"/>
+          </a:xfrm>
+          <a:prstGeom prst="rect">
+            <a:avLst/>
+          </a:prstGeom>
+        </p:spPr>
+        <p:txBody>
+          <a:bodyPr spcFirstLastPara="1" wrap="square" lIns="91425" tIns="91425" rIns="91425" bIns="91425" anchor="t" anchorCtr="0">
+            <a:noAutofit/>
+          </a:bodyPr>
+          <a:lstStyle/>
+          <a:p>
+            <a:pPr marL="0" lvl="0" indent="0" algn="l" rtl="0">
+              <a:spcBef>
+                <a:spcPts val="0"/>
+              </a:spcBef>
+              <a:spcAft>
+                <a:spcPts val="0"/>
+              </a:spcAft>
+              <a:buNone/>
+            </a:pPr>
+            <a:endParaRPr/>
+          </a:p>
+        </p:txBody>
+      </p:sp>
+      <p:sp>
+        <p:nvSpPr>
+          <p:cNvPr id="98" name="Google Shape;98;p3:notes"/>
+          <p:cNvSpPr>
+            <a:spLocks noGrp="1" noRot="1" noChangeAspect="1"/>
+          </p:cNvSpPr>
+          <p:nvPr>
+            <p:ph type="sldImg" idx="2"/>
+          </p:nvPr>
+        </p:nvSpPr>
+        <p:spPr>
+          <a:xfrm>
+            <a:off x="381000" y="685800"/>
+            <a:ext cx="6096000" cy="3429000"/>
+          </a:xfrm>
+          <a:custGeom>
+            <a:avLst/>
+            <a:gdLst/>
+            <a:ahLst/>
+            <a:cxnLst/>
+            <a:rect l="l" t="t" r="r" b="b"/>
+            <a:pathLst>
+              <a:path w="120000" h="120000" extrusionOk="0">
+                <a:moveTo>
+                  <a:pt x="0" y="0"/>
+                </a:moveTo>
+                <a:lnTo>
+                  <a:pt x="120000" y="0"/>
+                </a:lnTo>
+                <a:lnTo>
+                  <a:pt x="120000" y="120000"/>
+                </a:lnTo>
+                <a:lnTo>
+                  <a:pt x="0" y="120000"/>
+                </a:lnTo>
+                <a:close/>
+              </a:path>
+            </a:pathLst>
+          </a:custGeom>
+        </p:spPr>
+      </p:sp>
+    </p:spTree>
   </p:cSld>
   <p:clrMapOvr>
     <a:masterClrMapping/>
@@ -19020,850 +18265,6 @@
   <p:cSld>
     <p:spTree>
       <p:nvGrpSpPr>
-        <p:cNvPr id="1" name="Shape 160"/>
-        <p:cNvGrpSpPr/>
-        <p:nvPr/>
-      </p:nvGrpSpPr>
-      <p:grpSpPr>
-        <a:xfrm>
-          <a:off x="0" y="0"/>
-          <a:ext cx="0" cy="0"/>
-          <a:chOff x="0" y="0"/>
-          <a:chExt cx="0" cy="0"/>
-        </a:xfrm>
-      </p:grpSpPr>
-      <p:sp>
-        <p:nvSpPr>
-          <p:cNvPr id="161" name="Google Shape;161;p9"/>
-          <p:cNvSpPr txBox="1">
-            <a:spLocks noGrp="1"/>
-          </p:cNvSpPr>
-          <p:nvPr>
-            <p:ph type="title"/>
-          </p:nvPr>
-        </p:nvSpPr>
-        <p:spPr>
-          <a:xfrm>
-            <a:off x="535732" y="1857015"/>
-            <a:ext cx="4471902" cy="3065223"/>
-          </a:xfrm>
-          <a:prstGeom prst="rect">
-            <a:avLst/>
-          </a:prstGeom>
-          <a:noFill/>
-          <a:ln>
-            <a:noFill/>
-          </a:ln>
-        </p:spPr>
-        <p:txBody>
-          <a:bodyPr spcFirstLastPara="1" wrap="square" lIns="91425" tIns="45700" rIns="91425" bIns="45700" anchor="ctr" anchorCtr="0">
-            <a:normAutofit/>
-          </a:bodyPr>
-          <a:lstStyle/>
-          <a:p>
-            <a:pPr marL="0" lvl="0" indent="0" algn="l" rtl="0">
-              <a:lnSpc>
-                <a:spcPct val="90000"/>
-              </a:lnSpc>
-              <a:spcBef>
-                <a:spcPts val="0"/>
-              </a:spcBef>
-              <a:spcAft>
-                <a:spcPts val="0"/>
-              </a:spcAft>
-              <a:buClr>
-                <a:schemeClr val="dk1"/>
-              </a:buClr>
-              <a:buSzPts val="4400"/>
-              <a:buFont typeface="Calibri"/>
-              <a:buNone/>
-            </a:pPr>
-            <a:r>
-              <a:rPr lang="pt-BR"/>
-              <a:t>Componentização e arquitetura do projeto</a:t>
-            </a:r>
-            <a:endParaRPr/>
-          </a:p>
-        </p:txBody>
-      </p:sp>
-      <p:sp>
-        <p:nvSpPr>
-          <p:cNvPr id="162" name="Google Shape;162;p9"/>
-          <p:cNvSpPr txBox="1">
-            <a:spLocks noGrp="1"/>
-          </p:cNvSpPr>
-          <p:nvPr>
-            <p:ph type="body" idx="1"/>
-          </p:nvPr>
-        </p:nvSpPr>
-        <p:spPr>
-          <a:xfrm>
-            <a:off x="5007634" y="833588"/>
-            <a:ext cx="3727993" cy="4262195"/>
-          </a:xfrm>
-          <a:prstGeom prst="rect">
-            <a:avLst/>
-          </a:prstGeom>
-          <a:noFill/>
-          <a:ln>
-            <a:noFill/>
-          </a:ln>
-        </p:spPr>
-        <p:txBody>
-          <a:bodyPr spcFirstLastPara="1" wrap="square" lIns="91425" tIns="45700" rIns="91425" bIns="45700" anchor="t" anchorCtr="0">
-            <a:normAutofit/>
-          </a:bodyPr>
-          <a:lstStyle/>
-          <a:p>
-            <a:pPr marL="285750" lvl="0" indent="-285750" algn="l" rtl="0">
-              <a:lnSpc>
-                <a:spcPct val="90000"/>
-              </a:lnSpc>
-              <a:spcBef>
-                <a:spcPts val="0"/>
-              </a:spcBef>
-              <a:spcAft>
-                <a:spcPts val="0"/>
-              </a:spcAft>
-              <a:buClr>
-                <a:schemeClr val="dk1"/>
-              </a:buClr>
-              <a:buSzPts val="2000"/>
-              <a:buFont typeface="Arial"/>
-              <a:buChar char="•"/>
-            </a:pPr>
-            <a:r>
-              <a:rPr lang="pt-BR" sz="2000"/>
-              <a:t>Para que serve componentização?</a:t>
-            </a:r>
-            <a:endParaRPr/>
-          </a:p>
-          <a:p>
-            <a:pPr marL="742950" lvl="1" indent="-285750" algn="l" rtl="0">
-              <a:lnSpc>
-                <a:spcPct val="90000"/>
-              </a:lnSpc>
-              <a:spcBef>
-                <a:spcPts val="500"/>
-              </a:spcBef>
-              <a:spcAft>
-                <a:spcPts val="0"/>
-              </a:spcAft>
-              <a:buClr>
-                <a:schemeClr val="dk1"/>
-              </a:buClr>
-              <a:buSzPts val="2000"/>
-              <a:buFont typeface="Arial"/>
-              <a:buChar char="•"/>
-            </a:pPr>
-            <a:r>
-              <a:rPr lang="pt-BR" sz="2000"/>
-              <a:t>Reutilização de trechos de código; </a:t>
-            </a:r>
-            <a:endParaRPr/>
-          </a:p>
-          <a:p>
-            <a:pPr marL="742950" lvl="1" indent="-285750" algn="l" rtl="0">
-              <a:lnSpc>
-                <a:spcPct val="90000"/>
-              </a:lnSpc>
-              <a:spcBef>
-                <a:spcPts val="500"/>
-              </a:spcBef>
-              <a:spcAft>
-                <a:spcPts val="0"/>
-              </a:spcAft>
-              <a:buClr>
-                <a:schemeClr val="dk1"/>
-              </a:buClr>
-              <a:buSzPts val="2000"/>
-              <a:buFont typeface="Arial"/>
-              <a:buChar char="•"/>
-            </a:pPr>
-            <a:r>
-              <a:rPr lang="pt-BR" sz="2000"/>
-              <a:t>Isolamento de contexto; </a:t>
-            </a:r>
-            <a:endParaRPr/>
-          </a:p>
-          <a:p>
-            <a:pPr marL="742950" lvl="1" indent="-285750" algn="l" rtl="0">
-              <a:lnSpc>
-                <a:spcPct val="90000"/>
-              </a:lnSpc>
-              <a:spcBef>
-                <a:spcPts val="500"/>
-              </a:spcBef>
-              <a:spcAft>
-                <a:spcPts val="0"/>
-              </a:spcAft>
-              <a:buClr>
-                <a:schemeClr val="dk1"/>
-              </a:buClr>
-              <a:buSzPts val="2000"/>
-              <a:buFont typeface="Arial"/>
-              <a:buChar char="•"/>
-            </a:pPr>
-            <a:r>
-              <a:rPr lang="pt-BR" sz="2000"/>
-              <a:t>Legibilidade do código; </a:t>
-            </a:r>
-            <a:endParaRPr/>
-          </a:p>
-          <a:p>
-            <a:pPr marL="742950" lvl="1" indent="-285750" algn="l" rtl="0">
-              <a:lnSpc>
-                <a:spcPct val="90000"/>
-              </a:lnSpc>
-              <a:spcBef>
-                <a:spcPts val="500"/>
-              </a:spcBef>
-              <a:spcAft>
-                <a:spcPts val="0"/>
-              </a:spcAft>
-              <a:buClr>
-                <a:schemeClr val="dk1"/>
-              </a:buClr>
-              <a:buSzPts val="2000"/>
-              <a:buFont typeface="Arial"/>
-              <a:buChar char="•"/>
-            </a:pPr>
-            <a:r>
-              <a:rPr lang="pt-BR" sz="2000"/>
-              <a:t>Padronização do projeto;</a:t>
-            </a:r>
-            <a:endParaRPr/>
-          </a:p>
-          <a:p>
-            <a:pPr marL="228600" lvl="0" indent="-50800" algn="l" rtl="0">
-              <a:lnSpc>
-                <a:spcPct val="90000"/>
-              </a:lnSpc>
-              <a:spcBef>
-                <a:spcPts val="1000"/>
-              </a:spcBef>
-              <a:spcAft>
-                <a:spcPts val="0"/>
-              </a:spcAft>
-              <a:buClr>
-                <a:schemeClr val="dk1"/>
-              </a:buClr>
-              <a:buSzPts val="2800"/>
-              <a:buNone/>
-            </a:pPr>
-            <a:endParaRPr/>
-          </a:p>
-        </p:txBody>
-      </p:sp>
-      <p:pic>
-        <p:nvPicPr>
-          <p:cNvPr id="163" name="Google Shape;163;p9" descr="Logo serratec"/>
-          <p:cNvPicPr preferRelativeResize="0"/>
-          <p:nvPr/>
-        </p:nvPicPr>
-        <p:blipFill rotWithShape="1">
-          <a:blip r:embed="rId3">
-            <a:alphaModFix/>
-          </a:blip>
-          <a:srcRect l="5903" t="9853" r="73623" b="82599"/>
-          <a:stretch/>
-        </p:blipFill>
-        <p:spPr>
-          <a:xfrm>
-            <a:off x="535732" y="827354"/>
-            <a:ext cx="2513301" cy="517948"/>
-          </a:xfrm>
-          <a:prstGeom prst="rect">
-            <a:avLst/>
-          </a:prstGeom>
-          <a:noFill/>
-          <a:ln>
-            <a:noFill/>
-          </a:ln>
-        </p:spPr>
-      </p:pic>
-      <p:pic>
-        <p:nvPicPr>
-          <p:cNvPr id="164" name="Google Shape;164;p9" descr="Faixa azul em formato de onda preenchendo o fim do slide"/>
-          <p:cNvPicPr preferRelativeResize="0"/>
-          <p:nvPr/>
-        </p:nvPicPr>
-        <p:blipFill rotWithShape="1">
-          <a:blip r:embed="rId3">
-            <a:alphaModFix/>
-          </a:blip>
-          <a:srcRect l="-821" t="72746" b="-838"/>
-          <a:stretch/>
-        </p:blipFill>
-        <p:spPr>
-          <a:xfrm>
-            <a:off x="-86915" y="5000985"/>
-            <a:ext cx="12278915" cy="1927709"/>
-          </a:xfrm>
-          <a:prstGeom prst="rect">
-            <a:avLst/>
-          </a:prstGeom>
-          <a:noFill/>
-          <a:ln>
-            <a:noFill/>
-          </a:ln>
-        </p:spPr>
-      </p:pic>
-      <p:sp>
-        <p:nvSpPr>
-          <p:cNvPr id="165" name="Google Shape;165;p9"/>
-          <p:cNvSpPr txBox="1"/>
-          <p:nvPr/>
-        </p:nvSpPr>
-        <p:spPr>
-          <a:xfrm>
-            <a:off x="8238186" y="831732"/>
-            <a:ext cx="3727993" cy="3785652"/>
-          </a:xfrm>
-          <a:prstGeom prst="rect">
-            <a:avLst/>
-          </a:prstGeom>
-          <a:noFill/>
-          <a:ln>
-            <a:noFill/>
-          </a:ln>
-        </p:spPr>
-        <p:txBody>
-          <a:bodyPr spcFirstLastPara="1" wrap="square" lIns="91425" tIns="45700" rIns="91425" bIns="45700" anchor="t" anchorCtr="0">
-            <a:spAutoFit/>
-          </a:bodyPr>
-          <a:lstStyle/>
-          <a:p>
-            <a:pPr marL="285750" marR="0" lvl="0" indent="-285750" algn="l" rtl="0">
-              <a:spcBef>
-                <a:spcPts val="0"/>
-              </a:spcBef>
-              <a:spcAft>
-                <a:spcPts val="0"/>
-              </a:spcAft>
-              <a:buClr>
-                <a:schemeClr val="dk1"/>
-              </a:buClr>
-              <a:buSzPts val="2000"/>
-              <a:buFont typeface="Arial"/>
-              <a:buChar char="•"/>
-            </a:pPr>
-            <a:r>
-              <a:rPr lang="pt-BR" sz="2000" dirty="0">
-                <a:solidFill>
-                  <a:schemeClr val="dk1"/>
-                </a:solidFill>
-                <a:latin typeface="Calibri"/>
-                <a:ea typeface="Calibri"/>
-                <a:cs typeface="Calibri"/>
-                <a:sym typeface="Calibri"/>
-              </a:rPr>
-              <a:t>Arquitetura de Projeto:</a:t>
-            </a:r>
-            <a:endParaRPr dirty="0"/>
-          </a:p>
-          <a:p>
-            <a:pPr marL="742950" marR="0" lvl="1" indent="-285750" algn="l" rtl="0">
-              <a:spcBef>
-                <a:spcPts val="0"/>
-              </a:spcBef>
-              <a:spcAft>
-                <a:spcPts val="0"/>
-              </a:spcAft>
-              <a:buClr>
-                <a:schemeClr val="dk1"/>
-              </a:buClr>
-              <a:buSzPts val="2000"/>
-              <a:buFont typeface="Arial"/>
-              <a:buChar char="•"/>
-            </a:pPr>
-            <a:r>
-              <a:rPr lang="pt-BR" sz="2000" b="0" i="0" u="none" strike="noStrike" cap="none" dirty="0">
-                <a:solidFill>
-                  <a:schemeClr val="dk1"/>
-                </a:solidFill>
-                <a:latin typeface="Calibri"/>
-                <a:ea typeface="Calibri"/>
-                <a:cs typeface="Calibri"/>
-                <a:sym typeface="Calibri"/>
-              </a:rPr>
-              <a:t>└── /</a:t>
-            </a:r>
-            <a:r>
-              <a:rPr lang="pt-BR" sz="2000" b="0" i="0" u="none" strike="noStrike" cap="none" dirty="0" err="1">
-                <a:solidFill>
-                  <a:schemeClr val="dk1"/>
-                </a:solidFill>
-                <a:latin typeface="Calibri"/>
-                <a:ea typeface="Calibri"/>
-                <a:cs typeface="Calibri"/>
-                <a:sym typeface="Calibri"/>
-              </a:rPr>
-              <a:t>src</a:t>
-            </a:r>
-            <a:endParaRPr sz="2000" b="0" i="0" u="none" strike="noStrike" cap="none" dirty="0">
-              <a:solidFill>
-                <a:schemeClr val="dk1"/>
-              </a:solidFill>
-              <a:latin typeface="Calibri"/>
-              <a:ea typeface="Calibri"/>
-              <a:cs typeface="Calibri"/>
-              <a:sym typeface="Calibri"/>
-            </a:endParaRPr>
-          </a:p>
-          <a:p>
-            <a:pPr marL="742950" marR="0" lvl="1" indent="-285750" algn="l" rtl="0">
-              <a:spcBef>
-                <a:spcPts val="0"/>
-              </a:spcBef>
-              <a:spcAft>
-                <a:spcPts val="0"/>
-              </a:spcAft>
-              <a:buClr>
-                <a:schemeClr val="dk1"/>
-              </a:buClr>
-              <a:buSzPts val="2000"/>
-              <a:buFont typeface="Arial"/>
-              <a:buChar char="•"/>
-            </a:pPr>
-            <a:r>
-              <a:rPr lang="pt-BR" sz="2000" b="0" i="0" u="none" strike="noStrike" cap="none" dirty="0">
-                <a:solidFill>
-                  <a:schemeClr val="dk1"/>
-                </a:solidFill>
-                <a:latin typeface="Calibri"/>
-                <a:ea typeface="Calibri"/>
-                <a:cs typeface="Calibri"/>
-                <a:sym typeface="Calibri"/>
-              </a:rPr>
-              <a:t>    ├── /@types</a:t>
-            </a:r>
-            <a:endParaRPr dirty="0"/>
-          </a:p>
-          <a:p>
-            <a:pPr marL="742950" marR="0" lvl="1" indent="-285750" algn="l" rtl="0">
-              <a:spcBef>
-                <a:spcPts val="0"/>
-              </a:spcBef>
-              <a:spcAft>
-                <a:spcPts val="0"/>
-              </a:spcAft>
-              <a:buClr>
-                <a:schemeClr val="dk1"/>
-              </a:buClr>
-              <a:buSzPts val="2000"/>
-              <a:buFont typeface="Arial"/>
-              <a:buChar char="•"/>
-            </a:pPr>
-            <a:r>
-              <a:rPr lang="pt-BR" sz="2000" b="0" i="0" u="none" strike="noStrike" cap="none" dirty="0">
-                <a:solidFill>
-                  <a:schemeClr val="dk1"/>
-                </a:solidFill>
-                <a:latin typeface="Calibri"/>
-                <a:ea typeface="Calibri"/>
-                <a:cs typeface="Calibri"/>
-                <a:sym typeface="Calibri"/>
-              </a:rPr>
-              <a:t>    ├── /</a:t>
-            </a:r>
-            <a:r>
-              <a:rPr lang="pt-BR" sz="2000" b="0" i="0" u="none" strike="noStrike" cap="none" dirty="0" err="1">
-                <a:solidFill>
-                  <a:schemeClr val="dk1"/>
-                </a:solidFill>
-                <a:latin typeface="Calibri"/>
-                <a:ea typeface="Calibri"/>
-                <a:cs typeface="Calibri"/>
-                <a:sym typeface="Calibri"/>
-              </a:rPr>
-              <a:t>assets</a:t>
-            </a:r>
-            <a:endParaRPr sz="2000" b="0" i="0" u="none" strike="noStrike" cap="none" dirty="0">
-              <a:solidFill>
-                <a:schemeClr val="dk1"/>
-              </a:solidFill>
-              <a:latin typeface="Calibri"/>
-              <a:ea typeface="Calibri"/>
-              <a:cs typeface="Calibri"/>
-              <a:sym typeface="Calibri"/>
-            </a:endParaRPr>
-          </a:p>
-          <a:p>
-            <a:pPr marL="742950" marR="0" lvl="1" indent="-285750" algn="l" rtl="0">
-              <a:spcBef>
-                <a:spcPts val="0"/>
-              </a:spcBef>
-              <a:spcAft>
-                <a:spcPts val="0"/>
-              </a:spcAft>
-              <a:buClr>
-                <a:schemeClr val="dk1"/>
-              </a:buClr>
-              <a:buSzPts val="2000"/>
-              <a:buFont typeface="Arial"/>
-              <a:buChar char="•"/>
-            </a:pPr>
-            <a:r>
-              <a:rPr lang="pt-BR" sz="2000" b="0" i="0" u="none" strike="noStrike" cap="none" dirty="0">
-                <a:solidFill>
-                  <a:schemeClr val="dk1"/>
-                </a:solidFill>
-                <a:latin typeface="Calibri"/>
-                <a:ea typeface="Calibri"/>
-                <a:cs typeface="Calibri"/>
-                <a:sym typeface="Calibri"/>
-              </a:rPr>
-              <a:t>    ├── /</a:t>
-            </a:r>
-            <a:r>
-              <a:rPr lang="pt-BR" sz="2000" b="0" i="0" u="none" strike="noStrike" cap="none" dirty="0" err="1">
-                <a:solidFill>
-                  <a:schemeClr val="dk1"/>
-                </a:solidFill>
-                <a:latin typeface="Calibri"/>
-                <a:ea typeface="Calibri"/>
-                <a:cs typeface="Calibri"/>
-                <a:sym typeface="Calibri"/>
-              </a:rPr>
-              <a:t>components</a:t>
-            </a:r>
-            <a:endParaRPr sz="2000" b="0" i="0" u="none" strike="noStrike" cap="none" dirty="0">
-              <a:solidFill>
-                <a:schemeClr val="dk1"/>
-              </a:solidFill>
-              <a:latin typeface="Calibri"/>
-              <a:ea typeface="Calibri"/>
-              <a:cs typeface="Calibri"/>
-              <a:sym typeface="Calibri"/>
-            </a:endParaRPr>
-          </a:p>
-          <a:p>
-            <a:pPr marL="742950" marR="0" lvl="1" indent="-285750" algn="l" rtl="0">
-              <a:spcBef>
-                <a:spcPts val="0"/>
-              </a:spcBef>
-              <a:spcAft>
-                <a:spcPts val="0"/>
-              </a:spcAft>
-              <a:buClr>
-                <a:schemeClr val="dk1"/>
-              </a:buClr>
-              <a:buSzPts val="2000"/>
-              <a:buFont typeface="Arial"/>
-              <a:buChar char="•"/>
-            </a:pPr>
-            <a:r>
-              <a:rPr lang="pt-BR" sz="2000" b="0" i="0" u="none" strike="noStrike" cap="none" dirty="0">
-                <a:solidFill>
-                  <a:schemeClr val="dk1"/>
-                </a:solidFill>
-                <a:latin typeface="Calibri"/>
-                <a:ea typeface="Calibri"/>
-                <a:cs typeface="Calibri"/>
-                <a:sym typeface="Calibri"/>
-              </a:rPr>
-              <a:t>    ├── /context</a:t>
-            </a:r>
-            <a:endParaRPr sz="2000" b="0" i="0" u="none" strike="noStrike" cap="none" dirty="0">
-              <a:solidFill>
-                <a:schemeClr val="dk1"/>
-              </a:solidFill>
-              <a:latin typeface="Calibri"/>
-              <a:ea typeface="Calibri"/>
-              <a:cs typeface="Calibri"/>
-              <a:sym typeface="Calibri"/>
-            </a:endParaRPr>
-          </a:p>
-          <a:p>
-            <a:pPr marL="742950" marR="0" lvl="1" indent="-285750" algn="l" rtl="0">
-              <a:spcBef>
-                <a:spcPts val="0"/>
-              </a:spcBef>
-              <a:spcAft>
-                <a:spcPts val="0"/>
-              </a:spcAft>
-              <a:buClr>
-                <a:schemeClr val="dk1"/>
-              </a:buClr>
-              <a:buSzPts val="2000"/>
-              <a:buFont typeface="Arial"/>
-              <a:buChar char="•"/>
-            </a:pPr>
-            <a:r>
-              <a:rPr lang="pt-BR" sz="2000" b="0" i="0" u="none" strike="noStrike" cap="none" dirty="0">
-                <a:solidFill>
-                  <a:schemeClr val="dk1"/>
-                </a:solidFill>
-                <a:latin typeface="Calibri"/>
-                <a:ea typeface="Calibri"/>
-                <a:cs typeface="Calibri"/>
-                <a:sym typeface="Calibri"/>
-              </a:rPr>
-              <a:t>    ├── /</a:t>
-            </a:r>
-            <a:r>
-              <a:rPr lang="pt-BR" sz="2000" b="0" i="0" u="none" strike="noStrike" cap="none" dirty="0" err="1">
-                <a:solidFill>
-                  <a:schemeClr val="dk1"/>
-                </a:solidFill>
-                <a:latin typeface="Calibri"/>
-                <a:ea typeface="Calibri"/>
-                <a:cs typeface="Calibri"/>
-                <a:sym typeface="Calibri"/>
-              </a:rPr>
-              <a:t>hooks</a:t>
-            </a:r>
-            <a:r>
-              <a:rPr lang="pt-BR" sz="2000" b="0" i="0" u="none" strike="noStrike" cap="none" dirty="0">
-                <a:solidFill>
-                  <a:schemeClr val="dk1"/>
-                </a:solidFill>
-                <a:latin typeface="Calibri"/>
-                <a:ea typeface="Calibri"/>
-                <a:cs typeface="Calibri"/>
-                <a:sym typeface="Calibri"/>
-              </a:rPr>
-              <a:t> || </a:t>
-            </a:r>
-            <a:r>
-              <a:rPr lang="pt-BR" sz="2000" b="0" i="0" u="none" strike="noStrike" cap="none" dirty="0" err="1">
-                <a:solidFill>
-                  <a:schemeClr val="dk1"/>
-                </a:solidFill>
-                <a:latin typeface="Calibri"/>
-                <a:ea typeface="Calibri"/>
-                <a:cs typeface="Calibri"/>
-                <a:sym typeface="Calibri"/>
-              </a:rPr>
-              <a:t>functions</a:t>
-            </a:r>
-            <a:endParaRPr sz="2000" b="0" i="0" u="none" strike="noStrike" cap="none" dirty="0">
-              <a:solidFill>
-                <a:schemeClr val="dk1"/>
-              </a:solidFill>
-              <a:latin typeface="Calibri"/>
-              <a:ea typeface="Calibri"/>
-              <a:cs typeface="Calibri"/>
-              <a:sym typeface="Calibri"/>
-            </a:endParaRPr>
-          </a:p>
-          <a:p>
-            <a:pPr marL="742950" marR="0" lvl="1" indent="-285750" algn="l" rtl="0">
-              <a:spcBef>
-                <a:spcPts val="0"/>
-              </a:spcBef>
-              <a:spcAft>
-                <a:spcPts val="0"/>
-              </a:spcAft>
-              <a:buClr>
-                <a:schemeClr val="dk1"/>
-              </a:buClr>
-              <a:buSzPts val="2000"/>
-              <a:buFont typeface="Arial"/>
-              <a:buChar char="•"/>
-            </a:pPr>
-            <a:r>
-              <a:rPr lang="pt-BR" sz="2000" b="0" i="0" u="none" strike="noStrike" cap="none" dirty="0">
-                <a:solidFill>
-                  <a:schemeClr val="dk1"/>
-                </a:solidFill>
-                <a:latin typeface="Calibri"/>
-                <a:ea typeface="Calibri"/>
-                <a:cs typeface="Calibri"/>
-                <a:sym typeface="Calibri"/>
-              </a:rPr>
-              <a:t>    ├── /</a:t>
-            </a:r>
-            <a:r>
-              <a:rPr lang="pt-BR" sz="2000" b="0" i="0" u="none" strike="noStrike" cap="none" dirty="0" err="1">
-                <a:solidFill>
-                  <a:schemeClr val="dk1"/>
-                </a:solidFill>
-                <a:latin typeface="Calibri"/>
-                <a:ea typeface="Calibri"/>
-                <a:cs typeface="Calibri"/>
-                <a:sym typeface="Calibri"/>
-              </a:rPr>
-              <a:t>pages</a:t>
-            </a:r>
-            <a:endParaRPr sz="2000" b="0" i="0" u="none" strike="noStrike" cap="none" dirty="0">
-              <a:solidFill>
-                <a:schemeClr val="dk1"/>
-              </a:solidFill>
-              <a:latin typeface="Calibri"/>
-              <a:ea typeface="Calibri"/>
-              <a:cs typeface="Calibri"/>
-              <a:sym typeface="Calibri"/>
-            </a:endParaRPr>
-          </a:p>
-          <a:p>
-            <a:pPr marL="742950" marR="0" lvl="1" indent="-285750" algn="l" rtl="0">
-              <a:spcBef>
-                <a:spcPts val="0"/>
-              </a:spcBef>
-              <a:spcAft>
-                <a:spcPts val="0"/>
-              </a:spcAft>
-              <a:buClr>
-                <a:schemeClr val="dk1"/>
-              </a:buClr>
-              <a:buSzPts val="2000"/>
-              <a:buFont typeface="Arial"/>
-              <a:buChar char="•"/>
-            </a:pPr>
-            <a:r>
-              <a:rPr lang="pt-BR" sz="2000" b="0" i="0" u="none" strike="noStrike" cap="none" dirty="0">
-                <a:solidFill>
-                  <a:schemeClr val="dk1"/>
-                </a:solidFill>
-                <a:latin typeface="Calibri"/>
-                <a:ea typeface="Calibri"/>
-                <a:cs typeface="Calibri"/>
-                <a:sym typeface="Calibri"/>
-              </a:rPr>
-              <a:t>    ├── /services</a:t>
-            </a:r>
-            <a:endParaRPr sz="2000" b="0" i="0" u="none" strike="noStrike" cap="none" dirty="0">
-              <a:solidFill>
-                <a:schemeClr val="dk1"/>
-              </a:solidFill>
-              <a:latin typeface="Calibri"/>
-              <a:ea typeface="Calibri"/>
-              <a:cs typeface="Calibri"/>
-              <a:sym typeface="Calibri"/>
-            </a:endParaRPr>
-          </a:p>
-          <a:p>
-            <a:pPr marL="742950" marR="0" lvl="1" indent="-285750" algn="l" rtl="0">
-              <a:spcBef>
-                <a:spcPts val="0"/>
-              </a:spcBef>
-              <a:spcAft>
-                <a:spcPts val="0"/>
-              </a:spcAft>
-              <a:buClr>
-                <a:schemeClr val="dk1"/>
-              </a:buClr>
-              <a:buSzPts val="2000"/>
-              <a:buFont typeface="Arial"/>
-              <a:buChar char="•"/>
-            </a:pPr>
-            <a:r>
-              <a:rPr lang="pt-BR" sz="2000" b="0" i="0" u="none" strike="noStrike" cap="none" dirty="0">
-                <a:solidFill>
-                  <a:schemeClr val="dk1"/>
-                </a:solidFill>
-                <a:latin typeface="Calibri"/>
-                <a:ea typeface="Calibri"/>
-                <a:cs typeface="Calibri"/>
-                <a:sym typeface="Calibri"/>
-              </a:rPr>
-              <a:t>    ├── /</a:t>
-            </a:r>
-            <a:r>
-              <a:rPr lang="pt-BR" sz="2000" b="0" i="0" u="none" strike="noStrike" cap="none" dirty="0" err="1">
-                <a:solidFill>
-                  <a:schemeClr val="dk1"/>
-                </a:solidFill>
-                <a:latin typeface="Calibri"/>
-                <a:ea typeface="Calibri"/>
-                <a:cs typeface="Calibri"/>
-                <a:sym typeface="Calibri"/>
-              </a:rPr>
-              <a:t>utils</a:t>
-            </a:r>
-            <a:endParaRPr sz="2000" b="0" i="0" u="none" strike="noStrike" cap="none" dirty="0">
-              <a:solidFill>
-                <a:schemeClr val="dk1"/>
-              </a:solidFill>
-              <a:latin typeface="Calibri"/>
-              <a:ea typeface="Calibri"/>
-              <a:cs typeface="Calibri"/>
-              <a:sym typeface="Calibri"/>
-            </a:endParaRPr>
-          </a:p>
-          <a:p>
-            <a:pPr marL="742950" marR="0" lvl="1" indent="-285750" algn="l" rtl="0">
-              <a:spcBef>
-                <a:spcPts val="0"/>
-              </a:spcBef>
-              <a:spcAft>
-                <a:spcPts val="0"/>
-              </a:spcAft>
-              <a:buClr>
-                <a:schemeClr val="dk1"/>
-              </a:buClr>
-              <a:buSzPts val="2000"/>
-              <a:buFont typeface="Arial"/>
-              <a:buChar char="•"/>
-            </a:pPr>
-            <a:r>
-              <a:rPr lang="pt-BR" sz="2000" b="0" i="0" u="none" strike="noStrike" cap="none" dirty="0">
-                <a:solidFill>
-                  <a:schemeClr val="dk1"/>
-                </a:solidFill>
-                <a:latin typeface="Calibri"/>
-                <a:ea typeface="Calibri"/>
-                <a:cs typeface="Calibri"/>
-                <a:sym typeface="Calibri"/>
-              </a:rPr>
-              <a:t>    └── App.js</a:t>
-            </a:r>
-            <a:endParaRPr dirty="0"/>
-          </a:p>
-          <a:p>
-            <a:pPr marL="742950" marR="0" lvl="1" indent="-285750" algn="l" rtl="0">
-              <a:spcBef>
-                <a:spcPts val="0"/>
-              </a:spcBef>
-              <a:spcAft>
-                <a:spcPts val="0"/>
-              </a:spcAft>
-              <a:buClr>
-                <a:schemeClr val="dk1"/>
-              </a:buClr>
-              <a:buSzPts val="2000"/>
-              <a:buFont typeface="Arial"/>
-              <a:buChar char="•"/>
-            </a:pPr>
-            <a:r>
-              <a:rPr lang="pt-BR" sz="2000" b="0" i="0" u="none" strike="noStrike" cap="none" dirty="0">
-                <a:solidFill>
-                  <a:schemeClr val="dk1"/>
-                </a:solidFill>
-                <a:latin typeface="Calibri"/>
-                <a:ea typeface="Calibri"/>
-                <a:cs typeface="Calibri"/>
-                <a:sym typeface="Calibri"/>
-              </a:rPr>
-              <a:t>    ├── index.js</a:t>
-            </a:r>
-            <a:endParaRPr sz="1600" b="0" i="0" u="none" strike="noStrike" cap="none" dirty="0">
-              <a:solidFill>
-                <a:schemeClr val="dk1"/>
-              </a:solidFill>
-              <a:latin typeface="Calibri"/>
-              <a:ea typeface="Calibri"/>
-              <a:cs typeface="Calibri"/>
-              <a:sym typeface="Calibri"/>
-            </a:endParaRPr>
-          </a:p>
-        </p:txBody>
-      </p:sp>
-    </p:spTree>
-  </p:cSld>
-  <p:clrMapOvr>
-    <a:masterClrMapping/>
-  </p:clrMapOvr>
-</p:sld>
-</file>
-
-<file path=ppt/slides/slide19.xml><?xml version="1.0" encoding="utf-8"?>
-<p:sld xmlns:a="http://schemas.openxmlformats.org/drawingml/2006/main" xmlns:r="http://schemas.openxmlformats.org/officeDocument/2006/relationships" xmlns:p="http://schemas.openxmlformats.org/presentationml/2006/main">
-  <p:cSld>
-    <p:spTree>
-      <p:nvGrpSpPr>
         <p:cNvPr id="1" name="Shape 169"/>
         <p:cNvGrpSpPr/>
         <p:nvPr/>
@@ -20532,363 +18933,7 @@
 </p:sld>
 </file>
 
-<file path=ppt/slides/slide2.xml><?xml version="1.0" encoding="utf-8"?>
-<p:sld xmlns:a="http://schemas.openxmlformats.org/drawingml/2006/main" xmlns:r="http://schemas.openxmlformats.org/officeDocument/2006/relationships" xmlns:p="http://schemas.openxmlformats.org/presentationml/2006/main">
-  <p:cSld>
-    <p:spTree>
-      <p:nvGrpSpPr>
-        <p:cNvPr id="1" name="Shape 90"/>
-        <p:cNvGrpSpPr/>
-        <p:nvPr/>
-      </p:nvGrpSpPr>
-      <p:grpSpPr>
-        <a:xfrm>
-          <a:off x="0" y="0"/>
-          <a:ext cx="0" cy="0"/>
-          <a:chOff x="0" y="0"/>
-          <a:chExt cx="0" cy="0"/>
-        </a:xfrm>
-      </p:grpSpPr>
-      <p:sp>
-        <p:nvSpPr>
-          <p:cNvPr id="91" name="Google Shape;91;p2"/>
-          <p:cNvSpPr txBox="1">
-            <a:spLocks noGrp="1"/>
-          </p:cNvSpPr>
-          <p:nvPr>
-            <p:ph type="title"/>
-          </p:nvPr>
-        </p:nvSpPr>
-        <p:spPr>
-          <a:xfrm>
-            <a:off x="4633823" y="365125"/>
-            <a:ext cx="7093788" cy="1339940"/>
-          </a:xfrm>
-          <a:prstGeom prst="rect">
-            <a:avLst/>
-          </a:prstGeom>
-          <a:noFill/>
-          <a:ln>
-            <a:noFill/>
-          </a:ln>
-        </p:spPr>
-        <p:txBody>
-          <a:bodyPr spcFirstLastPara="1" wrap="square" lIns="91425" tIns="45700" rIns="91425" bIns="45700" anchor="ctr" anchorCtr="0">
-            <a:normAutofit/>
-          </a:bodyPr>
-          <a:lstStyle/>
-          <a:p>
-            <a:pPr marL="0" lvl="0" indent="0" algn="l" rtl="0">
-              <a:lnSpc>
-                <a:spcPct val="90000"/>
-              </a:lnSpc>
-              <a:spcBef>
-                <a:spcPts val="0"/>
-              </a:spcBef>
-              <a:spcAft>
-                <a:spcPts val="0"/>
-              </a:spcAft>
-              <a:buClr>
-                <a:schemeClr val="dk1"/>
-              </a:buClr>
-              <a:buSzPts val="4400"/>
-              <a:buFont typeface="Calibri"/>
-              <a:buNone/>
-            </a:pPr>
-            <a:r>
-              <a:rPr lang="pt-BR" dirty="0"/>
-              <a:t>O que é React Native?</a:t>
-            </a:r>
-            <a:endParaRPr dirty="0"/>
-          </a:p>
-        </p:txBody>
-      </p:sp>
-      <p:sp>
-        <p:nvSpPr>
-          <p:cNvPr id="92" name="Google Shape;92;p2"/>
-          <p:cNvSpPr txBox="1">
-            <a:spLocks noGrp="1"/>
-          </p:cNvSpPr>
-          <p:nvPr>
-            <p:ph type="body" idx="1"/>
-          </p:nvPr>
-        </p:nvSpPr>
-        <p:spPr>
-          <a:xfrm>
-            <a:off x="4633823" y="1825625"/>
-            <a:ext cx="7093788" cy="1882309"/>
-          </a:xfrm>
-          <a:prstGeom prst="rect">
-            <a:avLst/>
-          </a:prstGeom>
-          <a:noFill/>
-          <a:ln>
-            <a:noFill/>
-          </a:ln>
-        </p:spPr>
-        <p:txBody>
-          <a:bodyPr spcFirstLastPara="1" wrap="square" lIns="91425" tIns="45700" rIns="91425" bIns="45700" anchor="t" anchorCtr="0">
-            <a:normAutofit/>
-          </a:bodyPr>
-          <a:lstStyle/>
-          <a:p>
-            <a:pPr marL="228600" lvl="0" indent="-228600" algn="l" rtl="0">
-              <a:lnSpc>
-                <a:spcPct val="90000"/>
-              </a:lnSpc>
-              <a:spcBef>
-                <a:spcPts val="0"/>
-              </a:spcBef>
-              <a:spcAft>
-                <a:spcPts val="0"/>
-              </a:spcAft>
-              <a:buClr>
-                <a:schemeClr val="dk1"/>
-              </a:buClr>
-              <a:buSzPts val="2800"/>
-              <a:buChar char="•"/>
-            </a:pPr>
-            <a:r>
-              <a:rPr lang="pt-BR" dirty="0"/>
-              <a:t>É um framework em Javascript para criação de aplicativos.</a:t>
-            </a:r>
-            <a:endParaRPr dirty="0"/>
-          </a:p>
-          <a:p>
-            <a:pPr marL="228600" lvl="0" indent="-228600" algn="l" rtl="0">
-              <a:lnSpc>
-                <a:spcPct val="90000"/>
-              </a:lnSpc>
-              <a:spcBef>
-                <a:spcPts val="1000"/>
-              </a:spcBef>
-              <a:spcAft>
-                <a:spcPts val="0"/>
-              </a:spcAft>
-              <a:buClr>
-                <a:schemeClr val="dk1"/>
-              </a:buClr>
-              <a:buSzPts val="2800"/>
-              <a:buChar char="•"/>
-            </a:pPr>
-            <a:r>
-              <a:rPr lang="pt-BR" dirty="0"/>
-              <a:t>Renderiza de forma nativa aplicativos para sistemas operacionais mobile diferentes.</a:t>
-            </a:r>
-            <a:endParaRPr dirty="0"/>
-          </a:p>
-        </p:txBody>
-      </p:sp>
-      <p:pic>
-        <p:nvPicPr>
-          <p:cNvPr id="93" name="Google Shape;93;p2" descr="Imagem para fundo de slide, faixa azul preenchendo a parte lateral esquerda do slide, formato de onda com logo do Serratec."/>
-          <p:cNvPicPr preferRelativeResize="0"/>
-          <p:nvPr/>
-        </p:nvPicPr>
-        <p:blipFill rotWithShape="1">
-          <a:blip r:embed="rId3">
-            <a:alphaModFix/>
-          </a:blip>
-          <a:srcRect l="-32" t="-65" r="64934" b="65"/>
-          <a:stretch/>
-        </p:blipFill>
-        <p:spPr>
-          <a:xfrm>
-            <a:off x="0" y="1253"/>
-            <a:ext cx="4275937" cy="6856747"/>
-          </a:xfrm>
-          <a:prstGeom prst="rect">
-            <a:avLst/>
-          </a:prstGeom>
-          <a:noFill/>
-          <a:ln>
-            <a:noFill/>
-          </a:ln>
-        </p:spPr>
-      </p:pic>
-      <p:sp>
-        <p:nvSpPr>
-          <p:cNvPr id="94" name="Google Shape;94;p2"/>
-          <p:cNvSpPr txBox="1"/>
-          <p:nvPr/>
-        </p:nvSpPr>
-        <p:spPr>
-          <a:xfrm>
-            <a:off x="4868315" y="4252700"/>
-            <a:ext cx="6040899" cy="1512730"/>
-          </a:xfrm>
-          <a:prstGeom prst="rect">
-            <a:avLst/>
-          </a:prstGeom>
-          <a:noFill/>
-          <a:ln>
-            <a:noFill/>
-          </a:ln>
-        </p:spPr>
-        <p:txBody>
-          <a:bodyPr spcFirstLastPara="1" wrap="square" lIns="91425" tIns="45700" rIns="91425" bIns="45700" anchor="t" anchorCtr="0">
-            <a:normAutofit fontScale="92500" lnSpcReduction="10000"/>
-          </a:bodyPr>
-          <a:lstStyle/>
-          <a:p>
-            <a:pPr marL="0" marR="0" lvl="0" indent="0" algn="l" rtl="0">
-              <a:lnSpc>
-                <a:spcPct val="90000"/>
-              </a:lnSpc>
-              <a:spcBef>
-                <a:spcPts val="0"/>
-              </a:spcBef>
-              <a:spcAft>
-                <a:spcPts val="0"/>
-              </a:spcAft>
-              <a:buClr>
-                <a:schemeClr val="dk1"/>
-              </a:buClr>
-              <a:buSzPct val="100000"/>
-              <a:buFont typeface="Arial"/>
-              <a:buNone/>
-            </a:pPr>
-            <a:r>
-              <a:rPr lang="pt-BR" sz="1800" b="0" i="0" u="none" strike="noStrike" cap="none" dirty="0">
-                <a:solidFill>
-                  <a:schemeClr val="dk1"/>
-                </a:solidFill>
-                <a:latin typeface="Calibri"/>
-                <a:ea typeface="Calibri"/>
-                <a:cs typeface="Calibri"/>
-                <a:sym typeface="Calibri"/>
-              </a:rPr>
-              <a:t>*Renderizar de forma nativa significa que ele traduz o código de Javascript para o código que é utilizado no sistema operacional. </a:t>
-            </a:r>
-            <a:endParaRPr sz="900" dirty="0"/>
-          </a:p>
-          <a:p>
-            <a:pPr marL="0" marR="0" lvl="0" indent="0" algn="l" rtl="0">
-              <a:lnSpc>
-                <a:spcPct val="90000"/>
-              </a:lnSpc>
-              <a:spcBef>
-                <a:spcPts val="1000"/>
-              </a:spcBef>
-              <a:spcAft>
-                <a:spcPts val="0"/>
-              </a:spcAft>
-              <a:buClr>
-                <a:schemeClr val="dk1"/>
-              </a:buClr>
-              <a:buSzPct val="100000"/>
-              <a:buFont typeface="Arial"/>
-              <a:buNone/>
-            </a:pPr>
-            <a:r>
-              <a:rPr lang="pt-BR" sz="1800" b="0" i="0" u="none" strike="noStrike" cap="none" dirty="0">
-                <a:solidFill>
-                  <a:schemeClr val="dk1"/>
-                </a:solidFill>
-                <a:latin typeface="Calibri"/>
-                <a:ea typeface="Calibri"/>
-                <a:cs typeface="Calibri"/>
-                <a:sym typeface="Calibri"/>
-              </a:rPr>
-              <a:t>Exemplo: Android é codado em Kotlin(JAVA) e IOS é codado em Swift(Linguagem própria Apple). Codando em React Native você coda um código só para os diversos ambientes de mobiles.</a:t>
-            </a:r>
-            <a:br>
-              <a:rPr lang="pt-BR" sz="1800" b="0" i="0" u="none" strike="noStrike" cap="none" dirty="0">
-                <a:solidFill>
-                  <a:schemeClr val="dk1"/>
-                </a:solidFill>
-                <a:latin typeface="Calibri"/>
-                <a:ea typeface="Calibri"/>
-                <a:cs typeface="Calibri"/>
-                <a:sym typeface="Calibri"/>
-              </a:rPr>
-            </a:br>
-            <a:endParaRPr sz="1600" b="0" i="0" u="none" strike="noStrike" cap="none" dirty="0">
-              <a:solidFill>
-                <a:schemeClr val="dk1"/>
-              </a:solidFill>
-              <a:latin typeface="Calibri"/>
-              <a:ea typeface="Calibri"/>
-              <a:cs typeface="Calibri"/>
-              <a:sym typeface="Calibri"/>
-            </a:endParaRPr>
-          </a:p>
-        </p:txBody>
-      </p:sp>
-      <p:sp>
-        <p:nvSpPr>
-          <p:cNvPr id="95" name="Google Shape;95;p2"/>
-          <p:cNvSpPr txBox="1"/>
-          <p:nvPr/>
-        </p:nvSpPr>
-        <p:spPr>
-          <a:xfrm>
-            <a:off x="4841505" y="6123543"/>
-            <a:ext cx="6094520" cy="369332"/>
-          </a:xfrm>
-          <a:prstGeom prst="rect">
-            <a:avLst/>
-          </a:prstGeom>
-          <a:noFill/>
-          <a:ln>
-            <a:noFill/>
-          </a:ln>
-        </p:spPr>
-        <p:txBody>
-          <a:bodyPr spcFirstLastPara="1" wrap="square" lIns="91425" tIns="45700" rIns="91425" bIns="45700" anchor="t" anchorCtr="0">
-            <a:spAutoFit/>
-          </a:bodyPr>
-          <a:lstStyle/>
-          <a:p>
-            <a:pPr marL="0" marR="0" lvl="0" indent="0" algn="l" rtl="0">
-              <a:spcBef>
-                <a:spcPts val="0"/>
-              </a:spcBef>
-              <a:spcAft>
-                <a:spcPts val="0"/>
-              </a:spcAft>
-              <a:buNone/>
-            </a:pPr>
-            <a:r>
-              <a:rPr lang="pt-BR" sz="1800" b="0" i="0" u="sng" strike="noStrike" cap="none" dirty="0">
-                <a:solidFill>
-                  <a:schemeClr val="dk1"/>
-                </a:solidFill>
-                <a:latin typeface="Calibri"/>
-                <a:ea typeface="Calibri"/>
-                <a:cs typeface="Calibri"/>
-                <a:sym typeface="Calibri"/>
-                <a:hlinkClick r:id="rId4">
-                  <a:extLst>
-                    <a:ext uri="{A12FA001-AC4F-418D-AE19-62706E023703}">
-                      <ahyp:hlinkClr xmlns:ahyp="http://schemas.microsoft.com/office/drawing/2018/hyperlinkcolor" val="tx"/>
-                    </a:ext>
-                  </a:extLst>
-                </a:hlinkClick>
-              </a:rPr>
-              <a:t>https://reactnative.dev/</a:t>
-            </a:r>
-            <a:endParaRPr sz="1800" dirty="0">
-              <a:solidFill>
-                <a:schemeClr val="dk1"/>
-              </a:solidFill>
-              <a:latin typeface="Calibri"/>
-              <a:ea typeface="Calibri"/>
-              <a:cs typeface="Calibri"/>
-              <a:sym typeface="Calibri"/>
-            </a:endParaRPr>
-          </a:p>
-        </p:txBody>
-      </p:sp>
-    </p:spTree>
-  </p:cSld>
-  <p:clrMapOvr>
-    <a:masterClrMapping/>
-  </p:clrMapOvr>
-</p:sld>
-</file>
-
-<file path=ppt/slides/slide20.xml><?xml version="1.0" encoding="utf-8"?>
+<file path=ppt/slides/slide19.xml><?xml version="1.0" encoding="utf-8"?>
 <p:sld xmlns:a="http://schemas.openxmlformats.org/drawingml/2006/main" xmlns:r="http://schemas.openxmlformats.org/officeDocument/2006/relationships" xmlns:p="http://schemas.openxmlformats.org/presentationml/2006/main">
   <p:cSld>
     <p:spTree>
@@ -21603,12 +19648,12 @@
 </p:sld>
 </file>
 
-<file path=ppt/slides/slide21.xml><?xml version="1.0" encoding="utf-8"?>
+<file path=ppt/slides/slide2.xml><?xml version="1.0" encoding="utf-8"?>
 <p:sld xmlns:a="http://schemas.openxmlformats.org/drawingml/2006/main" xmlns:r="http://schemas.openxmlformats.org/officeDocument/2006/relationships" xmlns:p="http://schemas.openxmlformats.org/presentationml/2006/main">
   <p:cSld>
     <p:spTree>
       <p:nvGrpSpPr>
-        <p:cNvPr id="1" name="Shape 190"/>
+        <p:cNvPr id="1" name="Shape 90"/>
         <p:cNvGrpSpPr/>
         <p:nvPr/>
       </p:nvGrpSpPr>
@@ -21622,7 +19667,7 @@
       </p:grpSpPr>
       <p:sp>
         <p:nvSpPr>
-          <p:cNvPr id="191" name="Google Shape;191;p12"/>
+          <p:cNvPr id="91" name="Google Shape;91;p2"/>
           <p:cNvSpPr txBox="1">
             <a:spLocks noGrp="1"/>
           </p:cNvSpPr>
@@ -21632,8 +19677,8 @@
         </p:nvSpPr>
         <p:spPr>
           <a:xfrm>
-            <a:off x="0" y="313784"/>
-            <a:ext cx="12192000" cy="958993"/>
+            <a:off x="4633823" y="365125"/>
+            <a:ext cx="7093788" cy="1339940"/>
           </a:xfrm>
           <a:prstGeom prst="rect">
             <a:avLst/>
@@ -21649,7 +19694,7 @@
           </a:bodyPr>
           <a:lstStyle/>
           <a:p>
-            <a:pPr marL="0" lvl="0" indent="0" algn="ctr" rtl="0">
+            <a:pPr marL="0" lvl="0" indent="0" algn="l" rtl="0">
               <a:lnSpc>
                 <a:spcPct val="90000"/>
               </a:lnSpc>
@@ -21667,34 +19712,27 @@
               <a:buNone/>
             </a:pPr>
             <a:r>
-              <a:rPr lang="pt-BR" sz="4800" dirty="0"/>
-              <a:t>Requisições</a:t>
-            </a:r>
-            <a:r>
               <a:rPr lang="pt-BR" dirty="0"/>
-              <a:t> a API</a:t>
+              <a:t>O que é React Native?</a:t>
             </a:r>
             <a:endParaRPr dirty="0"/>
           </a:p>
         </p:txBody>
       </p:sp>
-      <p:pic>
-        <p:nvPicPr>
-          <p:cNvPr id="192" name="Google Shape;192;p12" descr="Logo serratec"/>
-          <p:cNvPicPr preferRelativeResize="0"/>
-          <p:nvPr/>
-        </p:nvPicPr>
-        <p:blipFill rotWithShape="1">
-          <a:blip r:embed="rId3">
-            <a:alphaModFix/>
-          </a:blip>
-          <a:srcRect l="5903" t="9853" r="73623" b="82599"/>
-          <a:stretch/>
-        </p:blipFill>
+      <p:sp>
+        <p:nvSpPr>
+          <p:cNvPr id="92" name="Google Shape;92;p2"/>
+          <p:cNvSpPr txBox="1">
+            <a:spLocks noGrp="1"/>
+          </p:cNvSpPr>
+          <p:nvPr>
+            <p:ph type="body" idx="1"/>
+          </p:nvPr>
+        </p:nvSpPr>
         <p:spPr>
           <a:xfrm>
-            <a:off x="507404" y="548339"/>
-            <a:ext cx="2513301" cy="517948"/>
+            <a:off x="4633823" y="1825625"/>
+            <a:ext cx="7093788" cy="1882309"/>
           </a:xfrm>
           <a:prstGeom prst="rect">
             <a:avLst/>
@@ -21704,10 +19742,62 @@
             <a:noFill/>
           </a:ln>
         </p:spPr>
-      </p:pic>
+        <p:txBody>
+          <a:bodyPr spcFirstLastPara="1" wrap="square" lIns="91425" tIns="45700" rIns="91425" bIns="45700" anchor="t" anchorCtr="0">
+            <a:normAutofit/>
+          </a:bodyPr>
+          <a:lstStyle/>
+          <a:p>
+            <a:pPr marL="228600" lvl="0" indent="-228600" algn="l" rtl="0">
+              <a:lnSpc>
+                <a:spcPct val="90000"/>
+              </a:lnSpc>
+              <a:spcBef>
+                <a:spcPts val="0"/>
+              </a:spcBef>
+              <a:spcAft>
+                <a:spcPts val="0"/>
+              </a:spcAft>
+              <a:buClr>
+                <a:schemeClr val="dk1"/>
+              </a:buClr>
+              <a:buSzPts val="2800"/>
+              <a:buChar char="•"/>
+            </a:pPr>
+            <a:r>
+              <a:rPr lang="pt-BR" dirty="0"/>
+              <a:t>É um framework em Javascript para criação de aplicativos.</a:t>
+            </a:r>
+            <a:endParaRPr dirty="0"/>
+          </a:p>
+          <a:p>
+            <a:pPr marL="228600" lvl="0" indent="-228600" algn="l" rtl="0">
+              <a:lnSpc>
+                <a:spcPct val="90000"/>
+              </a:lnSpc>
+              <a:spcBef>
+                <a:spcPts val="1000"/>
+              </a:spcBef>
+              <a:spcAft>
+                <a:spcPts val="0"/>
+              </a:spcAft>
+              <a:buClr>
+                <a:schemeClr val="dk1"/>
+              </a:buClr>
+              <a:buSzPts val="2800"/>
+              <a:buChar char="•"/>
+            </a:pPr>
+            <a:r>
+              <a:rPr lang="pt-BR" dirty="0"/>
+              <a:t>Renderiza de forma nativa aplicativos para sistemas operacionais mobile diferentes.</a:t>
+            </a:r>
+            <a:endParaRPr dirty="0"/>
+          </a:p>
+        </p:txBody>
+      </p:sp>
       <p:pic>
         <p:nvPicPr>
-          <p:cNvPr id="193" name="Google Shape;193;p12" descr="Faixa azul em formato de onda preenchendo o fim do slide"/>
+          <p:cNvPr id="93" name="Google Shape;93;p2" descr="Imagem para fundo de slide, faixa azul preenchendo a parte lateral esquerda do slide, formato de onda com logo do Serratec."/>
           <p:cNvPicPr preferRelativeResize="0"/>
           <p:nvPr/>
         </p:nvPicPr>
@@ -21715,13 +19805,13 @@
           <a:blip r:embed="rId3">
             <a:alphaModFix/>
           </a:blip>
-          <a:srcRect l="-821" t="72746" b="-838"/>
+          <a:srcRect l="-32" t="-65" r="64934" b="65"/>
           <a:stretch/>
         </p:blipFill>
         <p:spPr>
           <a:xfrm>
-            <a:off x="-86915" y="5651612"/>
-            <a:ext cx="12278915" cy="1277082"/>
+            <a:off x="0" y="1253"/>
+            <a:ext cx="4275937" cy="6856747"/>
           </a:xfrm>
           <a:prstGeom prst="rect">
             <a:avLst/>
@@ -21734,14 +19824,123 @@
       </p:pic>
       <p:sp>
         <p:nvSpPr>
-          <p:cNvPr id="194" name="Google Shape;194;p12"/>
+          <p:cNvPr id="94" name="Google Shape;94;p2"/>
           <p:cNvSpPr txBox="1"/>
           <p:nvPr/>
         </p:nvSpPr>
         <p:spPr>
           <a:xfrm>
-            <a:off x="507404" y="1504173"/>
-            <a:ext cx="8120624" cy="885371"/>
+            <a:off x="4868315" y="4252700"/>
+            <a:ext cx="6040899" cy="1512730"/>
+          </a:xfrm>
+          <a:prstGeom prst="rect">
+            <a:avLst/>
+          </a:prstGeom>
+          <a:noFill/>
+          <a:ln>
+            <a:noFill/>
+          </a:ln>
+        </p:spPr>
+        <p:txBody>
+          <a:bodyPr spcFirstLastPara="1" wrap="square" lIns="91425" tIns="45700" rIns="91425" bIns="45700" anchor="t" anchorCtr="0">
+            <a:normAutofit fontScale="92500" lnSpcReduction="10000"/>
+          </a:bodyPr>
+          <a:lstStyle/>
+          <a:p>
+            <a:pPr marL="0" marR="0" lvl="0" indent="0" algn="l" rtl="0">
+              <a:lnSpc>
+                <a:spcPct val="90000"/>
+              </a:lnSpc>
+              <a:spcBef>
+                <a:spcPts val="0"/>
+              </a:spcBef>
+              <a:spcAft>
+                <a:spcPts val="0"/>
+              </a:spcAft>
+              <a:buClr>
+                <a:schemeClr val="dk1"/>
+              </a:buClr>
+              <a:buSzPct val="100000"/>
+              <a:buFont typeface="Arial"/>
+              <a:buNone/>
+            </a:pPr>
+            <a:r>
+              <a:rPr lang="pt-BR" sz="1800" b="0" i="0" u="none" strike="noStrike" cap="none" dirty="0">
+                <a:solidFill>
+                  <a:schemeClr val="dk1"/>
+                </a:solidFill>
+                <a:latin typeface="Calibri"/>
+                <a:ea typeface="Calibri"/>
+                <a:cs typeface="Calibri"/>
+                <a:sym typeface="Calibri"/>
+              </a:rPr>
+              <a:t>*Renderizar de forma nativa significa que ele traduz o código de Javascript para o código que é utilizado no sistema operacional. </a:t>
+            </a:r>
+            <a:endParaRPr sz="900" dirty="0"/>
+          </a:p>
+          <a:p>
+            <a:pPr marL="0" marR="0" lvl="0" indent="0" algn="l" rtl="0">
+              <a:lnSpc>
+                <a:spcPct val="90000"/>
+              </a:lnSpc>
+              <a:spcBef>
+                <a:spcPts val="1000"/>
+              </a:spcBef>
+              <a:spcAft>
+                <a:spcPts val="0"/>
+              </a:spcAft>
+              <a:buClr>
+                <a:schemeClr val="dk1"/>
+              </a:buClr>
+              <a:buSzPct val="100000"/>
+              <a:buFont typeface="Arial"/>
+              <a:buNone/>
+            </a:pPr>
+            <a:r>
+              <a:rPr lang="pt-BR" sz="1800" b="0" i="0" u="none" strike="noStrike" cap="none" dirty="0">
+                <a:solidFill>
+                  <a:schemeClr val="dk1"/>
+                </a:solidFill>
+                <a:latin typeface="Calibri"/>
+                <a:ea typeface="Calibri"/>
+                <a:cs typeface="Calibri"/>
+                <a:sym typeface="Calibri"/>
+              </a:rPr>
+              <a:t>Exemplo: Android é codado em Kotlin(JAVA) e IOS é codado em Swift(Linguagem própria Apple). Codando em React Native você coda um código só para os diversos ambientes de mobiles.</a:t>
+            </a:r>
+            <a:br>
+              <a:rPr lang="pt-BR" sz="1800" b="0" i="0" u="none" strike="noStrike" cap="none" dirty="0">
+                <a:solidFill>
+                  <a:schemeClr val="dk1"/>
+                </a:solidFill>
+                <a:latin typeface="Calibri"/>
+                <a:ea typeface="Calibri"/>
+                <a:cs typeface="Calibri"/>
+                <a:sym typeface="Calibri"/>
+              </a:rPr>
+            </a:br>
+            <a:endParaRPr sz="1600" b="0" i="0" u="none" strike="noStrike" cap="none" dirty="0">
+              <a:solidFill>
+                <a:schemeClr val="dk1"/>
+              </a:solidFill>
+              <a:latin typeface="Calibri"/>
+              <a:ea typeface="Calibri"/>
+              <a:cs typeface="Calibri"/>
+              <a:sym typeface="Calibri"/>
+            </a:endParaRPr>
+          </a:p>
+        </p:txBody>
+      </p:sp>
+      <p:sp>
+        <p:nvSpPr>
+          <p:cNvPr id="95" name="Google Shape;95;p2"/>
+          <p:cNvSpPr txBox="1"/>
+          <p:nvPr/>
+        </p:nvSpPr>
+        <p:spPr>
+          <a:xfrm>
+            <a:off x="4841505" y="6123543"/>
+            <a:ext cx="6094520" cy="369332"/>
           </a:xfrm>
           <a:prstGeom prst="rect">
             <a:avLst/>
@@ -21757,10 +19956,7 @@
           </a:bodyPr>
           <a:lstStyle/>
           <a:p>
-            <a:pPr marL="36900" marR="0" lvl="0" indent="0" algn="l" rtl="0">
-              <a:lnSpc>
-                <a:spcPct val="90000"/>
-              </a:lnSpc>
+            <a:pPr marL="0" marR="0" lvl="0" indent="0" algn="l" rtl="0">
               <a:spcBef>
                 <a:spcPts val="0"/>
               </a:spcBef>
@@ -21770,19 +19966,7 @@
               <a:buNone/>
             </a:pPr>
             <a:r>
-              <a:rPr lang="pt-BR" sz="1600" dirty="0">
-                <a:solidFill>
-                  <a:schemeClr val="dk1"/>
-                </a:solidFill>
-                <a:latin typeface="Calibri"/>
-                <a:ea typeface="Calibri"/>
-                <a:cs typeface="Calibri"/>
-                <a:sym typeface="Calibri"/>
-              </a:rPr>
-              <a:t>É possível fazer requisições sem nenhuma biblioteca externa, porém a biblioteca axios ajuda muito. </a:t>
-            </a:r>
-            <a:r>
-              <a:rPr lang="pt-BR" sz="1600" u="sng" dirty="0">
+              <a:rPr lang="pt-BR" sz="1800" b="0" i="0" u="sng" strike="noStrike" cap="none" dirty="0">
                 <a:solidFill>
                   <a:schemeClr val="dk1"/>
                 </a:solidFill>
@@ -21798,182 +19982,9 @@
                   </a:extLst>
                 </a:hlinkClick>
               </a:rPr>
-              <a:t>https://github.com/</a:t>
+              <a:t>https://reactnative.dev/</a:t>
             </a:r>
-            <a:r>
-              <a:rPr lang="pt-BR" sz="1600" u="sng" dirty="0" err="1">
-                <a:solidFill>
-                  <a:schemeClr val="dk1"/>
-                </a:solidFill>
-                <a:latin typeface="Calibri"/>
-                <a:ea typeface="Calibri"/>
-                <a:cs typeface="Calibri"/>
-                <a:sym typeface="Calibri"/>
-                <a:hlinkClick r:id="rId4">
-                  <a:extLst>
-                    <a:ext uri="{A12FA001-AC4F-418D-AE19-62706E023703}">
-                      <ahyp:hlinkClr xmlns:ahyp="http://schemas.microsoft.com/office/drawing/2018/hyperlinkcolor" val="tx"/>
-                    </a:ext>
-                  </a:extLst>
-                </a:hlinkClick>
-              </a:rPr>
-              <a:t>qiangmao</a:t>
-            </a:r>
-            <a:r>
-              <a:rPr lang="pt-BR" sz="1600" u="sng" dirty="0">
-                <a:solidFill>
-                  <a:schemeClr val="dk1"/>
-                </a:solidFill>
-                <a:latin typeface="Calibri"/>
-                <a:ea typeface="Calibri"/>
-                <a:cs typeface="Calibri"/>
-                <a:sym typeface="Calibri"/>
-                <a:hlinkClick r:id="rId4">
-                  <a:extLst>
-                    <a:ext uri="{A12FA001-AC4F-418D-AE19-62706E023703}">
-                      <ahyp:hlinkClr xmlns:ahyp="http://schemas.microsoft.com/office/drawing/2018/hyperlinkcolor" val="tx"/>
-                    </a:ext>
-                  </a:extLst>
-                </a:hlinkClick>
-              </a:rPr>
-              <a:t>/axios</a:t>
-            </a:r>
-            <a:r>
-              <a:rPr lang="pt-BR" sz="1600" dirty="0">
-                <a:solidFill>
-                  <a:schemeClr val="dk1"/>
-                </a:solidFill>
-                <a:latin typeface="Calibri"/>
-                <a:ea typeface="Calibri"/>
-                <a:cs typeface="Calibri"/>
-                <a:sym typeface="Calibri"/>
-              </a:rPr>
-              <a:t>.</a:t>
-            </a:r>
-            <a:endParaRPr dirty="0"/>
-          </a:p>
-          <a:p>
-            <a:pPr marL="36900" marR="0" lvl="0" indent="0" algn="l" rtl="0">
-              <a:lnSpc>
-                <a:spcPct val="90000"/>
-              </a:lnSpc>
-              <a:spcBef>
-                <a:spcPts val="1000"/>
-              </a:spcBef>
-              <a:spcAft>
-                <a:spcPts val="0"/>
-              </a:spcAft>
-              <a:buNone/>
-            </a:pPr>
-            <a:r>
-              <a:rPr lang="pt-BR" sz="1600" dirty="0">
-                <a:solidFill>
-                  <a:schemeClr val="dk1"/>
-                </a:solidFill>
-                <a:latin typeface="Calibri"/>
-                <a:ea typeface="Calibri"/>
-                <a:cs typeface="Calibri"/>
-                <a:sym typeface="Calibri"/>
-              </a:rPr>
-              <a:t>Após a instalação, são necessários 3 passos:</a:t>
-            </a:r>
-            <a:endParaRPr dirty="0"/>
-          </a:p>
-        </p:txBody>
-      </p:sp>
-      <p:sp>
-        <p:nvSpPr>
-          <p:cNvPr id="195" name="Google Shape;195;p12"/>
-          <p:cNvSpPr txBox="1"/>
-          <p:nvPr/>
-        </p:nvSpPr>
-        <p:spPr>
-          <a:xfrm>
-            <a:off x="507404" y="2545504"/>
-            <a:ext cx="3012074" cy="2400617"/>
-          </a:xfrm>
-          <a:prstGeom prst="rect">
-            <a:avLst/>
-          </a:prstGeom>
-          <a:noFill/>
-          <a:ln>
-            <a:noFill/>
-          </a:ln>
-        </p:spPr>
-        <p:txBody>
-          <a:bodyPr spcFirstLastPara="1" wrap="square" lIns="91425" tIns="45700" rIns="91425" bIns="45700" anchor="t" anchorCtr="0">
-            <a:spAutoFit/>
-          </a:bodyPr>
-          <a:lstStyle/>
-          <a:p>
-            <a:pPr marL="0" marR="0" lvl="0" indent="0" algn="l" rtl="0">
-              <a:spcBef>
-                <a:spcPts val="0"/>
-              </a:spcBef>
-              <a:spcAft>
-                <a:spcPts val="0"/>
-              </a:spcAft>
-              <a:buNone/>
-            </a:pPr>
-            <a:r>
-              <a:rPr lang="pt-BR" sz="2000" b="1" dirty="0">
-                <a:solidFill>
-                  <a:schemeClr val="dk1"/>
-                </a:solidFill>
-                <a:latin typeface="Calibri"/>
-                <a:ea typeface="Calibri"/>
-                <a:cs typeface="Calibri"/>
-                <a:sym typeface="Calibri"/>
-              </a:rPr>
-              <a:t>Criar a base URL</a:t>
-            </a:r>
-            <a:endParaRPr dirty="0"/>
-          </a:p>
-          <a:p>
-            <a:pPr marL="36900" marR="0" lvl="0" indent="0" algn="l" rtl="0">
-              <a:spcBef>
-                <a:spcPts val="0"/>
-              </a:spcBef>
-              <a:spcAft>
-                <a:spcPts val="0"/>
-              </a:spcAft>
-              <a:buClr>
-                <a:schemeClr val="dk1"/>
-              </a:buClr>
-              <a:buSzPts val="2000"/>
-              <a:buFont typeface="Noto Sans Symbols"/>
-              <a:buNone/>
-            </a:pPr>
-            <a:r>
-              <a:rPr lang="pt-BR" sz="2000" dirty="0">
-                <a:solidFill>
-                  <a:schemeClr val="dk1"/>
-                </a:solidFill>
-                <a:latin typeface="Calibri"/>
-                <a:ea typeface="Calibri"/>
-                <a:cs typeface="Calibri"/>
-                <a:sym typeface="Calibri"/>
-              </a:rPr>
-              <a:t> import axios from "axios";</a:t>
-            </a:r>
-            <a:endParaRPr dirty="0"/>
-          </a:p>
-          <a:p>
-            <a:pPr marL="36900" marR="0" lvl="0" indent="0" algn="l" rtl="0">
-              <a:spcBef>
-                <a:spcPts val="0"/>
-              </a:spcBef>
-              <a:spcAft>
-                <a:spcPts val="0"/>
-              </a:spcAft>
-              <a:buClr>
-                <a:schemeClr val="dk1"/>
-              </a:buClr>
-              <a:buSzPts val="2000"/>
-              <a:buFont typeface="Noto Sans Symbols"/>
-              <a:buNone/>
-            </a:pPr>
-            <a:endParaRPr sz="2000" dirty="0">
+            <a:endParaRPr sz="1800" dirty="0">
               <a:solidFill>
                 <a:schemeClr val="dk1"/>
               </a:solidFill>
@@ -21982,635 +19993,6 @@
               <a:cs typeface="Calibri"/>
               <a:sym typeface="Calibri"/>
             </a:endParaRPr>
-          </a:p>
-          <a:p>
-            <a:pPr marL="36900" marR="0" lvl="0" indent="0" algn="l" rtl="0">
-              <a:spcBef>
-                <a:spcPts val="0"/>
-              </a:spcBef>
-              <a:spcAft>
-                <a:spcPts val="0"/>
-              </a:spcAft>
-              <a:buClr>
-                <a:schemeClr val="dk1"/>
-              </a:buClr>
-              <a:buSzPts val="1800"/>
-              <a:buFont typeface="Noto Sans Symbols"/>
-              <a:buNone/>
-            </a:pPr>
-            <a:r>
-              <a:rPr lang="pt-BR" sz="1800" dirty="0">
-                <a:solidFill>
-                  <a:schemeClr val="dk1"/>
-                </a:solidFill>
-                <a:latin typeface="Calibri"/>
-                <a:ea typeface="Calibri"/>
-                <a:cs typeface="Calibri"/>
-                <a:sym typeface="Calibri"/>
-              </a:rPr>
-              <a:t>const baseApi = axios.create({</a:t>
-            </a:r>
-            <a:endParaRPr dirty="0"/>
-          </a:p>
-          <a:p>
-            <a:pPr marL="36900" marR="0" lvl="0" indent="0" algn="l" rtl="0">
-              <a:spcBef>
-                <a:spcPts val="0"/>
-              </a:spcBef>
-              <a:spcAft>
-                <a:spcPts val="0"/>
-              </a:spcAft>
-              <a:buClr>
-                <a:schemeClr val="dk1"/>
-              </a:buClr>
-              <a:buSzPts val="1800"/>
-              <a:buFont typeface="Noto Sans Symbols"/>
-              <a:buNone/>
-            </a:pPr>
-            <a:r>
-              <a:rPr lang="pt-BR" sz="1800" dirty="0">
-                <a:solidFill>
-                  <a:schemeClr val="dk1"/>
-                </a:solidFill>
-                <a:latin typeface="Calibri"/>
-                <a:ea typeface="Calibri"/>
-                <a:cs typeface="Calibri"/>
-                <a:sym typeface="Calibri"/>
-              </a:rPr>
-              <a:t>    baseURL: 'https://www.linkdaAPI.com/api',</a:t>
-            </a:r>
-            <a:endParaRPr dirty="0"/>
-          </a:p>
-          <a:p>
-            <a:pPr marL="36900" marR="0" lvl="0" indent="0" algn="l" rtl="0">
-              <a:spcBef>
-                <a:spcPts val="0"/>
-              </a:spcBef>
-              <a:spcAft>
-                <a:spcPts val="0"/>
-              </a:spcAft>
-              <a:buClr>
-                <a:schemeClr val="dk1"/>
-              </a:buClr>
-              <a:buSzPts val="1800"/>
-              <a:buFont typeface="Noto Sans Symbols"/>
-              <a:buNone/>
-            </a:pPr>
-            <a:r>
-              <a:rPr lang="pt-BR" sz="1800" dirty="0">
-                <a:solidFill>
-                  <a:schemeClr val="dk1"/>
-                </a:solidFill>
-                <a:latin typeface="Calibri"/>
-                <a:ea typeface="Calibri"/>
-                <a:cs typeface="Calibri"/>
-                <a:sym typeface="Calibri"/>
-              </a:rPr>
-              <a:t>});</a:t>
-            </a:r>
-            <a:endParaRPr dirty="0"/>
-          </a:p>
-        </p:txBody>
-      </p:sp>
-      <p:sp>
-        <p:nvSpPr>
-          <p:cNvPr id="196" name="Google Shape;196;p12"/>
-          <p:cNvSpPr txBox="1"/>
-          <p:nvPr/>
-        </p:nvSpPr>
-        <p:spPr>
-          <a:xfrm>
-            <a:off x="4140063" y="2545504"/>
-            <a:ext cx="3189835" cy="2677616"/>
-          </a:xfrm>
-          <a:prstGeom prst="rect">
-            <a:avLst/>
-          </a:prstGeom>
-          <a:noFill/>
-          <a:ln>
-            <a:noFill/>
-          </a:ln>
-        </p:spPr>
-        <p:txBody>
-          <a:bodyPr spcFirstLastPara="1" wrap="square" lIns="91425" tIns="45700" rIns="91425" bIns="45700" anchor="t" anchorCtr="0">
-            <a:spAutoFit/>
-          </a:bodyPr>
-          <a:lstStyle/>
-          <a:p>
-            <a:pPr marL="0" marR="0" lvl="0" indent="0" algn="l" rtl="0">
-              <a:spcBef>
-                <a:spcPts val="0"/>
-              </a:spcBef>
-              <a:spcAft>
-                <a:spcPts val="0"/>
-              </a:spcAft>
-              <a:buNone/>
-            </a:pPr>
-            <a:r>
-              <a:rPr lang="pt-BR" sz="2000" b="1" i="0" dirty="0">
-                <a:solidFill>
-                  <a:srgbClr val="1C1E21"/>
-                </a:solidFill>
-                <a:latin typeface="Arial"/>
-                <a:ea typeface="Arial"/>
-                <a:cs typeface="Arial"/>
-                <a:sym typeface="Arial"/>
-              </a:rPr>
-              <a:t>Fazer o método da requisição</a:t>
-            </a:r>
-            <a:endParaRPr dirty="0"/>
-          </a:p>
-          <a:p>
-            <a:pPr marL="0" marR="0" lvl="0" indent="0" algn="l" rtl="0">
-              <a:spcBef>
-                <a:spcPts val="0"/>
-              </a:spcBef>
-              <a:spcAft>
-                <a:spcPts val="0"/>
-              </a:spcAft>
-              <a:buNone/>
-            </a:pPr>
-            <a:endParaRPr sz="2000" b="1" i="0" dirty="0">
-              <a:solidFill>
-                <a:srgbClr val="1C1E21"/>
-              </a:solidFill>
-              <a:latin typeface="Arial"/>
-              <a:ea typeface="Arial"/>
-              <a:cs typeface="Arial"/>
-              <a:sym typeface="Arial"/>
-            </a:endParaRPr>
-          </a:p>
-          <a:p>
-            <a:pPr marL="36900" marR="0" lvl="0" indent="0" algn="l" rtl="0">
-              <a:spcBef>
-                <a:spcPts val="0"/>
-              </a:spcBef>
-              <a:spcAft>
-                <a:spcPts val="0"/>
-              </a:spcAft>
-              <a:buClr>
-                <a:schemeClr val="dk1"/>
-              </a:buClr>
-              <a:buSzPts val="1800"/>
-              <a:buFont typeface="Noto Sans Symbols"/>
-              <a:buNone/>
-            </a:pPr>
-            <a:r>
-              <a:rPr lang="pt-BR" sz="1800" dirty="0">
-                <a:solidFill>
-                  <a:schemeClr val="dk1"/>
-                </a:solidFill>
-                <a:latin typeface="Calibri"/>
-                <a:ea typeface="Calibri"/>
-                <a:cs typeface="Calibri"/>
-                <a:sym typeface="Calibri"/>
-              </a:rPr>
-              <a:t>export const </a:t>
-            </a:r>
-            <a:r>
-              <a:rPr lang="pt-BR" sz="1800" dirty="0" err="1">
-                <a:solidFill>
-                  <a:schemeClr val="dk1"/>
-                </a:solidFill>
-                <a:latin typeface="Calibri"/>
-                <a:ea typeface="Calibri"/>
-                <a:cs typeface="Calibri"/>
-                <a:sym typeface="Calibri"/>
-              </a:rPr>
-              <a:t>buscaApi</a:t>
-            </a:r>
-            <a:r>
-              <a:rPr lang="pt-BR" sz="1800" dirty="0">
-                <a:solidFill>
-                  <a:schemeClr val="dk1"/>
-                </a:solidFill>
-                <a:latin typeface="Calibri"/>
-                <a:ea typeface="Calibri"/>
-                <a:cs typeface="Calibri"/>
-                <a:sym typeface="Calibri"/>
-              </a:rPr>
-              <a:t> = () =&gt; {</a:t>
-            </a:r>
-            <a:br>
-              <a:rPr lang="pt-BR" sz="1800" dirty="0">
-                <a:solidFill>
-                  <a:schemeClr val="dk1"/>
-                </a:solidFill>
-                <a:latin typeface="Calibri"/>
-                <a:ea typeface="Calibri"/>
-                <a:cs typeface="Calibri"/>
-                <a:sym typeface="Calibri"/>
-              </a:rPr>
-            </a:br>
-            <a:r>
-              <a:rPr lang="pt-BR" sz="1800" dirty="0">
-                <a:solidFill>
-                  <a:schemeClr val="dk1"/>
-                </a:solidFill>
-                <a:latin typeface="Calibri"/>
-                <a:ea typeface="Calibri"/>
-                <a:cs typeface="Calibri"/>
-                <a:sym typeface="Calibri"/>
-              </a:rPr>
-              <a:t>    const url = `${baseURL }/restoDaUrl`;</a:t>
-            </a:r>
-            <a:br>
-              <a:rPr lang="pt-BR" sz="1800" dirty="0">
-                <a:solidFill>
-                  <a:schemeClr val="dk1"/>
-                </a:solidFill>
-                <a:latin typeface="Calibri"/>
-                <a:ea typeface="Calibri"/>
-                <a:cs typeface="Calibri"/>
-                <a:sym typeface="Calibri"/>
-              </a:rPr>
-            </a:br>
-            <a:r>
-              <a:rPr lang="pt-BR" sz="1800" dirty="0">
-                <a:solidFill>
-                  <a:schemeClr val="dk1"/>
-                </a:solidFill>
-                <a:latin typeface="Calibri"/>
-                <a:ea typeface="Calibri"/>
-                <a:cs typeface="Calibri"/>
-                <a:sym typeface="Calibri"/>
-              </a:rPr>
-              <a:t>    return </a:t>
-            </a:r>
-            <a:r>
-              <a:rPr lang="pt-BR" sz="1800" dirty="0" err="1">
-                <a:solidFill>
-                  <a:schemeClr val="dk1"/>
-                </a:solidFill>
-                <a:latin typeface="Calibri"/>
-                <a:ea typeface="Calibri"/>
-                <a:cs typeface="Calibri"/>
-                <a:sym typeface="Calibri"/>
-              </a:rPr>
-              <a:t>baseApi.get</a:t>
-            </a:r>
-            <a:r>
-              <a:rPr lang="pt-BR" sz="1800" dirty="0">
-                <a:solidFill>
-                  <a:schemeClr val="dk1"/>
-                </a:solidFill>
-                <a:latin typeface="Calibri"/>
-                <a:ea typeface="Calibri"/>
-                <a:cs typeface="Calibri"/>
-                <a:sym typeface="Calibri"/>
-              </a:rPr>
-              <a:t>(url);</a:t>
-            </a:r>
-            <a:endParaRPr dirty="0"/>
-          </a:p>
-          <a:p>
-            <a:pPr marL="36900" marR="0" lvl="0" indent="0" algn="l" rtl="0">
-              <a:spcBef>
-                <a:spcPts val="0"/>
-              </a:spcBef>
-              <a:spcAft>
-                <a:spcPts val="0"/>
-              </a:spcAft>
-              <a:buClr>
-                <a:schemeClr val="dk1"/>
-              </a:buClr>
-              <a:buSzPts val="1800"/>
-              <a:buFont typeface="Noto Sans Symbols"/>
-              <a:buNone/>
-            </a:pPr>
-            <a:r>
-              <a:rPr lang="pt-BR" sz="1800" dirty="0">
-                <a:solidFill>
-                  <a:schemeClr val="dk1"/>
-                </a:solidFill>
-                <a:latin typeface="Calibri"/>
-                <a:ea typeface="Calibri"/>
-                <a:cs typeface="Calibri"/>
-                <a:sym typeface="Calibri"/>
-              </a:rPr>
-              <a:t>};</a:t>
-            </a:r>
-            <a:endParaRPr dirty="0"/>
-          </a:p>
-          <a:p>
-            <a:pPr marL="0" marR="0" lvl="0" indent="0" algn="l" rtl="0">
-              <a:spcBef>
-                <a:spcPts val="0"/>
-              </a:spcBef>
-              <a:spcAft>
-                <a:spcPts val="0"/>
-              </a:spcAft>
-              <a:buNone/>
-            </a:pPr>
-            <a:endParaRPr sz="1800" dirty="0">
-              <a:solidFill>
-                <a:schemeClr val="dk1"/>
-              </a:solidFill>
-              <a:latin typeface="Calibri"/>
-              <a:ea typeface="Calibri"/>
-              <a:cs typeface="Calibri"/>
-              <a:sym typeface="Calibri"/>
-            </a:endParaRPr>
-          </a:p>
-        </p:txBody>
-      </p:sp>
-      <p:sp>
-        <p:nvSpPr>
-          <p:cNvPr id="197" name="Google Shape;197;p12"/>
-          <p:cNvSpPr txBox="1"/>
-          <p:nvPr/>
-        </p:nvSpPr>
-        <p:spPr>
-          <a:xfrm>
-            <a:off x="7950483" y="2541361"/>
-            <a:ext cx="3734113" cy="3016170"/>
-          </a:xfrm>
-          <a:prstGeom prst="rect">
-            <a:avLst/>
-          </a:prstGeom>
-          <a:noFill/>
-          <a:ln>
-            <a:noFill/>
-          </a:ln>
-        </p:spPr>
-        <p:txBody>
-          <a:bodyPr spcFirstLastPara="1" wrap="square" lIns="91425" tIns="45700" rIns="91425" bIns="45700" anchor="t" anchorCtr="0">
-            <a:spAutoFit/>
-          </a:bodyPr>
-          <a:lstStyle/>
-          <a:p>
-            <a:pPr marL="0" marR="0" lvl="0" indent="0" algn="l" rtl="0">
-              <a:spcBef>
-                <a:spcPts val="0"/>
-              </a:spcBef>
-              <a:spcAft>
-                <a:spcPts val="0"/>
-              </a:spcAft>
-              <a:buNone/>
-            </a:pPr>
-            <a:r>
-              <a:rPr lang="pt-BR" sz="2000" b="1" dirty="0">
-                <a:solidFill>
-                  <a:schemeClr val="dk1"/>
-                </a:solidFill>
-                <a:latin typeface="Calibri"/>
-                <a:ea typeface="Calibri"/>
-                <a:cs typeface="Calibri"/>
-                <a:sym typeface="Calibri"/>
-              </a:rPr>
-              <a:t>Importar o método e fazer o tratamento da promise</a:t>
-            </a:r>
-            <a:endParaRPr sz="2000" b="1" dirty="0">
-              <a:solidFill>
-                <a:schemeClr val="dk1"/>
-              </a:solidFill>
-              <a:latin typeface="Calibri"/>
-              <a:ea typeface="Calibri"/>
-              <a:cs typeface="Calibri"/>
-              <a:sym typeface="Calibri"/>
-            </a:endParaRPr>
-          </a:p>
-          <a:p>
-            <a:pPr marL="0" marR="0" lvl="0" indent="0" algn="l" rtl="0">
-              <a:spcBef>
-                <a:spcPts val="0"/>
-              </a:spcBef>
-              <a:spcAft>
-                <a:spcPts val="0"/>
-              </a:spcAft>
-              <a:buNone/>
-            </a:pPr>
-            <a:endParaRPr sz="2000" b="1" dirty="0">
-              <a:solidFill>
-                <a:schemeClr val="dk1"/>
-              </a:solidFill>
-              <a:latin typeface="Calibri"/>
-              <a:ea typeface="Calibri"/>
-              <a:cs typeface="Calibri"/>
-              <a:sym typeface="Calibri"/>
-            </a:endParaRPr>
-          </a:p>
-          <a:p>
-            <a:pPr marL="36900" marR="0" lvl="0" indent="0" algn="l" rtl="0">
-              <a:spcBef>
-                <a:spcPts val="0"/>
-              </a:spcBef>
-              <a:spcAft>
-                <a:spcPts val="0"/>
-              </a:spcAft>
-              <a:buNone/>
-            </a:pPr>
-            <a:r>
-              <a:rPr lang="pt-BR" sz="1800" dirty="0" err="1">
-                <a:solidFill>
-                  <a:schemeClr val="dk1"/>
-                </a:solidFill>
-                <a:latin typeface="Calibri"/>
-                <a:ea typeface="Calibri"/>
-                <a:cs typeface="Calibri"/>
-                <a:sym typeface="Calibri"/>
-              </a:rPr>
-              <a:t>buscaApi</a:t>
-            </a:r>
-            <a:r>
-              <a:rPr lang="pt-BR" sz="1800" dirty="0">
-                <a:solidFill>
-                  <a:schemeClr val="dk1"/>
-                </a:solidFill>
-                <a:latin typeface="Calibri"/>
-                <a:ea typeface="Calibri"/>
-                <a:cs typeface="Calibri"/>
-                <a:sym typeface="Calibri"/>
-              </a:rPr>
-              <a:t>().then((res)=&gt;{</a:t>
-            </a:r>
-            <a:endParaRPr dirty="0"/>
-          </a:p>
-          <a:p>
-            <a:pPr marL="36900" marR="0" lvl="0" indent="0" algn="l" rtl="0">
-              <a:spcBef>
-                <a:spcPts val="0"/>
-              </a:spcBef>
-              <a:spcAft>
-                <a:spcPts val="0"/>
-              </a:spcAft>
-              <a:buNone/>
-            </a:pPr>
-            <a:r>
-              <a:rPr lang="pt-BR" sz="1800" dirty="0">
-                <a:solidFill>
-                  <a:schemeClr val="dk1"/>
-                </a:solidFill>
-                <a:latin typeface="Calibri"/>
-                <a:ea typeface="Calibri"/>
-                <a:cs typeface="Calibri"/>
-                <a:sym typeface="Calibri"/>
-              </a:rPr>
-              <a:t>   console.log(res.data)</a:t>
-            </a:r>
-            <a:endParaRPr dirty="0"/>
-          </a:p>
-          <a:p>
-            <a:pPr marL="36900" marR="0" lvl="0" indent="0" algn="l" rtl="0">
-              <a:spcBef>
-                <a:spcPts val="0"/>
-              </a:spcBef>
-              <a:spcAft>
-                <a:spcPts val="0"/>
-              </a:spcAft>
-              <a:buNone/>
-            </a:pPr>
-            <a:r>
-              <a:rPr lang="pt-BR" sz="1800" dirty="0">
-                <a:solidFill>
-                  <a:schemeClr val="dk1"/>
-                </a:solidFill>
-                <a:latin typeface="Calibri"/>
-                <a:ea typeface="Calibri"/>
-                <a:cs typeface="Calibri"/>
-                <a:sym typeface="Calibri"/>
-              </a:rPr>
-              <a:t> }).catch((err)=&gt;{</a:t>
-            </a:r>
-            <a:endParaRPr dirty="0"/>
-          </a:p>
-          <a:p>
-            <a:pPr marL="36900" marR="0" lvl="0" indent="0" algn="l" rtl="0">
-              <a:spcBef>
-                <a:spcPts val="0"/>
-              </a:spcBef>
-              <a:spcAft>
-                <a:spcPts val="0"/>
-              </a:spcAft>
-              <a:buNone/>
-            </a:pPr>
-            <a:r>
-              <a:rPr lang="pt-BR" sz="1800" dirty="0">
-                <a:solidFill>
-                  <a:schemeClr val="dk1"/>
-                </a:solidFill>
-                <a:latin typeface="Calibri"/>
-                <a:ea typeface="Calibri"/>
-                <a:cs typeface="Calibri"/>
-                <a:sym typeface="Calibri"/>
-              </a:rPr>
-              <a:t>   console.log(err)</a:t>
-            </a:r>
-            <a:endParaRPr dirty="0"/>
-          </a:p>
-          <a:p>
-            <a:pPr marL="36900" marR="0" lvl="0" indent="0" algn="l" rtl="0">
-              <a:spcBef>
-                <a:spcPts val="0"/>
-              </a:spcBef>
-              <a:spcAft>
-                <a:spcPts val="0"/>
-              </a:spcAft>
-              <a:buNone/>
-            </a:pPr>
-            <a:r>
-              <a:rPr lang="pt-BR" sz="1800" dirty="0">
-                <a:solidFill>
-                  <a:schemeClr val="dk1"/>
-                </a:solidFill>
-                <a:latin typeface="Calibri"/>
-                <a:ea typeface="Calibri"/>
-                <a:cs typeface="Calibri"/>
-                <a:sym typeface="Calibri"/>
-              </a:rPr>
-              <a:t>});</a:t>
-            </a:r>
-            <a:endParaRPr dirty="0"/>
-          </a:p>
-          <a:p>
-            <a:pPr marL="0" marR="0" lvl="0" indent="0" algn="l" rtl="0">
-              <a:spcBef>
-                <a:spcPts val="0"/>
-              </a:spcBef>
-              <a:spcAft>
-                <a:spcPts val="0"/>
-              </a:spcAft>
-              <a:buNone/>
-            </a:pPr>
-            <a:endParaRPr sz="2000" b="1" dirty="0">
-              <a:solidFill>
-                <a:schemeClr val="dk1"/>
-              </a:solidFill>
-              <a:latin typeface="Calibri"/>
-              <a:ea typeface="Calibri"/>
-              <a:cs typeface="Calibri"/>
-              <a:sym typeface="Calibri"/>
-            </a:endParaRPr>
-          </a:p>
-          <a:p>
-            <a:pPr marL="0" marR="0" lvl="0" indent="0" algn="l" rtl="0">
-              <a:spcBef>
-                <a:spcPts val="0"/>
-              </a:spcBef>
-              <a:spcAft>
-                <a:spcPts val="0"/>
-              </a:spcAft>
-              <a:buNone/>
-            </a:pPr>
-            <a:endParaRPr sz="2000" dirty="0">
-              <a:solidFill>
-                <a:schemeClr val="dk1"/>
-              </a:solidFill>
-              <a:latin typeface="Calibri"/>
-              <a:ea typeface="Calibri"/>
-              <a:cs typeface="Calibri"/>
-              <a:sym typeface="Calibri"/>
-            </a:endParaRPr>
-          </a:p>
-        </p:txBody>
-      </p:sp>
-      <p:sp>
-        <p:nvSpPr>
-          <p:cNvPr id="198" name="Google Shape;198;p12"/>
-          <p:cNvSpPr txBox="1"/>
-          <p:nvPr/>
-        </p:nvSpPr>
-        <p:spPr>
-          <a:xfrm>
-            <a:off x="450843" y="5347979"/>
-            <a:ext cx="7750206" cy="584735"/>
-          </a:xfrm>
-          <a:prstGeom prst="rect">
-            <a:avLst/>
-          </a:prstGeom>
-          <a:noFill/>
-          <a:ln>
-            <a:noFill/>
-          </a:ln>
-        </p:spPr>
-        <p:txBody>
-          <a:bodyPr spcFirstLastPara="1" wrap="square" lIns="91425" tIns="45700" rIns="91425" bIns="45700" anchor="t" anchorCtr="0">
-            <a:spAutoFit/>
-          </a:bodyPr>
-          <a:lstStyle/>
-          <a:p>
-            <a:pPr marL="0" marR="0" lvl="0" indent="0" algn="l" rtl="0">
-              <a:spcBef>
-                <a:spcPts val="0"/>
-              </a:spcBef>
-              <a:spcAft>
-                <a:spcPts val="0"/>
-              </a:spcAft>
-              <a:buNone/>
-            </a:pPr>
-            <a:r>
-              <a:rPr lang="pt-BR" sz="1600" dirty="0">
-                <a:solidFill>
-                  <a:schemeClr val="dk1"/>
-                </a:solidFill>
-                <a:latin typeface="Calibri"/>
-                <a:ea typeface="Calibri"/>
-                <a:cs typeface="Calibri"/>
-                <a:sym typeface="Calibri"/>
-              </a:rPr>
-              <a:t>*o primeiro e segundo passo são feitos na pasta services, e o ultimo passo é feito onde o resultado da requisição será necessário</a:t>
-            </a:r>
-            <a:endParaRPr sz="1200" dirty="0"/>
           </a:p>
         </p:txBody>
       </p:sp>
@@ -22622,2594 +20004,7 @@
 </p:sld>
 </file>
 
-<file path=ppt/slides/slide22.xml><?xml version="1.0" encoding="utf-8"?>
-<p:sld xmlns:a="http://schemas.openxmlformats.org/drawingml/2006/main" xmlns:r="http://schemas.openxmlformats.org/officeDocument/2006/relationships" xmlns:p="http://schemas.openxmlformats.org/presentationml/2006/main">
-  <p:cSld>
-    <p:spTree>
-      <p:nvGrpSpPr>
-        <p:cNvPr id="1" name="Shape 202"/>
-        <p:cNvGrpSpPr/>
-        <p:nvPr/>
-      </p:nvGrpSpPr>
-      <p:grpSpPr>
-        <a:xfrm>
-          <a:off x="0" y="0"/>
-          <a:ext cx="0" cy="0"/>
-          <a:chOff x="0" y="0"/>
-          <a:chExt cx="0" cy="0"/>
-        </a:xfrm>
-      </p:grpSpPr>
-      <p:sp>
-        <p:nvSpPr>
-          <p:cNvPr id="203" name="Google Shape;203;p13"/>
-          <p:cNvSpPr txBox="1">
-            <a:spLocks noGrp="1"/>
-          </p:cNvSpPr>
-          <p:nvPr>
-            <p:ph type="title"/>
-          </p:nvPr>
-        </p:nvSpPr>
-        <p:spPr>
-          <a:xfrm>
-            <a:off x="4669031" y="598546"/>
-            <a:ext cx="2853937" cy="1028968"/>
-          </a:xfrm>
-          <a:prstGeom prst="rect">
-            <a:avLst/>
-          </a:prstGeom>
-          <a:noFill/>
-          <a:ln>
-            <a:noFill/>
-          </a:ln>
-        </p:spPr>
-        <p:txBody>
-          <a:bodyPr spcFirstLastPara="1" wrap="square" lIns="91425" tIns="45700" rIns="91425" bIns="45700" anchor="ctr" anchorCtr="0">
-            <a:normAutofit/>
-          </a:bodyPr>
-          <a:lstStyle/>
-          <a:p>
-            <a:pPr marL="0" lvl="0" indent="0" algn="l" rtl="0">
-              <a:lnSpc>
-                <a:spcPct val="90000"/>
-              </a:lnSpc>
-              <a:spcBef>
-                <a:spcPts val="0"/>
-              </a:spcBef>
-              <a:spcAft>
-                <a:spcPts val="0"/>
-              </a:spcAft>
-              <a:buClr>
-                <a:schemeClr val="dk1"/>
-              </a:buClr>
-              <a:buSzPts val="4400"/>
-              <a:buFont typeface="Calibri"/>
-              <a:buNone/>
-            </a:pPr>
-            <a:r>
-              <a:rPr lang="pt-BR" dirty="0"/>
-              <a:t>Contexto</a:t>
-            </a:r>
-            <a:endParaRPr dirty="0"/>
-          </a:p>
-        </p:txBody>
-      </p:sp>
-      <p:pic>
-        <p:nvPicPr>
-          <p:cNvPr id="204" name="Google Shape;204;p13" descr="Logo serratec"/>
-          <p:cNvPicPr preferRelativeResize="0"/>
-          <p:nvPr/>
-        </p:nvPicPr>
-        <p:blipFill rotWithShape="1">
-          <a:blip r:embed="rId3">
-            <a:alphaModFix/>
-          </a:blip>
-          <a:srcRect l="5903" t="9853" r="73623" b="82599"/>
-          <a:stretch/>
-        </p:blipFill>
-        <p:spPr>
-          <a:xfrm>
-            <a:off x="428208" y="854056"/>
-            <a:ext cx="2513301" cy="517948"/>
-          </a:xfrm>
-          <a:prstGeom prst="rect">
-            <a:avLst/>
-          </a:prstGeom>
-          <a:noFill/>
-          <a:ln>
-            <a:noFill/>
-          </a:ln>
-        </p:spPr>
-      </p:pic>
-      <p:pic>
-        <p:nvPicPr>
-          <p:cNvPr id="205" name="Google Shape;205;p13" descr="Faixa azul em formato de onda preenchendo o fim do slide"/>
-          <p:cNvPicPr preferRelativeResize="0"/>
-          <p:nvPr/>
-        </p:nvPicPr>
-        <p:blipFill rotWithShape="1">
-          <a:blip r:embed="rId3">
-            <a:alphaModFix/>
-          </a:blip>
-          <a:srcRect l="-821" t="72746" b="-838"/>
-          <a:stretch/>
-        </p:blipFill>
-        <p:spPr>
-          <a:xfrm>
-            <a:off x="0" y="5000985"/>
-            <a:ext cx="12192000" cy="1927709"/>
-          </a:xfrm>
-          <a:prstGeom prst="rect">
-            <a:avLst/>
-          </a:prstGeom>
-          <a:noFill/>
-          <a:ln>
-            <a:noFill/>
-          </a:ln>
-        </p:spPr>
-      </p:pic>
-      <p:sp>
-        <p:nvSpPr>
-          <p:cNvPr id="206" name="Google Shape;206;p13"/>
-          <p:cNvSpPr txBox="1"/>
-          <p:nvPr/>
-        </p:nvSpPr>
-        <p:spPr>
-          <a:xfrm>
-            <a:off x="428208" y="1857015"/>
-            <a:ext cx="6221057" cy="3101321"/>
-          </a:xfrm>
-          <a:prstGeom prst="rect">
-            <a:avLst/>
-          </a:prstGeom>
-          <a:noFill/>
-          <a:ln>
-            <a:noFill/>
-          </a:ln>
-        </p:spPr>
-        <p:txBody>
-          <a:bodyPr spcFirstLastPara="1" wrap="square" lIns="91425" tIns="45700" rIns="91425" bIns="45700" anchor="t" anchorCtr="0">
-            <a:spAutoFit/>
-          </a:bodyPr>
-          <a:lstStyle/>
-          <a:p>
-            <a:pPr marL="36900" marR="0" lvl="0" indent="0" algn="l" rtl="0">
-              <a:lnSpc>
-                <a:spcPct val="90000"/>
-              </a:lnSpc>
-              <a:spcBef>
-                <a:spcPts val="0"/>
-              </a:spcBef>
-              <a:spcAft>
-                <a:spcPts val="0"/>
-              </a:spcAft>
-              <a:buNone/>
-            </a:pPr>
-            <a:r>
-              <a:rPr lang="pt-BR" sz="1600" dirty="0">
-                <a:solidFill>
-                  <a:schemeClr val="dk1"/>
-                </a:solidFill>
-                <a:latin typeface="Calibri"/>
-                <a:ea typeface="Calibri"/>
-                <a:cs typeface="Calibri"/>
-                <a:sym typeface="Calibri"/>
-              </a:rPr>
-              <a:t>Contexto serve para passar informações de um componente para outro, onde um não necessariamente está relacionado com o outro. Por exemplo, você pode adicionar um produto ao seu carrinho na página home e continuar na página home, essa informação tem que mudar o visual tanto da página home, dizendo que o produto foi adicionado ao carrinho, quanto no carrinho, listando os produtos adicionados, ou até mesmo passar informações com foto, email do usuário para todas as páginas.</a:t>
-            </a:r>
-            <a:br>
-              <a:rPr lang="pt-BR" sz="1600" dirty="0">
-                <a:solidFill>
-                  <a:schemeClr val="dk1"/>
-                </a:solidFill>
-                <a:latin typeface="Calibri"/>
-                <a:ea typeface="Calibri"/>
-                <a:cs typeface="Calibri"/>
-                <a:sym typeface="Calibri"/>
-              </a:rPr>
-            </a:br>
-            <a:endParaRPr lang="pt-BR" sz="1600" dirty="0">
-              <a:solidFill>
-                <a:schemeClr val="dk1"/>
-              </a:solidFill>
-              <a:latin typeface="Calibri"/>
-              <a:ea typeface="Calibri"/>
-              <a:cs typeface="Calibri"/>
-              <a:sym typeface="Calibri"/>
-            </a:endParaRPr>
-          </a:p>
-          <a:p>
-            <a:pPr marL="36900" marR="0" lvl="0" indent="0" algn="l" rtl="0">
-              <a:lnSpc>
-                <a:spcPct val="90000"/>
-              </a:lnSpc>
-              <a:spcBef>
-                <a:spcPts val="0"/>
-              </a:spcBef>
-              <a:spcAft>
-                <a:spcPts val="0"/>
-              </a:spcAft>
-              <a:buNone/>
-            </a:pPr>
-            <a:r>
-              <a:rPr lang="pt-BR" sz="1600" dirty="0">
-                <a:solidFill>
-                  <a:schemeClr val="dk1"/>
-                </a:solidFill>
-                <a:latin typeface="Calibri"/>
-                <a:ea typeface="Calibri"/>
-                <a:cs typeface="Calibri"/>
-                <a:sym typeface="Calibri"/>
-              </a:rPr>
-              <a:t>Link da documentação: </a:t>
-            </a:r>
-            <a:r>
-              <a:rPr lang="pt-BR" sz="1600" u="sng" dirty="0">
-                <a:solidFill>
-                  <a:schemeClr val="dk1"/>
-                </a:solidFill>
-                <a:latin typeface="Calibri"/>
-                <a:ea typeface="Calibri"/>
-                <a:cs typeface="Calibri"/>
-                <a:sym typeface="Calibri"/>
-                <a:hlinkClick r:id="rId4">
-                  <a:extLst>
-                    <a:ext uri="{A12FA001-AC4F-418D-AE19-62706E023703}">
-                      <ahyp:hlinkClr xmlns:ahyp="http://schemas.microsoft.com/office/drawing/2018/hyperlinkcolor" val="tx"/>
-                    </a:ext>
-                  </a:extLst>
-                </a:hlinkClick>
-              </a:rPr>
-              <a:t>https://pt-br.reactjs.org/docs/context.html</a:t>
-            </a:r>
-            <a:endParaRPr sz="1600" dirty="0">
-              <a:solidFill>
-                <a:schemeClr val="dk1"/>
-              </a:solidFill>
-              <a:latin typeface="Calibri"/>
-              <a:ea typeface="Calibri"/>
-              <a:cs typeface="Calibri"/>
-              <a:sym typeface="Calibri"/>
-            </a:endParaRPr>
-          </a:p>
-          <a:p>
-            <a:pPr marL="36900" marR="0" lvl="0" indent="0" algn="l" rtl="0">
-              <a:lnSpc>
-                <a:spcPct val="90000"/>
-              </a:lnSpc>
-              <a:spcBef>
-                <a:spcPts val="1000"/>
-              </a:spcBef>
-              <a:spcAft>
-                <a:spcPts val="0"/>
-              </a:spcAft>
-              <a:buNone/>
-            </a:pPr>
-            <a:r>
-              <a:rPr lang="pt-BR" sz="1600" dirty="0">
-                <a:solidFill>
-                  <a:schemeClr val="dk1"/>
-                </a:solidFill>
-                <a:latin typeface="Calibri"/>
-                <a:ea typeface="Calibri"/>
-                <a:cs typeface="Calibri"/>
-                <a:sym typeface="Calibri"/>
-              </a:rPr>
-              <a:t>Link que explica o conceito da utilização do contexto: </a:t>
-            </a:r>
-            <a:r>
-              <a:rPr lang="pt-BR" sz="1600" u="sng" dirty="0">
-                <a:solidFill>
-                  <a:schemeClr val="dk1"/>
-                </a:solidFill>
-                <a:latin typeface="Calibri"/>
-                <a:ea typeface="Calibri"/>
-                <a:cs typeface="Calibri"/>
-                <a:sym typeface="Calibri"/>
-                <a:hlinkClick r:id="rId5">
-                  <a:extLst>
-                    <a:ext uri="{A12FA001-AC4F-418D-AE19-62706E023703}">
-                      <ahyp:hlinkClr xmlns:ahyp="http://schemas.microsoft.com/office/drawing/2018/hyperlinkcolor" val="tx"/>
-                    </a:ext>
-                  </a:extLst>
-                </a:hlinkClick>
-              </a:rPr>
-              <a:t>https://www.devmedia.com.br/react-js-passando-dados-com-context-api/42904</a:t>
-            </a:r>
-            <a:endParaRPr sz="1600" dirty="0">
-              <a:solidFill>
-                <a:schemeClr val="dk1"/>
-              </a:solidFill>
-              <a:latin typeface="Calibri"/>
-              <a:ea typeface="Calibri"/>
-              <a:cs typeface="Calibri"/>
-              <a:sym typeface="Calibri"/>
-            </a:endParaRPr>
-          </a:p>
-        </p:txBody>
-      </p:sp>
-      <p:pic>
-        <p:nvPicPr>
-          <p:cNvPr id="207" name="Google Shape;207;p13" descr="Imagem que compara o uso de props para passar informação e o uso do contexto. Usando props é nescessário passar do componente A, para o B, e depois para o C. Com contexto é possível passar do A diretamente para o C."/>
-          <p:cNvPicPr preferRelativeResize="0"/>
-          <p:nvPr/>
-        </p:nvPicPr>
-        <p:blipFill rotWithShape="1">
-          <a:blip r:embed="rId6">
-            <a:alphaModFix/>
-          </a:blip>
-          <a:srcRect/>
-          <a:stretch/>
-        </p:blipFill>
-        <p:spPr>
-          <a:xfrm>
-            <a:off x="7036754" y="1857015"/>
-            <a:ext cx="4727038" cy="2658959"/>
-          </a:xfrm>
-          <a:prstGeom prst="rect">
-            <a:avLst/>
-          </a:prstGeom>
-          <a:noFill/>
-          <a:ln>
-            <a:noFill/>
-          </a:ln>
-        </p:spPr>
-      </p:pic>
-    </p:spTree>
-  </p:cSld>
-  <p:clrMapOvr>
-    <a:masterClrMapping/>
-  </p:clrMapOvr>
-</p:sld>
-</file>
-
-<file path=ppt/slides/slide23.xml><?xml version="1.0" encoding="utf-8"?>
-<p:sld xmlns:a="http://schemas.openxmlformats.org/drawingml/2006/main" xmlns:r="http://schemas.openxmlformats.org/officeDocument/2006/relationships" xmlns:p="http://schemas.openxmlformats.org/presentationml/2006/main">
-  <p:cSld>
-    <p:spTree>
-      <p:nvGrpSpPr>
-        <p:cNvPr id="1" name="Shape 211"/>
-        <p:cNvGrpSpPr/>
-        <p:nvPr/>
-      </p:nvGrpSpPr>
-      <p:grpSpPr>
-        <a:xfrm>
-          <a:off x="0" y="0"/>
-          <a:ext cx="0" cy="0"/>
-          <a:chOff x="0" y="0"/>
-          <a:chExt cx="0" cy="0"/>
-        </a:xfrm>
-      </p:grpSpPr>
-      <p:sp>
-        <p:nvSpPr>
-          <p:cNvPr id="212" name="Google Shape;212;p14"/>
-          <p:cNvSpPr txBox="1">
-            <a:spLocks noGrp="1"/>
-          </p:cNvSpPr>
-          <p:nvPr>
-            <p:ph type="title"/>
-          </p:nvPr>
-        </p:nvSpPr>
-        <p:spPr>
-          <a:xfrm>
-            <a:off x="466685" y="1916903"/>
-            <a:ext cx="3508088" cy="3024193"/>
-          </a:xfrm>
-          <a:prstGeom prst="rect">
-            <a:avLst/>
-          </a:prstGeom>
-          <a:noFill/>
-          <a:ln>
-            <a:noFill/>
-          </a:ln>
-        </p:spPr>
-        <p:txBody>
-          <a:bodyPr spcFirstLastPara="1" wrap="square" lIns="91425" tIns="45700" rIns="91425" bIns="45700" anchor="ctr" anchorCtr="0">
-            <a:normAutofit/>
-          </a:bodyPr>
-          <a:lstStyle/>
-          <a:p>
-            <a:pPr marL="0" lvl="0" indent="0" rtl="0">
-              <a:lnSpc>
-                <a:spcPct val="90000"/>
-              </a:lnSpc>
-              <a:spcBef>
-                <a:spcPts val="0"/>
-              </a:spcBef>
-              <a:spcAft>
-                <a:spcPts val="0"/>
-              </a:spcAft>
-              <a:buClr>
-                <a:schemeClr val="dk1"/>
-              </a:buClr>
-              <a:buSzPts val="4400"/>
-              <a:buFont typeface="Calibri"/>
-              <a:buNone/>
-            </a:pPr>
-            <a:r>
-              <a:rPr lang="pt-BR" sz="3600" dirty="0"/>
-              <a:t>Criando Contexto em forma de um Hook</a:t>
-            </a:r>
-            <a:endParaRPr sz="3600" dirty="0"/>
-          </a:p>
-        </p:txBody>
-      </p:sp>
-      <p:pic>
-        <p:nvPicPr>
-          <p:cNvPr id="213" name="Google Shape;213;p14" descr="Logo serratec"/>
-          <p:cNvPicPr preferRelativeResize="0"/>
-          <p:nvPr/>
-        </p:nvPicPr>
-        <p:blipFill rotWithShape="1">
-          <a:blip r:embed="rId3">
-            <a:alphaModFix/>
-          </a:blip>
-          <a:srcRect l="5903" t="9853" r="73623" b="82599"/>
-          <a:stretch/>
-        </p:blipFill>
-        <p:spPr>
-          <a:xfrm>
-            <a:off x="466685" y="1012974"/>
-            <a:ext cx="2513301" cy="517948"/>
-          </a:xfrm>
-          <a:prstGeom prst="rect">
-            <a:avLst/>
-          </a:prstGeom>
-          <a:noFill/>
-          <a:ln>
-            <a:noFill/>
-          </a:ln>
-        </p:spPr>
-      </p:pic>
-      <p:sp>
-        <p:nvSpPr>
-          <p:cNvPr id="215" name="Google Shape;215;p14"/>
-          <p:cNvSpPr txBox="1"/>
-          <p:nvPr/>
-        </p:nvSpPr>
-        <p:spPr>
-          <a:xfrm>
-            <a:off x="5043181" y="1012974"/>
-            <a:ext cx="6985421" cy="5201384"/>
-          </a:xfrm>
-          <a:prstGeom prst="rect">
-            <a:avLst/>
-          </a:prstGeom>
-          <a:noFill/>
-          <a:ln>
-            <a:noFill/>
-          </a:ln>
-        </p:spPr>
-        <p:txBody>
-          <a:bodyPr spcFirstLastPara="1" wrap="square" lIns="91425" tIns="45700" rIns="91425" bIns="45700" anchor="t" anchorCtr="0">
-            <a:spAutoFit/>
-          </a:bodyPr>
-          <a:lstStyle/>
-          <a:p>
-            <a:pPr marL="0" marR="0" lvl="0" indent="0" algn="l" rtl="0">
-              <a:spcBef>
-                <a:spcPts val="0"/>
-              </a:spcBef>
-              <a:spcAft>
-                <a:spcPts val="0"/>
-              </a:spcAft>
-              <a:buNone/>
-            </a:pPr>
-            <a:r>
-              <a:rPr lang="pt-BR" sz="2400" b="1" dirty="0">
-                <a:solidFill>
-                  <a:schemeClr val="dk1"/>
-                </a:solidFill>
-                <a:latin typeface="Calibri"/>
-                <a:ea typeface="Calibri"/>
-                <a:cs typeface="Calibri"/>
-                <a:sym typeface="Calibri"/>
-              </a:rPr>
-              <a:t>Primeiro é necessário a criação do contexto e tipagem:</a:t>
-            </a:r>
-            <a:endParaRPr sz="1800" dirty="0"/>
-          </a:p>
-          <a:p>
-            <a:pPr marL="0" marR="0" lvl="0" indent="0" algn="l" rtl="0">
-              <a:spcBef>
-                <a:spcPts val="0"/>
-              </a:spcBef>
-              <a:spcAft>
-                <a:spcPts val="0"/>
-              </a:spcAft>
-              <a:buNone/>
-            </a:pPr>
-            <a:endParaRPr sz="2400" b="1" dirty="0">
-              <a:solidFill>
-                <a:schemeClr val="dk1"/>
-              </a:solidFill>
-              <a:latin typeface="Calibri"/>
-              <a:ea typeface="Calibri"/>
-              <a:cs typeface="Calibri"/>
-              <a:sym typeface="Calibri"/>
-            </a:endParaRPr>
-          </a:p>
-          <a:p>
-            <a:pPr marL="0" marR="0" lvl="0" indent="0" algn="l" rtl="0">
-              <a:spcBef>
-                <a:spcPts val="0"/>
-              </a:spcBef>
-              <a:spcAft>
-                <a:spcPts val="0"/>
-              </a:spcAft>
-              <a:buNone/>
-            </a:pPr>
-            <a:r>
-              <a:rPr lang="pt-BR" sz="2000" dirty="0">
-                <a:solidFill>
-                  <a:schemeClr val="dk1"/>
-                </a:solidFill>
-                <a:latin typeface="Calibri"/>
-                <a:ea typeface="Calibri"/>
-                <a:cs typeface="Calibri"/>
-                <a:sym typeface="Calibri"/>
-              </a:rPr>
-              <a:t>export type AuthContextType = {</a:t>
-            </a:r>
-          </a:p>
-          <a:p>
-            <a:pPr marL="0" marR="0" lvl="0" indent="0" algn="l" rtl="0">
-              <a:spcBef>
-                <a:spcPts val="0"/>
-              </a:spcBef>
-              <a:spcAft>
-                <a:spcPts val="0"/>
-              </a:spcAft>
-              <a:buNone/>
-            </a:pPr>
-            <a:r>
-              <a:rPr lang="pt-BR" sz="2000" dirty="0">
-                <a:solidFill>
-                  <a:schemeClr val="dk1"/>
-                </a:solidFill>
-                <a:latin typeface="Calibri"/>
-                <a:ea typeface="Calibri"/>
-                <a:cs typeface="Calibri"/>
-                <a:sym typeface="Calibri"/>
-              </a:rPr>
-              <a:t>  password: string;</a:t>
-            </a:r>
-          </a:p>
-          <a:p>
-            <a:pPr marL="0" marR="0" lvl="0" indent="0" algn="l" rtl="0">
-              <a:spcBef>
-                <a:spcPts val="0"/>
-              </a:spcBef>
-              <a:spcAft>
-                <a:spcPts val="0"/>
-              </a:spcAft>
-              <a:buNone/>
-            </a:pPr>
-            <a:r>
-              <a:rPr lang="pt-BR" sz="2000" dirty="0">
-                <a:solidFill>
-                  <a:schemeClr val="dk1"/>
-                </a:solidFill>
-                <a:latin typeface="Calibri"/>
-                <a:ea typeface="Calibri"/>
-                <a:cs typeface="Calibri"/>
-                <a:sym typeface="Calibri"/>
-              </a:rPr>
-              <a:t>  setPassword: (value: string) =&gt; void;</a:t>
-            </a:r>
-          </a:p>
-          <a:p>
-            <a:pPr marL="0" marR="0" lvl="0" indent="0" algn="l" rtl="0">
-              <a:spcBef>
-                <a:spcPts val="0"/>
-              </a:spcBef>
-              <a:spcAft>
-                <a:spcPts val="0"/>
-              </a:spcAft>
-              <a:buNone/>
-            </a:pPr>
-            <a:r>
-              <a:rPr lang="pt-BR" sz="2000" dirty="0">
-                <a:solidFill>
-                  <a:schemeClr val="dk1"/>
-                </a:solidFill>
-                <a:latin typeface="Calibri"/>
-                <a:ea typeface="Calibri"/>
-                <a:cs typeface="Calibri"/>
-                <a:sym typeface="Calibri"/>
-              </a:rPr>
-              <a:t>  email: string;</a:t>
-            </a:r>
-          </a:p>
-          <a:p>
-            <a:pPr marL="0" marR="0" lvl="0" indent="0" algn="l" rtl="0">
-              <a:spcBef>
-                <a:spcPts val="0"/>
-              </a:spcBef>
-              <a:spcAft>
-                <a:spcPts val="0"/>
-              </a:spcAft>
-              <a:buNone/>
-            </a:pPr>
-            <a:r>
-              <a:rPr lang="pt-BR" sz="2000" dirty="0">
-                <a:solidFill>
-                  <a:schemeClr val="dk1"/>
-                </a:solidFill>
-                <a:latin typeface="Calibri"/>
-                <a:ea typeface="Calibri"/>
-                <a:cs typeface="Calibri"/>
-                <a:sym typeface="Calibri"/>
-              </a:rPr>
-              <a:t>  setEmail: (value: string) =&gt; void;</a:t>
-            </a:r>
-          </a:p>
-          <a:p>
-            <a:pPr marL="0" marR="0" lvl="0" indent="0" algn="l" rtl="0">
-              <a:spcBef>
-                <a:spcPts val="0"/>
-              </a:spcBef>
-              <a:spcAft>
-                <a:spcPts val="0"/>
-              </a:spcAft>
-              <a:buNone/>
-            </a:pPr>
-            <a:r>
-              <a:rPr lang="pt-BR" sz="2000" dirty="0">
-                <a:solidFill>
-                  <a:schemeClr val="dk1"/>
-                </a:solidFill>
-                <a:latin typeface="Calibri"/>
-                <a:ea typeface="Calibri"/>
-                <a:cs typeface="Calibri"/>
-                <a:sym typeface="Calibri"/>
-              </a:rPr>
-              <a:t>};</a:t>
-            </a:r>
-          </a:p>
-          <a:p>
-            <a:pPr marL="0" marR="0" lvl="0" indent="0" algn="l" rtl="0">
-              <a:spcBef>
-                <a:spcPts val="0"/>
-              </a:spcBef>
-              <a:spcAft>
-                <a:spcPts val="0"/>
-              </a:spcAft>
-              <a:buNone/>
-            </a:pPr>
-            <a:endParaRPr lang="pt-BR" sz="2000" dirty="0">
-              <a:solidFill>
-                <a:schemeClr val="dk1"/>
-              </a:solidFill>
-              <a:latin typeface="Calibri"/>
-              <a:ea typeface="Calibri"/>
-              <a:cs typeface="Calibri"/>
-              <a:sym typeface="Calibri"/>
-            </a:endParaRPr>
-          </a:p>
-          <a:p>
-            <a:pPr marL="0" marR="0" lvl="0" indent="0" algn="l" rtl="0">
-              <a:spcBef>
-                <a:spcPts val="0"/>
-              </a:spcBef>
-              <a:spcAft>
-                <a:spcPts val="0"/>
-              </a:spcAft>
-              <a:buNone/>
-            </a:pPr>
-            <a:r>
-              <a:rPr lang="pt-BR" sz="2000" dirty="0">
-                <a:solidFill>
-                  <a:schemeClr val="dk1"/>
-                </a:solidFill>
-                <a:latin typeface="Calibri"/>
-                <a:ea typeface="Calibri"/>
-                <a:cs typeface="Calibri"/>
-                <a:sym typeface="Calibri"/>
-              </a:rPr>
-              <a:t>const AuthContext = createContext&lt;AuthContextType&gt;({</a:t>
-            </a:r>
-          </a:p>
-          <a:p>
-            <a:pPr marL="0" marR="0" lvl="0" indent="0" algn="l" rtl="0">
-              <a:spcBef>
-                <a:spcPts val="0"/>
-              </a:spcBef>
-              <a:spcAft>
-                <a:spcPts val="0"/>
-              </a:spcAft>
-              <a:buNone/>
-            </a:pPr>
-            <a:r>
-              <a:rPr lang="pt-BR" sz="2000" dirty="0">
-                <a:solidFill>
-                  <a:schemeClr val="dk1"/>
-                </a:solidFill>
-                <a:latin typeface="Calibri"/>
-                <a:ea typeface="Calibri"/>
-                <a:cs typeface="Calibri"/>
-                <a:sym typeface="Calibri"/>
-              </a:rPr>
-              <a:t>  password: '',</a:t>
-            </a:r>
-          </a:p>
-          <a:p>
-            <a:pPr marL="0" marR="0" lvl="0" indent="0" algn="l" rtl="0">
-              <a:spcBef>
-                <a:spcPts val="0"/>
-              </a:spcBef>
-              <a:spcAft>
-                <a:spcPts val="0"/>
-              </a:spcAft>
-              <a:buNone/>
-            </a:pPr>
-            <a:r>
-              <a:rPr lang="pt-BR" sz="2000" dirty="0">
-                <a:solidFill>
-                  <a:schemeClr val="dk1"/>
-                </a:solidFill>
-                <a:latin typeface="Calibri"/>
-                <a:ea typeface="Calibri"/>
-                <a:cs typeface="Calibri"/>
-                <a:sym typeface="Calibri"/>
-              </a:rPr>
-              <a:t>  setPassword: () =&gt; { },</a:t>
-            </a:r>
-          </a:p>
-          <a:p>
-            <a:pPr marL="0" marR="0" lvl="0" indent="0" algn="l" rtl="0">
-              <a:spcBef>
-                <a:spcPts val="0"/>
-              </a:spcBef>
-              <a:spcAft>
-                <a:spcPts val="0"/>
-              </a:spcAft>
-              <a:buNone/>
-            </a:pPr>
-            <a:r>
-              <a:rPr lang="pt-BR" sz="2000" dirty="0">
-                <a:solidFill>
-                  <a:schemeClr val="dk1"/>
-                </a:solidFill>
-                <a:latin typeface="Calibri"/>
-                <a:ea typeface="Calibri"/>
-                <a:cs typeface="Calibri"/>
-                <a:sym typeface="Calibri"/>
-              </a:rPr>
-              <a:t>  email: '',</a:t>
-            </a:r>
-          </a:p>
-          <a:p>
-            <a:pPr marL="0" marR="0" lvl="0" indent="0" algn="l" rtl="0">
-              <a:spcBef>
-                <a:spcPts val="0"/>
-              </a:spcBef>
-              <a:spcAft>
-                <a:spcPts val="0"/>
-              </a:spcAft>
-              <a:buNone/>
-            </a:pPr>
-            <a:r>
-              <a:rPr lang="pt-BR" sz="2000" dirty="0">
-                <a:solidFill>
-                  <a:schemeClr val="dk1"/>
-                </a:solidFill>
-                <a:latin typeface="Calibri"/>
-                <a:ea typeface="Calibri"/>
-                <a:cs typeface="Calibri"/>
-                <a:sym typeface="Calibri"/>
-              </a:rPr>
-              <a:t>  setEmail: () =&gt; { },</a:t>
-            </a:r>
-          </a:p>
-          <a:p>
-            <a:pPr marL="0" marR="0" lvl="0" indent="0" algn="l" rtl="0">
-              <a:spcBef>
-                <a:spcPts val="0"/>
-              </a:spcBef>
-              <a:spcAft>
-                <a:spcPts val="0"/>
-              </a:spcAft>
-              <a:buNone/>
-            </a:pPr>
-            <a:r>
-              <a:rPr lang="pt-BR" sz="2000" dirty="0">
-                <a:solidFill>
-                  <a:schemeClr val="dk1"/>
-                </a:solidFill>
-                <a:latin typeface="Calibri"/>
-                <a:ea typeface="Calibri"/>
-                <a:cs typeface="Calibri"/>
-                <a:sym typeface="Calibri"/>
-              </a:rPr>
-              <a:t>});</a:t>
-            </a:r>
-            <a:endParaRPr lang="pt-BR" sz="1800" dirty="0"/>
-          </a:p>
-        </p:txBody>
-      </p:sp>
-      <p:pic>
-        <p:nvPicPr>
-          <p:cNvPr id="3" name="Google Shape;225;p15" descr="Faixa azul em formato de onda preenchendo o fim do slide">
-            <a:extLst>
-              <a:ext uri="{FF2B5EF4-FFF2-40B4-BE49-F238E27FC236}">
-                <a16:creationId xmlns:a16="http://schemas.microsoft.com/office/drawing/2014/main" id="{E5982BB7-33BD-4737-42DF-136986517A75}"/>
-              </a:ext>
-            </a:extLst>
-          </p:cNvPr>
-          <p:cNvPicPr preferRelativeResize="0"/>
-          <p:nvPr/>
-        </p:nvPicPr>
-        <p:blipFill rotWithShape="1">
-          <a:blip r:embed="rId3">
-            <a:alphaModFix/>
-          </a:blip>
-          <a:srcRect l="-821" t="72746" b="-838"/>
-          <a:stretch/>
-        </p:blipFill>
-        <p:spPr>
-          <a:xfrm>
-            <a:off x="-86915" y="6185201"/>
-            <a:ext cx="12278915" cy="743493"/>
-          </a:xfrm>
-          <a:prstGeom prst="rect">
-            <a:avLst/>
-          </a:prstGeom>
-          <a:noFill/>
-          <a:ln>
-            <a:noFill/>
-          </a:ln>
-        </p:spPr>
-      </p:pic>
-    </p:spTree>
-    <p:extLst>
-      <p:ext uri="{BB962C8B-B14F-4D97-AF65-F5344CB8AC3E}">
-        <p14:creationId xmlns:p14="http://schemas.microsoft.com/office/powerpoint/2010/main" val="3962363682"/>
-      </p:ext>
-    </p:extLst>
-  </p:cSld>
-  <p:clrMapOvr>
-    <a:masterClrMapping/>
-  </p:clrMapOvr>
-</p:sld>
-</file>
-
-<file path=ppt/slides/slide24.xml><?xml version="1.0" encoding="utf-8"?>
-<p:sld xmlns:a="http://schemas.openxmlformats.org/drawingml/2006/main" xmlns:r="http://schemas.openxmlformats.org/officeDocument/2006/relationships" xmlns:p="http://schemas.openxmlformats.org/presentationml/2006/main">
-  <p:cSld>
-    <p:spTree>
-      <p:nvGrpSpPr>
-        <p:cNvPr id="1" name="Shape 211"/>
-        <p:cNvGrpSpPr/>
-        <p:nvPr/>
-      </p:nvGrpSpPr>
-      <p:grpSpPr>
-        <a:xfrm>
-          <a:off x="0" y="0"/>
-          <a:ext cx="0" cy="0"/>
-          <a:chOff x="0" y="0"/>
-          <a:chExt cx="0" cy="0"/>
-        </a:xfrm>
-      </p:grpSpPr>
-      <p:pic>
-        <p:nvPicPr>
-          <p:cNvPr id="213" name="Google Shape;213;p14" descr="Logo serratec"/>
-          <p:cNvPicPr preferRelativeResize="0"/>
-          <p:nvPr/>
-        </p:nvPicPr>
-        <p:blipFill rotWithShape="1">
-          <a:blip r:embed="rId3">
-            <a:alphaModFix/>
-          </a:blip>
-          <a:srcRect l="5903" t="9853" r="73623" b="82599"/>
-          <a:stretch/>
-        </p:blipFill>
-        <p:spPr>
-          <a:xfrm>
-            <a:off x="617517" y="917434"/>
-            <a:ext cx="2513301" cy="517948"/>
-          </a:xfrm>
-          <a:prstGeom prst="rect">
-            <a:avLst/>
-          </a:prstGeom>
-          <a:noFill/>
-          <a:ln>
-            <a:noFill/>
-          </a:ln>
-        </p:spPr>
-      </p:pic>
-      <p:pic>
-        <p:nvPicPr>
-          <p:cNvPr id="3" name="Google Shape;225;p15" descr="Faixa azul em formato de onda preenchendo o fim do slide">
-            <a:extLst>
-              <a:ext uri="{FF2B5EF4-FFF2-40B4-BE49-F238E27FC236}">
-                <a16:creationId xmlns:a16="http://schemas.microsoft.com/office/drawing/2014/main" id="{E5982BB7-33BD-4737-42DF-136986517A75}"/>
-              </a:ext>
-            </a:extLst>
-          </p:cNvPr>
-          <p:cNvPicPr preferRelativeResize="0"/>
-          <p:nvPr/>
-        </p:nvPicPr>
-        <p:blipFill rotWithShape="1">
-          <a:blip r:embed="rId3">
-            <a:alphaModFix/>
-          </a:blip>
-          <a:srcRect l="-821" t="72746" b="-838"/>
-          <a:stretch/>
-        </p:blipFill>
-        <p:spPr>
-          <a:xfrm>
-            <a:off x="-86915" y="6108569"/>
-            <a:ext cx="12278915" cy="820125"/>
-          </a:xfrm>
-          <a:prstGeom prst="rect">
-            <a:avLst/>
-          </a:prstGeom>
-          <a:noFill/>
-          <a:ln>
-            <a:noFill/>
-          </a:ln>
-        </p:spPr>
-      </p:pic>
-      <p:sp>
-        <p:nvSpPr>
-          <p:cNvPr id="2" name="Google Shape;216;p14">
-            <a:extLst>
-              <a:ext uri="{FF2B5EF4-FFF2-40B4-BE49-F238E27FC236}">
-                <a16:creationId xmlns:a16="http://schemas.microsoft.com/office/drawing/2014/main" id="{2C69213B-9026-B849-C55E-004515320583}"/>
-              </a:ext>
-            </a:extLst>
-          </p:cNvPr>
-          <p:cNvSpPr txBox="1"/>
-          <p:nvPr/>
-        </p:nvSpPr>
-        <p:spPr>
-          <a:xfrm>
-            <a:off x="4086541" y="915917"/>
-            <a:ext cx="7263332" cy="5416827"/>
-          </a:xfrm>
-          <a:prstGeom prst="rect">
-            <a:avLst/>
-          </a:prstGeom>
-          <a:noFill/>
-          <a:ln>
-            <a:noFill/>
-          </a:ln>
-        </p:spPr>
-        <p:txBody>
-          <a:bodyPr spcFirstLastPara="1" wrap="square" lIns="91425" tIns="45700" rIns="91425" bIns="45700" anchor="t" anchorCtr="0">
-            <a:spAutoFit/>
-          </a:bodyPr>
-          <a:lstStyle/>
-          <a:p>
-            <a:pPr marL="0" marR="0" lvl="0" indent="0" algn="l" rtl="0">
-              <a:spcBef>
-                <a:spcPts val="0"/>
-              </a:spcBef>
-              <a:spcAft>
-                <a:spcPts val="0"/>
-              </a:spcAft>
-              <a:buNone/>
-            </a:pPr>
-            <a:r>
-              <a:rPr lang="pt-BR" sz="2400" b="1" dirty="0">
-                <a:solidFill>
-                  <a:schemeClr val="dk1"/>
-                </a:solidFill>
-                <a:latin typeface="Calibri"/>
-                <a:ea typeface="Calibri"/>
-                <a:cs typeface="Calibri"/>
-                <a:sym typeface="Calibri"/>
-              </a:rPr>
-              <a:t>Segundo é necessário a criação do provedor do contexto:</a:t>
-            </a:r>
-          </a:p>
-          <a:p>
-            <a:pPr marL="0" marR="0" lvl="0" indent="0" algn="l" rtl="0">
-              <a:spcBef>
-                <a:spcPts val="0"/>
-              </a:spcBef>
-              <a:spcAft>
-                <a:spcPts val="0"/>
-              </a:spcAft>
-              <a:buNone/>
-            </a:pPr>
-            <a:endParaRPr sz="1800" dirty="0"/>
-          </a:p>
-          <a:p>
-            <a:pPr marL="0" marR="0" lvl="0" indent="0" algn="l" rtl="0">
-              <a:spcBef>
-                <a:spcPts val="0"/>
-              </a:spcBef>
-              <a:spcAft>
-                <a:spcPts val="0"/>
-              </a:spcAft>
-              <a:buNone/>
-            </a:pPr>
-            <a:r>
-              <a:rPr lang="pt-BR" sz="2000" dirty="0">
-                <a:solidFill>
-                  <a:schemeClr val="dk1"/>
-                </a:solidFill>
-                <a:latin typeface="Calibri"/>
-                <a:ea typeface="Calibri"/>
-                <a:cs typeface="Calibri"/>
-                <a:sym typeface="Calibri"/>
-              </a:rPr>
-              <a:t>export const AuthProvider = ({ children }: any) =&gt; {</a:t>
-            </a:r>
-          </a:p>
-          <a:p>
-            <a:pPr marL="0" marR="0" lvl="0" indent="0" algn="l" rtl="0">
-              <a:spcBef>
-                <a:spcPts val="0"/>
-              </a:spcBef>
-              <a:spcAft>
-                <a:spcPts val="0"/>
-              </a:spcAft>
-              <a:buNone/>
-            </a:pPr>
-            <a:r>
-              <a:rPr lang="pt-BR" sz="2000" dirty="0">
-                <a:solidFill>
-                  <a:schemeClr val="dk1"/>
-                </a:solidFill>
-                <a:latin typeface="Calibri"/>
-                <a:ea typeface="Calibri"/>
-                <a:cs typeface="Calibri"/>
-                <a:sym typeface="Calibri"/>
-              </a:rPr>
-              <a:t>  </a:t>
-            </a:r>
-          </a:p>
-          <a:p>
-            <a:pPr marL="0" marR="0" lvl="0" indent="0" algn="l" rtl="0">
-              <a:spcBef>
-                <a:spcPts val="0"/>
-              </a:spcBef>
-              <a:spcAft>
-                <a:spcPts val="0"/>
-              </a:spcAft>
-              <a:buNone/>
-            </a:pPr>
-            <a:r>
-              <a:rPr lang="pt-BR" sz="2000" dirty="0">
-                <a:solidFill>
-                  <a:schemeClr val="dk1"/>
-                </a:solidFill>
-                <a:latin typeface="Calibri"/>
-                <a:ea typeface="Calibri"/>
-                <a:cs typeface="Calibri"/>
-                <a:sym typeface="Calibri"/>
-              </a:rPr>
-              <a:t>  const [password, setPassword] = useState&lt;string&gt;('');</a:t>
-            </a:r>
-          </a:p>
-          <a:p>
-            <a:pPr marL="0" marR="0" lvl="0" indent="0" algn="l" rtl="0">
-              <a:spcBef>
-                <a:spcPts val="0"/>
-              </a:spcBef>
-              <a:spcAft>
-                <a:spcPts val="0"/>
-              </a:spcAft>
-              <a:buNone/>
-            </a:pPr>
-            <a:r>
-              <a:rPr lang="pt-BR" sz="2000" dirty="0">
-                <a:solidFill>
-                  <a:schemeClr val="dk1"/>
-                </a:solidFill>
-                <a:latin typeface="Calibri"/>
-                <a:ea typeface="Calibri"/>
-                <a:cs typeface="Calibri"/>
-                <a:sym typeface="Calibri"/>
-              </a:rPr>
-              <a:t>  const [email, setEmail] = useState&lt;string&gt;('');</a:t>
-            </a:r>
-          </a:p>
-          <a:p>
-            <a:pPr marL="0" marR="0" lvl="0" indent="0" algn="l" rtl="0">
-              <a:spcBef>
-                <a:spcPts val="0"/>
-              </a:spcBef>
-              <a:spcAft>
-                <a:spcPts val="0"/>
-              </a:spcAft>
-              <a:buNone/>
-            </a:pPr>
-            <a:endParaRPr lang="pt-BR" sz="2000" dirty="0">
-              <a:solidFill>
-                <a:schemeClr val="dk1"/>
-              </a:solidFill>
-              <a:latin typeface="Calibri"/>
-              <a:ea typeface="Calibri"/>
-              <a:cs typeface="Calibri"/>
-              <a:sym typeface="Calibri"/>
-            </a:endParaRPr>
-          </a:p>
-          <a:p>
-            <a:pPr marL="0" marR="0" lvl="0" indent="0" algn="l" rtl="0">
-              <a:spcBef>
-                <a:spcPts val="0"/>
-              </a:spcBef>
-              <a:spcAft>
-                <a:spcPts val="0"/>
-              </a:spcAft>
-              <a:buNone/>
-            </a:pPr>
-            <a:r>
-              <a:rPr lang="pt-BR" sz="2000" dirty="0">
-                <a:solidFill>
-                  <a:schemeClr val="dk1"/>
-                </a:solidFill>
-                <a:latin typeface="Calibri"/>
-                <a:ea typeface="Calibri"/>
-                <a:cs typeface="Calibri"/>
-                <a:sym typeface="Calibri"/>
-              </a:rPr>
-              <a:t>  return (</a:t>
-            </a:r>
-          </a:p>
-          <a:p>
-            <a:pPr marL="0" marR="0" lvl="0" indent="0" algn="l" rtl="0">
-              <a:spcBef>
-                <a:spcPts val="0"/>
-              </a:spcBef>
-              <a:spcAft>
-                <a:spcPts val="0"/>
-              </a:spcAft>
-              <a:buNone/>
-            </a:pPr>
-            <a:r>
-              <a:rPr lang="pt-BR" sz="2000" dirty="0">
-                <a:solidFill>
-                  <a:schemeClr val="dk1"/>
-                </a:solidFill>
-                <a:latin typeface="Calibri"/>
-                <a:ea typeface="Calibri"/>
-                <a:cs typeface="Calibri"/>
-                <a:sym typeface="Calibri"/>
-              </a:rPr>
-              <a:t>    &lt;AuthContext.Provider value={{ password, setPassword, email, setEmail }}&gt;</a:t>
-            </a:r>
-          </a:p>
-          <a:p>
-            <a:pPr marL="0" marR="0" lvl="0" indent="0" algn="l" rtl="0">
-              <a:spcBef>
-                <a:spcPts val="0"/>
-              </a:spcBef>
-              <a:spcAft>
-                <a:spcPts val="0"/>
-              </a:spcAft>
-              <a:buNone/>
-            </a:pPr>
-            <a:r>
-              <a:rPr lang="pt-BR" sz="2000" dirty="0">
-                <a:solidFill>
-                  <a:schemeClr val="dk1"/>
-                </a:solidFill>
-                <a:latin typeface="Calibri"/>
-                <a:ea typeface="Calibri"/>
-                <a:cs typeface="Calibri"/>
-                <a:sym typeface="Calibri"/>
-              </a:rPr>
-              <a:t>      {children}</a:t>
-            </a:r>
-          </a:p>
-          <a:p>
-            <a:pPr marL="0" marR="0" lvl="0" indent="0" algn="l" rtl="0">
-              <a:spcBef>
-                <a:spcPts val="0"/>
-              </a:spcBef>
-              <a:spcAft>
-                <a:spcPts val="0"/>
-              </a:spcAft>
-              <a:buNone/>
-            </a:pPr>
-            <a:r>
-              <a:rPr lang="pt-BR" sz="2000" dirty="0">
-                <a:solidFill>
-                  <a:schemeClr val="dk1"/>
-                </a:solidFill>
-                <a:latin typeface="Calibri"/>
-                <a:ea typeface="Calibri"/>
-                <a:cs typeface="Calibri"/>
-                <a:sym typeface="Calibri"/>
-              </a:rPr>
-              <a:t>    &lt;/AuthContext.Provider&gt;</a:t>
-            </a:r>
-          </a:p>
-          <a:p>
-            <a:pPr marL="0" marR="0" lvl="0" indent="0" algn="l" rtl="0">
-              <a:spcBef>
-                <a:spcPts val="0"/>
-              </a:spcBef>
-              <a:spcAft>
-                <a:spcPts val="0"/>
-              </a:spcAft>
-              <a:buNone/>
-            </a:pPr>
-            <a:r>
-              <a:rPr lang="pt-BR" sz="2000" dirty="0">
-                <a:solidFill>
-                  <a:schemeClr val="dk1"/>
-                </a:solidFill>
-                <a:latin typeface="Calibri"/>
-                <a:ea typeface="Calibri"/>
-                <a:cs typeface="Calibri"/>
-                <a:sym typeface="Calibri"/>
-              </a:rPr>
-              <a:t>  );</a:t>
-            </a:r>
-          </a:p>
-          <a:p>
-            <a:pPr marL="0" marR="0" lvl="0" indent="0" algn="l" rtl="0">
-              <a:spcBef>
-                <a:spcPts val="0"/>
-              </a:spcBef>
-              <a:spcAft>
-                <a:spcPts val="0"/>
-              </a:spcAft>
-              <a:buNone/>
-            </a:pPr>
-            <a:r>
-              <a:rPr lang="pt-BR" sz="2000" dirty="0">
-                <a:solidFill>
-                  <a:schemeClr val="dk1"/>
-                </a:solidFill>
-                <a:latin typeface="Calibri"/>
-                <a:ea typeface="Calibri"/>
-                <a:cs typeface="Calibri"/>
-                <a:sym typeface="Calibri"/>
-              </a:rPr>
-              <a:t>};</a:t>
-            </a:r>
-          </a:p>
-          <a:p>
-            <a:pPr marL="0" marR="0" lvl="0" indent="0" algn="l" rtl="0">
-              <a:spcBef>
-                <a:spcPts val="0"/>
-              </a:spcBef>
-              <a:spcAft>
-                <a:spcPts val="0"/>
-              </a:spcAft>
-              <a:buNone/>
-            </a:pPr>
-            <a:endParaRPr lang="pt-BR" sz="2000" dirty="0">
-              <a:solidFill>
-                <a:schemeClr val="dk1"/>
-              </a:solidFill>
-              <a:latin typeface="Calibri"/>
-              <a:ea typeface="Calibri"/>
-              <a:cs typeface="Calibri"/>
-              <a:sym typeface="Calibri"/>
-            </a:endParaRPr>
-          </a:p>
-          <a:p>
-            <a:pPr marL="0" marR="0" lvl="0" indent="0" algn="l" rtl="0">
-              <a:spcBef>
-                <a:spcPts val="0"/>
-              </a:spcBef>
-              <a:spcAft>
-                <a:spcPts val="0"/>
-              </a:spcAft>
-              <a:buNone/>
-            </a:pPr>
-            <a:r>
-              <a:rPr lang="pt-BR" sz="2000" dirty="0">
-                <a:solidFill>
-                  <a:schemeClr val="dk1"/>
-                </a:solidFill>
-                <a:latin typeface="Calibri"/>
-                <a:ea typeface="Calibri"/>
-                <a:cs typeface="Calibri"/>
-                <a:sym typeface="Calibri"/>
-              </a:rPr>
-              <a:t>export const useAuth = () =&gt; useContext(AuthContext);}</a:t>
-            </a:r>
-            <a:endParaRPr sz="2400" dirty="0">
-              <a:solidFill>
-                <a:schemeClr val="dk1"/>
-              </a:solidFill>
-              <a:latin typeface="Calibri"/>
-              <a:ea typeface="Calibri"/>
-              <a:cs typeface="Calibri"/>
-              <a:sym typeface="Calibri"/>
-            </a:endParaRPr>
-          </a:p>
-        </p:txBody>
-      </p:sp>
-      <p:sp>
-        <p:nvSpPr>
-          <p:cNvPr id="6" name="Google Shape;212;p14">
-            <a:extLst>
-              <a:ext uri="{FF2B5EF4-FFF2-40B4-BE49-F238E27FC236}">
-                <a16:creationId xmlns:a16="http://schemas.microsoft.com/office/drawing/2014/main" id="{E918B2BE-918A-BC4B-0435-70900CC41EA7}"/>
-              </a:ext>
-            </a:extLst>
-          </p:cNvPr>
-          <p:cNvSpPr txBox="1">
-            <a:spLocks/>
-          </p:cNvSpPr>
-          <p:nvPr/>
-        </p:nvSpPr>
-        <p:spPr>
-          <a:xfrm>
-            <a:off x="617517" y="1916903"/>
-            <a:ext cx="3095912" cy="3024193"/>
-          </a:xfrm>
-          <a:prstGeom prst="rect">
-            <a:avLst/>
-          </a:prstGeom>
-          <a:noFill/>
-          <a:ln>
-            <a:noFill/>
-          </a:ln>
-        </p:spPr>
-        <p:txBody>
-          <a:bodyPr spcFirstLastPara="1" wrap="square" lIns="91425" tIns="45700" rIns="91425" bIns="45700" anchor="ctr" anchorCtr="0">
-            <a:normAutofit/>
-          </a:bodyPr>
-          <a:lstStyle>
-            <a:defPPr marR="0" lvl="0" algn="l" rtl="0">
-              <a:lnSpc>
-                <a:spcPct val="100000"/>
-              </a:lnSpc>
-              <a:spcBef>
-                <a:spcPts val="0"/>
-              </a:spcBef>
-              <a:spcAft>
-                <a:spcPts val="0"/>
-              </a:spcAft>
-            </a:defPPr>
-            <a:lvl1pPr marR="0" lvl="0" algn="l" rtl="0">
-              <a:lnSpc>
-                <a:spcPct val="90000"/>
-              </a:lnSpc>
-              <a:spcBef>
-                <a:spcPts val="0"/>
-              </a:spcBef>
-              <a:spcAft>
-                <a:spcPts val="0"/>
-              </a:spcAft>
-              <a:buClr>
-                <a:schemeClr val="dk1"/>
-              </a:buClr>
-              <a:buSzPts val="1800"/>
-              <a:buFont typeface="Calibri"/>
-              <a:buNone/>
-              <a:defRPr sz="4400" b="0" i="0" u="none" strike="noStrike" cap="none">
-                <a:solidFill>
-                  <a:schemeClr val="dk1"/>
-                </a:solidFill>
-                <a:latin typeface="Calibri"/>
-                <a:ea typeface="Calibri"/>
-                <a:cs typeface="Calibri"/>
-                <a:sym typeface="Calibri"/>
-              </a:defRPr>
-            </a:lvl1pPr>
-            <a:lvl2pPr marR="0" lvl="1" algn="l" rtl="0">
-              <a:lnSpc>
-                <a:spcPct val="100000"/>
-              </a:lnSpc>
-              <a:spcBef>
-                <a:spcPts val="0"/>
-              </a:spcBef>
-              <a:spcAft>
-                <a:spcPts val="0"/>
-              </a:spcAft>
-              <a:buClr>
-                <a:srgbClr val="000000"/>
-              </a:buClr>
-              <a:buSzPts val="1400"/>
-              <a:buFont typeface="Arial"/>
-              <a:buNone/>
-              <a:defRPr sz="1800" b="0" i="0" u="none" strike="noStrike" cap="none">
-                <a:solidFill>
-                  <a:srgbClr val="000000"/>
-                </a:solidFill>
-                <a:latin typeface="Arial"/>
-                <a:ea typeface="Arial"/>
-                <a:cs typeface="Arial"/>
-                <a:sym typeface="Arial"/>
-              </a:defRPr>
-            </a:lvl2pPr>
-            <a:lvl3pPr marR="0" lvl="2" algn="l" rtl="0">
-              <a:lnSpc>
-                <a:spcPct val="100000"/>
-              </a:lnSpc>
-              <a:spcBef>
-                <a:spcPts val="0"/>
-              </a:spcBef>
-              <a:spcAft>
-                <a:spcPts val="0"/>
-              </a:spcAft>
-              <a:buClr>
-                <a:srgbClr val="000000"/>
-              </a:buClr>
-              <a:buSzPts val="1400"/>
-              <a:buFont typeface="Arial"/>
-              <a:buNone/>
-              <a:defRPr sz="1800" b="0" i="0" u="none" strike="noStrike" cap="none">
-                <a:solidFill>
-                  <a:srgbClr val="000000"/>
-                </a:solidFill>
-                <a:latin typeface="Arial"/>
-                <a:ea typeface="Arial"/>
-                <a:cs typeface="Arial"/>
-                <a:sym typeface="Arial"/>
-              </a:defRPr>
-            </a:lvl3pPr>
-            <a:lvl4pPr marR="0" lvl="3" algn="l" rtl="0">
-              <a:lnSpc>
-                <a:spcPct val="100000"/>
-              </a:lnSpc>
-              <a:spcBef>
-                <a:spcPts val="0"/>
-              </a:spcBef>
-              <a:spcAft>
-                <a:spcPts val="0"/>
-              </a:spcAft>
-              <a:buClr>
-                <a:srgbClr val="000000"/>
-              </a:buClr>
-              <a:buSzPts val="1400"/>
-              <a:buFont typeface="Arial"/>
-              <a:buNone/>
-              <a:defRPr sz="1800" b="0" i="0" u="none" strike="noStrike" cap="none">
-                <a:solidFill>
-                  <a:srgbClr val="000000"/>
-                </a:solidFill>
-                <a:latin typeface="Arial"/>
-                <a:ea typeface="Arial"/>
-                <a:cs typeface="Arial"/>
-                <a:sym typeface="Arial"/>
-              </a:defRPr>
-            </a:lvl4pPr>
-            <a:lvl5pPr marR="0" lvl="4" algn="l" rtl="0">
-              <a:lnSpc>
-                <a:spcPct val="100000"/>
-              </a:lnSpc>
-              <a:spcBef>
-                <a:spcPts val="0"/>
-              </a:spcBef>
-              <a:spcAft>
-                <a:spcPts val="0"/>
-              </a:spcAft>
-              <a:buClr>
-                <a:srgbClr val="000000"/>
-              </a:buClr>
-              <a:buSzPts val="1400"/>
-              <a:buFont typeface="Arial"/>
-              <a:buNone/>
-              <a:defRPr sz="1800" b="0" i="0" u="none" strike="noStrike" cap="none">
-                <a:solidFill>
-                  <a:srgbClr val="000000"/>
-                </a:solidFill>
-                <a:latin typeface="Arial"/>
-                <a:ea typeface="Arial"/>
-                <a:cs typeface="Arial"/>
-                <a:sym typeface="Arial"/>
-              </a:defRPr>
-            </a:lvl5pPr>
-            <a:lvl6pPr marR="0" lvl="5" algn="l" rtl="0">
-              <a:lnSpc>
-                <a:spcPct val="100000"/>
-              </a:lnSpc>
-              <a:spcBef>
-                <a:spcPts val="0"/>
-              </a:spcBef>
-              <a:spcAft>
-                <a:spcPts val="0"/>
-              </a:spcAft>
-              <a:buClr>
-                <a:srgbClr val="000000"/>
-              </a:buClr>
-              <a:buSzPts val="1400"/>
-              <a:buFont typeface="Arial"/>
-              <a:buNone/>
-              <a:defRPr sz="1800" b="0" i="0" u="none" strike="noStrike" cap="none">
-                <a:solidFill>
-                  <a:srgbClr val="000000"/>
-                </a:solidFill>
-                <a:latin typeface="Arial"/>
-                <a:ea typeface="Arial"/>
-                <a:cs typeface="Arial"/>
-                <a:sym typeface="Arial"/>
-              </a:defRPr>
-            </a:lvl6pPr>
-            <a:lvl7pPr marR="0" lvl="6" algn="l" rtl="0">
-              <a:lnSpc>
-                <a:spcPct val="100000"/>
-              </a:lnSpc>
-              <a:spcBef>
-                <a:spcPts val="0"/>
-              </a:spcBef>
-              <a:spcAft>
-                <a:spcPts val="0"/>
-              </a:spcAft>
-              <a:buClr>
-                <a:srgbClr val="000000"/>
-              </a:buClr>
-              <a:buSzPts val="1400"/>
-              <a:buFont typeface="Arial"/>
-              <a:buNone/>
-              <a:defRPr sz="1800" b="0" i="0" u="none" strike="noStrike" cap="none">
-                <a:solidFill>
-                  <a:srgbClr val="000000"/>
-                </a:solidFill>
-                <a:latin typeface="Arial"/>
-                <a:ea typeface="Arial"/>
-                <a:cs typeface="Arial"/>
-                <a:sym typeface="Arial"/>
-              </a:defRPr>
-            </a:lvl7pPr>
-            <a:lvl8pPr marR="0" lvl="7" algn="l" rtl="0">
-              <a:lnSpc>
-                <a:spcPct val="100000"/>
-              </a:lnSpc>
-              <a:spcBef>
-                <a:spcPts val="0"/>
-              </a:spcBef>
-              <a:spcAft>
-                <a:spcPts val="0"/>
-              </a:spcAft>
-              <a:buClr>
-                <a:srgbClr val="000000"/>
-              </a:buClr>
-              <a:buSzPts val="1400"/>
-              <a:buFont typeface="Arial"/>
-              <a:buNone/>
-              <a:defRPr sz="1800" b="0" i="0" u="none" strike="noStrike" cap="none">
-                <a:solidFill>
-                  <a:srgbClr val="000000"/>
-                </a:solidFill>
-                <a:latin typeface="Arial"/>
-                <a:ea typeface="Arial"/>
-                <a:cs typeface="Arial"/>
-                <a:sym typeface="Arial"/>
-              </a:defRPr>
-            </a:lvl8pPr>
-            <a:lvl9pPr marR="0" lvl="8" algn="l" rtl="0">
-              <a:lnSpc>
-                <a:spcPct val="100000"/>
-              </a:lnSpc>
-              <a:spcBef>
-                <a:spcPts val="0"/>
-              </a:spcBef>
-              <a:spcAft>
-                <a:spcPts val="0"/>
-              </a:spcAft>
-              <a:buClr>
-                <a:srgbClr val="000000"/>
-              </a:buClr>
-              <a:buSzPts val="1400"/>
-              <a:buFont typeface="Arial"/>
-              <a:buNone/>
-              <a:defRPr sz="1800" b="0" i="0" u="none" strike="noStrike" cap="none">
-                <a:solidFill>
-                  <a:srgbClr val="000000"/>
-                </a:solidFill>
-                <a:latin typeface="Arial"/>
-                <a:ea typeface="Arial"/>
-                <a:cs typeface="Arial"/>
-                <a:sym typeface="Arial"/>
-              </a:defRPr>
-            </a:lvl9pPr>
-          </a:lstStyle>
-          <a:p>
-            <a:pPr>
-              <a:buSzPts val="4400"/>
-            </a:pPr>
-            <a:r>
-              <a:rPr lang="pt-BR" sz="3600" dirty="0"/>
-              <a:t>Criando Contexto em forma de um Hook</a:t>
-            </a:r>
-          </a:p>
-        </p:txBody>
-      </p:sp>
-    </p:spTree>
-    <p:extLst>
-      <p:ext uri="{BB962C8B-B14F-4D97-AF65-F5344CB8AC3E}">
-        <p14:creationId xmlns:p14="http://schemas.microsoft.com/office/powerpoint/2010/main" val="2404787597"/>
-      </p:ext>
-    </p:extLst>
-  </p:cSld>
-  <p:clrMapOvr>
-    <a:masterClrMapping/>
-  </p:clrMapOvr>
-</p:sld>
-</file>
-
-<file path=ppt/slides/slide25.xml><?xml version="1.0" encoding="utf-8"?>
-<p:sld xmlns:a="http://schemas.openxmlformats.org/drawingml/2006/main" xmlns:r="http://schemas.openxmlformats.org/officeDocument/2006/relationships" xmlns:p="http://schemas.openxmlformats.org/presentationml/2006/main">
-  <p:cSld>
-    <p:spTree>
-      <p:nvGrpSpPr>
-        <p:cNvPr id="1" name="Shape 211"/>
-        <p:cNvGrpSpPr/>
-        <p:nvPr/>
-      </p:nvGrpSpPr>
-      <p:grpSpPr>
-        <a:xfrm>
-          <a:off x="0" y="0"/>
-          <a:ext cx="0" cy="0"/>
-          <a:chOff x="0" y="0"/>
-          <a:chExt cx="0" cy="0"/>
-        </a:xfrm>
-      </p:grpSpPr>
-      <p:sp>
-        <p:nvSpPr>
-          <p:cNvPr id="212" name="Google Shape;212;p14"/>
-          <p:cNvSpPr txBox="1">
-            <a:spLocks noGrp="1"/>
-          </p:cNvSpPr>
-          <p:nvPr>
-            <p:ph type="title"/>
-          </p:nvPr>
-        </p:nvSpPr>
-        <p:spPr>
-          <a:xfrm>
-            <a:off x="680440" y="2238111"/>
-            <a:ext cx="2181514" cy="1948855"/>
-          </a:xfrm>
-          <a:prstGeom prst="rect">
-            <a:avLst/>
-          </a:prstGeom>
-          <a:noFill/>
-          <a:ln>
-            <a:noFill/>
-          </a:ln>
-        </p:spPr>
-        <p:txBody>
-          <a:bodyPr spcFirstLastPara="1" wrap="square" lIns="91425" tIns="45700" rIns="91425" bIns="45700" anchor="ctr" anchorCtr="0">
-            <a:normAutofit/>
-          </a:bodyPr>
-          <a:lstStyle/>
-          <a:p>
-            <a:pPr marL="0" lvl="0" indent="0" rtl="0">
-              <a:lnSpc>
-                <a:spcPct val="90000"/>
-              </a:lnSpc>
-              <a:spcBef>
-                <a:spcPts val="0"/>
-              </a:spcBef>
-              <a:spcAft>
-                <a:spcPts val="0"/>
-              </a:spcAft>
-              <a:buClr>
-                <a:schemeClr val="dk1"/>
-              </a:buClr>
-              <a:buSzPts val="4400"/>
-              <a:buFont typeface="Calibri"/>
-              <a:buNone/>
-            </a:pPr>
-            <a:r>
-              <a:rPr lang="pt-BR" sz="3600" dirty="0"/>
-              <a:t>Usando o contexto</a:t>
-            </a:r>
-            <a:endParaRPr sz="3600" dirty="0"/>
-          </a:p>
-        </p:txBody>
-      </p:sp>
-      <p:pic>
-        <p:nvPicPr>
-          <p:cNvPr id="213" name="Google Shape;213;p14" descr="Logo serratec"/>
-          <p:cNvPicPr preferRelativeResize="0"/>
-          <p:nvPr/>
-        </p:nvPicPr>
-        <p:blipFill rotWithShape="1">
-          <a:blip r:embed="rId3">
-            <a:alphaModFix/>
-          </a:blip>
-          <a:srcRect l="5903" t="9853" r="73623" b="82599"/>
-          <a:stretch/>
-        </p:blipFill>
-        <p:spPr>
-          <a:xfrm>
-            <a:off x="680440" y="948724"/>
-            <a:ext cx="2513301" cy="517948"/>
-          </a:xfrm>
-          <a:prstGeom prst="rect">
-            <a:avLst/>
-          </a:prstGeom>
-          <a:noFill/>
-          <a:ln>
-            <a:noFill/>
-          </a:ln>
-        </p:spPr>
-      </p:pic>
-      <p:sp>
-        <p:nvSpPr>
-          <p:cNvPr id="217" name="Google Shape;217;p14"/>
-          <p:cNvSpPr txBox="1"/>
-          <p:nvPr/>
-        </p:nvSpPr>
-        <p:spPr>
-          <a:xfrm>
-            <a:off x="3871355" y="959297"/>
-            <a:ext cx="7827309" cy="4609427"/>
-          </a:xfrm>
-          <a:prstGeom prst="rect">
-            <a:avLst/>
-          </a:prstGeom>
-          <a:noFill/>
-          <a:ln>
-            <a:noFill/>
-          </a:ln>
-        </p:spPr>
-        <p:txBody>
-          <a:bodyPr spcFirstLastPara="1" wrap="square" lIns="91425" tIns="45700" rIns="91425" bIns="45700" anchor="t" anchorCtr="0">
-            <a:spAutoFit/>
-          </a:bodyPr>
-          <a:lstStyle/>
-          <a:p>
-            <a:pPr marL="0" marR="0" lvl="0" indent="0" algn="l" rtl="0">
-              <a:spcBef>
-                <a:spcPts val="0"/>
-              </a:spcBef>
-              <a:spcAft>
-                <a:spcPts val="0"/>
-              </a:spcAft>
-              <a:buNone/>
-            </a:pPr>
-            <a:r>
-              <a:rPr lang="pt-BR" sz="2800" b="1" dirty="0">
-                <a:solidFill>
-                  <a:schemeClr val="dk1"/>
-                </a:solidFill>
-                <a:latin typeface="Calibri"/>
-                <a:ea typeface="Calibri"/>
-                <a:cs typeface="Calibri"/>
-                <a:sym typeface="Calibri"/>
-              </a:rPr>
-              <a:t>Terceiro é necessário envelopar o app com o provedor do contexto:</a:t>
-            </a:r>
-          </a:p>
-          <a:p>
-            <a:pPr marL="0" marR="0" lvl="0" indent="0" algn="l" rtl="0">
-              <a:spcBef>
-                <a:spcPts val="0"/>
-              </a:spcBef>
-              <a:spcAft>
-                <a:spcPts val="0"/>
-              </a:spcAft>
-              <a:buNone/>
-            </a:pPr>
-            <a:endParaRPr sz="2800" dirty="0">
-              <a:solidFill>
-                <a:schemeClr val="dk1"/>
-              </a:solidFill>
-              <a:latin typeface="Calibri"/>
-              <a:ea typeface="Calibri"/>
-              <a:cs typeface="Calibri"/>
-              <a:sym typeface="Calibri"/>
-            </a:endParaRPr>
-          </a:p>
-          <a:p>
-            <a:pPr marL="36900" marR="0" lvl="0" indent="0" algn="l" rtl="0">
-              <a:lnSpc>
-                <a:spcPct val="90000"/>
-              </a:lnSpc>
-              <a:spcBef>
-                <a:spcPts val="1000"/>
-              </a:spcBef>
-              <a:spcAft>
-                <a:spcPts val="0"/>
-              </a:spcAft>
-              <a:buNone/>
-            </a:pPr>
-            <a:r>
-              <a:rPr lang="pt-BR" sz="2400" dirty="0">
-                <a:solidFill>
-                  <a:schemeClr val="dk1"/>
-                </a:solidFill>
-                <a:latin typeface="Calibri"/>
-                <a:ea typeface="Calibri"/>
-                <a:cs typeface="Calibri"/>
-                <a:sym typeface="Calibri"/>
-              </a:rPr>
-              <a:t>export default function App() {</a:t>
-            </a:r>
-            <a:endParaRPr sz="2000" dirty="0"/>
-          </a:p>
-          <a:p>
-            <a:pPr marL="36900" marR="0" lvl="0" indent="0" algn="l" rtl="0">
-              <a:lnSpc>
-                <a:spcPct val="90000"/>
-              </a:lnSpc>
-              <a:spcBef>
-                <a:spcPts val="1000"/>
-              </a:spcBef>
-              <a:spcAft>
-                <a:spcPts val="0"/>
-              </a:spcAft>
-              <a:buNone/>
-            </a:pPr>
-            <a:r>
-              <a:rPr lang="pt-BR" sz="2400" dirty="0">
-                <a:solidFill>
-                  <a:schemeClr val="dk1"/>
-                </a:solidFill>
-                <a:latin typeface="Calibri"/>
-                <a:ea typeface="Calibri"/>
-                <a:cs typeface="Calibri"/>
-                <a:sym typeface="Calibri"/>
-              </a:rPr>
-              <a:t>  return (</a:t>
-            </a:r>
-            <a:endParaRPr sz="2000" dirty="0"/>
-          </a:p>
-          <a:p>
-            <a:pPr marL="36900" marR="0" lvl="0" indent="0" algn="l" rtl="0">
-              <a:lnSpc>
-                <a:spcPct val="90000"/>
-              </a:lnSpc>
-              <a:spcBef>
-                <a:spcPts val="1000"/>
-              </a:spcBef>
-              <a:spcAft>
-                <a:spcPts val="0"/>
-              </a:spcAft>
-              <a:buNone/>
-            </a:pPr>
-            <a:r>
-              <a:rPr lang="pt-BR" sz="2400" dirty="0">
-                <a:solidFill>
-                  <a:schemeClr val="dk1"/>
-                </a:solidFill>
-                <a:latin typeface="Calibri"/>
-                <a:ea typeface="Calibri"/>
-                <a:cs typeface="Calibri"/>
-                <a:sym typeface="Calibri"/>
-              </a:rPr>
-              <a:t>    &lt;AuthProvider&gt;</a:t>
-            </a:r>
-            <a:endParaRPr sz="2000" dirty="0"/>
-          </a:p>
-          <a:p>
-            <a:pPr marL="36900" marR="0" lvl="0" indent="0" algn="l" rtl="0">
-              <a:lnSpc>
-                <a:spcPct val="90000"/>
-              </a:lnSpc>
-              <a:spcBef>
-                <a:spcPts val="1000"/>
-              </a:spcBef>
-              <a:spcAft>
-                <a:spcPts val="0"/>
-              </a:spcAft>
-              <a:buNone/>
-            </a:pPr>
-            <a:r>
-              <a:rPr lang="pt-BR" sz="2400" dirty="0">
-                <a:solidFill>
-                  <a:schemeClr val="dk1"/>
-                </a:solidFill>
-                <a:latin typeface="Calibri"/>
-                <a:ea typeface="Calibri"/>
-                <a:cs typeface="Calibri"/>
-                <a:sym typeface="Calibri"/>
-              </a:rPr>
-              <a:t>       &lt;Routes /&gt;</a:t>
-            </a:r>
-            <a:endParaRPr sz="2000" dirty="0"/>
-          </a:p>
-          <a:p>
-            <a:pPr marL="36900" marR="0" lvl="0" indent="0" algn="l" rtl="0">
-              <a:lnSpc>
-                <a:spcPct val="90000"/>
-              </a:lnSpc>
-              <a:spcBef>
-                <a:spcPts val="1000"/>
-              </a:spcBef>
-              <a:spcAft>
-                <a:spcPts val="0"/>
-              </a:spcAft>
-              <a:buNone/>
-            </a:pPr>
-            <a:r>
-              <a:rPr lang="pt-BR" sz="2400" dirty="0">
-                <a:solidFill>
-                  <a:schemeClr val="dk1"/>
-                </a:solidFill>
-                <a:latin typeface="Calibri"/>
-                <a:ea typeface="Calibri"/>
-                <a:cs typeface="Calibri"/>
-                <a:sym typeface="Calibri"/>
-              </a:rPr>
-              <a:t>    &lt;/ AuthProvider &gt;</a:t>
-            </a:r>
-            <a:endParaRPr sz="2000" dirty="0"/>
-          </a:p>
-          <a:p>
-            <a:pPr marL="36900" marR="0" lvl="0" indent="0" algn="l" rtl="0">
-              <a:lnSpc>
-                <a:spcPct val="90000"/>
-              </a:lnSpc>
-              <a:spcBef>
-                <a:spcPts val="1000"/>
-              </a:spcBef>
-              <a:spcAft>
-                <a:spcPts val="0"/>
-              </a:spcAft>
-              <a:buNone/>
-            </a:pPr>
-            <a:r>
-              <a:rPr lang="pt-BR" sz="2400" dirty="0">
-                <a:solidFill>
-                  <a:schemeClr val="dk1"/>
-                </a:solidFill>
-                <a:latin typeface="Calibri"/>
-                <a:ea typeface="Calibri"/>
-                <a:cs typeface="Calibri"/>
-                <a:sym typeface="Calibri"/>
-              </a:rPr>
-              <a:t>  );</a:t>
-            </a:r>
-            <a:endParaRPr sz="2000" dirty="0"/>
-          </a:p>
-          <a:p>
-            <a:pPr marL="36900" marR="0" lvl="0" indent="0" algn="l" rtl="0">
-              <a:lnSpc>
-                <a:spcPct val="90000"/>
-              </a:lnSpc>
-              <a:spcBef>
-                <a:spcPts val="1000"/>
-              </a:spcBef>
-              <a:spcAft>
-                <a:spcPts val="0"/>
-              </a:spcAft>
-              <a:buNone/>
-            </a:pPr>
-            <a:r>
-              <a:rPr lang="pt-BR" sz="2400" dirty="0">
-                <a:solidFill>
-                  <a:schemeClr val="dk1"/>
-                </a:solidFill>
-                <a:latin typeface="Calibri"/>
-                <a:ea typeface="Calibri"/>
-                <a:cs typeface="Calibri"/>
-                <a:sym typeface="Calibri"/>
-              </a:rPr>
-              <a:t>}</a:t>
-            </a:r>
-            <a:endParaRPr sz="2000" dirty="0"/>
-          </a:p>
-        </p:txBody>
-      </p:sp>
-      <p:pic>
-        <p:nvPicPr>
-          <p:cNvPr id="3" name="Google Shape;225;p15" descr="Faixa azul em formato de onda preenchendo o fim do slide">
-            <a:extLst>
-              <a:ext uri="{FF2B5EF4-FFF2-40B4-BE49-F238E27FC236}">
-                <a16:creationId xmlns:a16="http://schemas.microsoft.com/office/drawing/2014/main" id="{E5982BB7-33BD-4737-42DF-136986517A75}"/>
-              </a:ext>
-            </a:extLst>
-          </p:cNvPr>
-          <p:cNvPicPr preferRelativeResize="0"/>
-          <p:nvPr/>
-        </p:nvPicPr>
-        <p:blipFill rotWithShape="1">
-          <a:blip r:embed="rId3">
-            <a:alphaModFix/>
-          </a:blip>
-          <a:srcRect l="-821" t="72746" b="-838"/>
-          <a:stretch/>
-        </p:blipFill>
-        <p:spPr>
-          <a:xfrm>
-            <a:off x="-86915" y="5909275"/>
-            <a:ext cx="12278915" cy="1019419"/>
-          </a:xfrm>
-          <a:prstGeom prst="rect">
-            <a:avLst/>
-          </a:prstGeom>
-          <a:noFill/>
-          <a:ln>
-            <a:noFill/>
-          </a:ln>
-        </p:spPr>
-      </p:pic>
-    </p:spTree>
-    <p:extLst>
-      <p:ext uri="{BB962C8B-B14F-4D97-AF65-F5344CB8AC3E}">
-        <p14:creationId xmlns:p14="http://schemas.microsoft.com/office/powerpoint/2010/main" val="3116845333"/>
-      </p:ext>
-    </p:extLst>
-  </p:cSld>
-  <p:clrMapOvr>
-    <a:masterClrMapping/>
-  </p:clrMapOvr>
-</p:sld>
-</file>
-
-<file path=ppt/slides/slide26.xml><?xml version="1.0" encoding="utf-8"?>
-<p:sld xmlns:a="http://schemas.openxmlformats.org/drawingml/2006/main" xmlns:r="http://schemas.openxmlformats.org/officeDocument/2006/relationships" xmlns:p="http://schemas.openxmlformats.org/presentationml/2006/main">
-  <p:cSld>
-    <p:spTree>
-      <p:nvGrpSpPr>
-        <p:cNvPr id="1" name="Shape 222"/>
-        <p:cNvGrpSpPr/>
-        <p:nvPr/>
-      </p:nvGrpSpPr>
-      <p:grpSpPr>
-        <a:xfrm>
-          <a:off x="0" y="0"/>
-          <a:ext cx="0" cy="0"/>
-          <a:chOff x="0" y="0"/>
-          <a:chExt cx="0" cy="0"/>
-        </a:xfrm>
-      </p:grpSpPr>
-      <p:sp>
-        <p:nvSpPr>
-          <p:cNvPr id="223" name="Google Shape;223;p15"/>
-          <p:cNvSpPr txBox="1">
-            <a:spLocks noGrp="1"/>
-          </p:cNvSpPr>
-          <p:nvPr>
-            <p:ph type="title"/>
-          </p:nvPr>
-        </p:nvSpPr>
-        <p:spPr>
-          <a:xfrm>
-            <a:off x="611145" y="1857015"/>
-            <a:ext cx="2853937" cy="3065223"/>
-          </a:xfrm>
-          <a:prstGeom prst="rect">
-            <a:avLst/>
-          </a:prstGeom>
-          <a:noFill/>
-          <a:ln>
-            <a:noFill/>
-          </a:ln>
-        </p:spPr>
-        <p:txBody>
-          <a:bodyPr spcFirstLastPara="1" wrap="square" lIns="91425" tIns="45700" rIns="91425" bIns="45700" anchor="ctr" anchorCtr="0">
-            <a:normAutofit/>
-          </a:bodyPr>
-          <a:lstStyle/>
-          <a:p>
-            <a:pPr marL="0" lvl="0" indent="0" algn="l" rtl="0">
-              <a:lnSpc>
-                <a:spcPct val="90000"/>
-              </a:lnSpc>
-              <a:spcBef>
-                <a:spcPts val="0"/>
-              </a:spcBef>
-              <a:spcAft>
-                <a:spcPts val="0"/>
-              </a:spcAft>
-              <a:buClr>
-                <a:schemeClr val="dk1"/>
-              </a:buClr>
-              <a:buSzPts val="4400"/>
-              <a:buFont typeface="Calibri"/>
-              <a:buNone/>
-            </a:pPr>
-            <a:r>
-              <a:rPr lang="pt-BR" dirty="0"/>
-              <a:t>Usando Contexto</a:t>
-            </a:r>
-            <a:endParaRPr dirty="0"/>
-          </a:p>
-        </p:txBody>
-      </p:sp>
-      <p:pic>
-        <p:nvPicPr>
-          <p:cNvPr id="224" name="Google Shape;224;p15" descr="Logo serratec"/>
-          <p:cNvPicPr preferRelativeResize="0"/>
-          <p:nvPr/>
-        </p:nvPicPr>
-        <p:blipFill rotWithShape="1">
-          <a:blip r:embed="rId3">
-            <a:alphaModFix/>
-          </a:blip>
-          <a:srcRect l="5903" t="9853" r="73623" b="82599"/>
-          <a:stretch/>
-        </p:blipFill>
-        <p:spPr>
-          <a:xfrm>
-            <a:off x="611145" y="572758"/>
-            <a:ext cx="2513301" cy="517948"/>
-          </a:xfrm>
-          <a:prstGeom prst="rect">
-            <a:avLst/>
-          </a:prstGeom>
-          <a:noFill/>
-          <a:ln>
-            <a:noFill/>
-          </a:ln>
-        </p:spPr>
-      </p:pic>
-      <p:pic>
-        <p:nvPicPr>
-          <p:cNvPr id="225" name="Google Shape;225;p15" descr="Faixa azul em formato de onda preenchendo o fim do slide"/>
-          <p:cNvPicPr preferRelativeResize="0"/>
-          <p:nvPr/>
-        </p:nvPicPr>
-        <p:blipFill rotWithShape="1">
-          <a:blip r:embed="rId3">
-            <a:alphaModFix/>
-          </a:blip>
-          <a:srcRect l="-821" t="72746" b="-838"/>
-          <a:stretch/>
-        </p:blipFill>
-        <p:spPr>
-          <a:xfrm>
-            <a:off x="-86915" y="5688547"/>
-            <a:ext cx="12278915" cy="1240147"/>
-          </a:xfrm>
-          <a:prstGeom prst="rect">
-            <a:avLst/>
-          </a:prstGeom>
-          <a:noFill/>
-          <a:ln>
-            <a:noFill/>
-          </a:ln>
-        </p:spPr>
-      </p:pic>
-      <p:sp>
-        <p:nvSpPr>
-          <p:cNvPr id="226" name="Google Shape;226;p15"/>
-          <p:cNvSpPr txBox="1"/>
-          <p:nvPr/>
-        </p:nvSpPr>
-        <p:spPr>
-          <a:xfrm>
-            <a:off x="4959221" y="572758"/>
-            <a:ext cx="6356411" cy="5632271"/>
-          </a:xfrm>
-          <a:prstGeom prst="rect">
-            <a:avLst/>
-          </a:prstGeom>
-          <a:noFill/>
-          <a:ln>
-            <a:noFill/>
-          </a:ln>
-        </p:spPr>
-        <p:txBody>
-          <a:bodyPr spcFirstLastPara="1" wrap="square" lIns="91425" tIns="45700" rIns="91425" bIns="45700" anchor="t" anchorCtr="0">
-            <a:spAutoFit/>
-          </a:bodyPr>
-          <a:lstStyle/>
-          <a:p>
-            <a:pPr marL="0" marR="0" lvl="0" indent="0" algn="l" rtl="0">
-              <a:spcBef>
-                <a:spcPts val="0"/>
-              </a:spcBef>
-              <a:spcAft>
-                <a:spcPts val="0"/>
-              </a:spcAft>
-              <a:buNone/>
-            </a:pPr>
-            <a:r>
-              <a:rPr lang="pt-BR" sz="1600" dirty="0">
-                <a:solidFill>
-                  <a:schemeClr val="dk1"/>
-                </a:solidFill>
-                <a:latin typeface="Calibri"/>
-                <a:ea typeface="Calibri"/>
-                <a:cs typeface="Calibri"/>
-                <a:sym typeface="Calibri"/>
-              </a:rPr>
-              <a:t>Em qualquer arquivo que você queira chamar o contexto é necessário somente utilizar o Hook criado no services ou na pasta Hooks passando o nome dele. </a:t>
-            </a:r>
-            <a:endParaRPr dirty="0"/>
-          </a:p>
-          <a:p>
-            <a:pPr marL="0" marR="0" lvl="0" indent="0" algn="l" rtl="0">
-              <a:spcBef>
-                <a:spcPts val="0"/>
-              </a:spcBef>
-              <a:spcAft>
-                <a:spcPts val="0"/>
-              </a:spcAft>
-              <a:buNone/>
-            </a:pPr>
-            <a:endParaRPr sz="1600" dirty="0">
-              <a:solidFill>
-                <a:schemeClr val="dk1"/>
-              </a:solidFill>
-              <a:latin typeface="Calibri"/>
-              <a:ea typeface="Calibri"/>
-              <a:cs typeface="Calibri"/>
-              <a:sym typeface="Calibri"/>
-            </a:endParaRPr>
-          </a:p>
-          <a:p>
-            <a:pPr marL="0" marR="0" lvl="0" indent="0" algn="l" rtl="0">
-              <a:spcBef>
-                <a:spcPts val="0"/>
-              </a:spcBef>
-              <a:spcAft>
-                <a:spcPts val="0"/>
-              </a:spcAft>
-              <a:buNone/>
-            </a:pPr>
-            <a:r>
-              <a:rPr lang="pt-BR" sz="2400" b="1" dirty="0">
-                <a:solidFill>
-                  <a:schemeClr val="dk1"/>
-                </a:solidFill>
-                <a:latin typeface="Calibri"/>
-                <a:ea typeface="Calibri"/>
-                <a:cs typeface="Calibri"/>
-                <a:sym typeface="Calibri"/>
-              </a:rPr>
-              <a:t>Forma de uso</a:t>
-            </a:r>
-            <a:br>
-              <a:rPr lang="pt-BR" sz="2000" b="1" dirty="0">
-                <a:solidFill>
-                  <a:schemeClr val="dk1"/>
-                </a:solidFill>
-                <a:latin typeface="Calibri"/>
-                <a:ea typeface="Calibri"/>
-                <a:cs typeface="Calibri"/>
-                <a:sym typeface="Calibri"/>
-              </a:rPr>
-            </a:br>
-            <a:r>
-              <a:rPr lang="pt-BR" sz="1600" dirty="0">
-                <a:solidFill>
-                  <a:schemeClr val="dk1"/>
-                </a:solidFill>
-                <a:latin typeface="Calibri"/>
-                <a:ea typeface="Calibri"/>
-                <a:cs typeface="Calibri"/>
-                <a:sym typeface="Calibri"/>
-              </a:rPr>
-              <a:t>import {useAuth} from './Hooks/ useAuth’;</a:t>
-            </a:r>
-          </a:p>
-          <a:p>
-            <a:pPr marL="0" marR="0" lvl="0" indent="0" algn="l" rtl="0">
-              <a:spcBef>
-                <a:spcPts val="0"/>
-              </a:spcBef>
-              <a:spcAft>
-                <a:spcPts val="0"/>
-              </a:spcAft>
-              <a:buNone/>
-            </a:pPr>
-            <a:endParaRPr lang="pt-BR" sz="1600" dirty="0">
-              <a:solidFill>
-                <a:schemeClr val="dk1"/>
-              </a:solidFill>
-              <a:latin typeface="Calibri"/>
-              <a:ea typeface="Calibri"/>
-              <a:cs typeface="Calibri"/>
-              <a:sym typeface="Calibri"/>
-            </a:endParaRPr>
-          </a:p>
-          <a:p>
-            <a:pPr marL="0" marR="0" lvl="0" indent="0" algn="l" rtl="0">
-              <a:spcBef>
-                <a:spcPts val="0"/>
-              </a:spcBef>
-              <a:spcAft>
-                <a:spcPts val="0"/>
-              </a:spcAft>
-              <a:buNone/>
-            </a:pPr>
-            <a:r>
-              <a:rPr lang="pt-BR" sz="1600" dirty="0">
-                <a:solidFill>
-                  <a:schemeClr val="dk1"/>
-                </a:solidFill>
-                <a:latin typeface="Calibri"/>
-                <a:ea typeface="Calibri"/>
-                <a:cs typeface="Calibri"/>
-                <a:sym typeface="Calibri"/>
-              </a:rPr>
-              <a:t>const Home = () =&gt; {</a:t>
-            </a:r>
-          </a:p>
-          <a:p>
-            <a:pPr marL="0" marR="0" lvl="0" indent="0" algn="l" rtl="0">
-              <a:spcBef>
-                <a:spcPts val="0"/>
-              </a:spcBef>
-              <a:spcAft>
-                <a:spcPts val="0"/>
-              </a:spcAft>
-              <a:buNone/>
-            </a:pPr>
-            <a:r>
-              <a:rPr lang="pt-BR" sz="1600" dirty="0">
-                <a:solidFill>
-                  <a:schemeClr val="dk1"/>
-                </a:solidFill>
-                <a:latin typeface="Calibri"/>
-                <a:ea typeface="Calibri"/>
-                <a:cs typeface="Calibri"/>
-                <a:sym typeface="Calibri"/>
-              </a:rPr>
-              <a:t>  const {email} = useAuth();</a:t>
-            </a:r>
-          </a:p>
-          <a:p>
-            <a:pPr marL="0" marR="0" lvl="0" indent="0" algn="l" rtl="0">
-              <a:spcBef>
-                <a:spcPts val="0"/>
-              </a:spcBef>
-              <a:spcAft>
-                <a:spcPts val="0"/>
-              </a:spcAft>
-              <a:buNone/>
-            </a:pPr>
-            <a:endParaRPr lang="pt-BR" sz="1600" dirty="0">
-              <a:solidFill>
-                <a:schemeClr val="dk1"/>
-              </a:solidFill>
-              <a:latin typeface="Calibri"/>
-              <a:ea typeface="Calibri"/>
-              <a:cs typeface="Calibri"/>
-              <a:sym typeface="Calibri"/>
-            </a:endParaRPr>
-          </a:p>
-          <a:p>
-            <a:pPr marL="0" marR="0" lvl="0" indent="0" algn="l" rtl="0">
-              <a:spcBef>
-                <a:spcPts val="0"/>
-              </a:spcBef>
-              <a:spcAft>
-                <a:spcPts val="0"/>
-              </a:spcAft>
-              <a:buNone/>
-            </a:pPr>
-            <a:r>
-              <a:rPr lang="pt-BR" sz="1600" dirty="0">
-                <a:solidFill>
-                  <a:schemeClr val="dk1"/>
-                </a:solidFill>
-                <a:latin typeface="Calibri"/>
-                <a:ea typeface="Calibri"/>
-                <a:cs typeface="Calibri"/>
-                <a:sym typeface="Calibri"/>
-              </a:rPr>
-              <a:t>  return (</a:t>
-            </a:r>
-          </a:p>
-          <a:p>
-            <a:pPr marL="0" marR="0" lvl="0" indent="0" algn="l" rtl="0">
-              <a:spcBef>
-                <a:spcPts val="0"/>
-              </a:spcBef>
-              <a:spcAft>
-                <a:spcPts val="0"/>
-              </a:spcAft>
-              <a:buNone/>
-            </a:pPr>
-            <a:r>
-              <a:rPr lang="pt-BR" sz="1600" dirty="0">
-                <a:solidFill>
-                  <a:schemeClr val="dk1"/>
-                </a:solidFill>
-                <a:latin typeface="Calibri"/>
-                <a:ea typeface="Calibri"/>
-                <a:cs typeface="Calibri"/>
-                <a:sym typeface="Calibri"/>
-              </a:rPr>
-              <a:t>    &lt;View&gt;</a:t>
-            </a:r>
-          </a:p>
-          <a:p>
-            <a:pPr marL="0" marR="0" lvl="0" indent="0" algn="l" rtl="0">
-              <a:spcBef>
-                <a:spcPts val="0"/>
-              </a:spcBef>
-              <a:spcAft>
-                <a:spcPts val="0"/>
-              </a:spcAft>
-              <a:buNone/>
-            </a:pPr>
-            <a:r>
-              <a:rPr lang="pt-BR" sz="1600" dirty="0">
-                <a:solidFill>
-                  <a:schemeClr val="dk1"/>
-                </a:solidFill>
-                <a:latin typeface="Calibri"/>
-                <a:ea typeface="Calibri"/>
-                <a:cs typeface="Calibri"/>
-                <a:sym typeface="Calibri"/>
-              </a:rPr>
-              <a:t>      &lt;Text&gt;Bem vindo: {email}&lt;/Text&gt;</a:t>
-            </a:r>
-          </a:p>
-          <a:p>
-            <a:pPr marL="0" marR="0" lvl="0" indent="0" algn="l" rtl="0">
-              <a:spcBef>
-                <a:spcPts val="0"/>
-              </a:spcBef>
-              <a:spcAft>
-                <a:spcPts val="0"/>
-              </a:spcAft>
-              <a:buNone/>
-            </a:pPr>
-            <a:r>
-              <a:rPr lang="pt-BR" sz="1600" dirty="0">
-                <a:solidFill>
-                  <a:schemeClr val="dk1"/>
-                </a:solidFill>
-                <a:latin typeface="Calibri"/>
-                <a:ea typeface="Calibri"/>
-                <a:cs typeface="Calibri"/>
-                <a:sym typeface="Calibri"/>
-              </a:rPr>
-              <a:t>    &lt;/View&gt;</a:t>
-            </a:r>
-          </a:p>
-          <a:p>
-            <a:pPr marL="0" marR="0" lvl="0" indent="0" algn="l" rtl="0">
-              <a:spcBef>
-                <a:spcPts val="0"/>
-              </a:spcBef>
-              <a:spcAft>
-                <a:spcPts val="0"/>
-              </a:spcAft>
-              <a:buNone/>
-            </a:pPr>
-            <a:r>
-              <a:rPr lang="pt-BR" sz="1600" dirty="0">
-                <a:solidFill>
-                  <a:schemeClr val="dk1"/>
-                </a:solidFill>
-                <a:latin typeface="Calibri"/>
-                <a:ea typeface="Calibri"/>
-                <a:cs typeface="Calibri"/>
-                <a:sym typeface="Calibri"/>
-              </a:rPr>
-              <a:t>  );</a:t>
-            </a:r>
-          </a:p>
-          <a:p>
-            <a:pPr marL="0" marR="0" lvl="0" indent="0" algn="l" rtl="0">
-              <a:spcBef>
-                <a:spcPts val="0"/>
-              </a:spcBef>
-              <a:spcAft>
-                <a:spcPts val="0"/>
-              </a:spcAft>
-              <a:buNone/>
-            </a:pPr>
-            <a:r>
-              <a:rPr lang="pt-BR" sz="1600" dirty="0">
-                <a:solidFill>
-                  <a:schemeClr val="dk1"/>
-                </a:solidFill>
-                <a:latin typeface="Calibri"/>
-                <a:ea typeface="Calibri"/>
-                <a:cs typeface="Calibri"/>
-                <a:sym typeface="Calibri"/>
-              </a:rPr>
-              <a:t>};</a:t>
-            </a:r>
-          </a:p>
-          <a:p>
-            <a:pPr marL="0" marR="0" lvl="0" indent="0" algn="l" rtl="0">
-              <a:spcBef>
-                <a:spcPts val="0"/>
-              </a:spcBef>
-              <a:spcAft>
-                <a:spcPts val="0"/>
-              </a:spcAft>
-              <a:buNone/>
-            </a:pPr>
-            <a:endParaRPr lang="pt-BR" sz="1600" dirty="0">
-              <a:solidFill>
-                <a:schemeClr val="dk1"/>
-              </a:solidFill>
-              <a:latin typeface="Calibri"/>
-              <a:ea typeface="Calibri"/>
-              <a:cs typeface="Calibri"/>
-              <a:sym typeface="Calibri"/>
-            </a:endParaRPr>
-          </a:p>
-          <a:p>
-            <a:pPr marL="0" marR="0" lvl="0" indent="0" algn="l" rtl="0">
-              <a:spcBef>
-                <a:spcPts val="0"/>
-              </a:spcBef>
-              <a:spcAft>
-                <a:spcPts val="0"/>
-              </a:spcAft>
-              <a:buNone/>
-            </a:pPr>
-            <a:r>
-              <a:rPr lang="pt-BR" sz="1600" dirty="0">
-                <a:solidFill>
-                  <a:schemeClr val="dk1"/>
-                </a:solidFill>
-                <a:latin typeface="Calibri"/>
-                <a:ea typeface="Calibri"/>
-                <a:cs typeface="Calibri"/>
-                <a:sym typeface="Calibri"/>
-              </a:rPr>
-              <a:t>export default Home;</a:t>
-            </a:r>
-            <a:endParaRPr lang="pt-BR" sz="1200" dirty="0"/>
-          </a:p>
-          <a:p>
-            <a:pPr marL="0" marR="0" lvl="0" indent="0" algn="l" rtl="0">
-              <a:spcBef>
-                <a:spcPts val="0"/>
-              </a:spcBef>
-              <a:spcAft>
-                <a:spcPts val="0"/>
-              </a:spcAft>
-              <a:buNone/>
-            </a:pPr>
-            <a:endParaRPr sz="1600" u="sng" dirty="0">
-              <a:solidFill>
-                <a:schemeClr val="dk1"/>
-              </a:solidFill>
-              <a:latin typeface="Calibri"/>
-              <a:ea typeface="Calibri"/>
-              <a:cs typeface="Calibri"/>
-              <a:sym typeface="Calibri"/>
-            </a:endParaRPr>
-          </a:p>
-          <a:p>
-            <a:pPr marL="0" marR="0" lvl="0" indent="0" algn="l" rtl="0">
-              <a:spcBef>
-                <a:spcPts val="0"/>
-              </a:spcBef>
-              <a:spcAft>
-                <a:spcPts val="0"/>
-              </a:spcAft>
-              <a:buNone/>
-            </a:pPr>
-            <a:r>
-              <a:rPr lang="pt-BR" sz="1600" dirty="0">
-                <a:solidFill>
-                  <a:schemeClr val="dk1"/>
-                </a:solidFill>
-                <a:latin typeface="Calibri"/>
-                <a:ea typeface="Calibri"/>
-                <a:cs typeface="Calibri"/>
-                <a:sym typeface="Calibri"/>
-              </a:rPr>
-              <a:t>É importante lembrar que, no contexto, podem ser armazenados variáveis, estados e também funções.</a:t>
-            </a:r>
-            <a:endParaRPr dirty="0"/>
-          </a:p>
-          <a:p>
-            <a:pPr marL="0" marR="0" lvl="0" indent="0" algn="l" rtl="0">
-              <a:spcBef>
-                <a:spcPts val="0"/>
-              </a:spcBef>
-              <a:spcAft>
-                <a:spcPts val="0"/>
-              </a:spcAft>
-              <a:buNone/>
-            </a:pPr>
-            <a:endParaRPr sz="1600" dirty="0">
-              <a:solidFill>
-                <a:schemeClr val="dk1"/>
-              </a:solidFill>
-              <a:latin typeface="Calibri"/>
-              <a:ea typeface="Calibri"/>
-              <a:cs typeface="Calibri"/>
-              <a:sym typeface="Calibri"/>
-            </a:endParaRPr>
-          </a:p>
-        </p:txBody>
-      </p:sp>
-    </p:spTree>
-    <p:extLst>
-      <p:ext uri="{BB962C8B-B14F-4D97-AF65-F5344CB8AC3E}">
-        <p14:creationId xmlns:p14="http://schemas.microsoft.com/office/powerpoint/2010/main" val="3903302904"/>
-      </p:ext>
-    </p:extLst>
-  </p:cSld>
-  <p:clrMapOvr>
-    <a:masterClrMapping/>
-  </p:clrMapOvr>
-</p:sld>
-</file>
-
-<file path=ppt/slides/slide27.xml><?xml version="1.0" encoding="utf-8"?>
+<file path=ppt/slides/slide20.xml><?xml version="1.0" encoding="utf-8"?>
 <p:sld xmlns:a="http://schemas.openxmlformats.org/drawingml/2006/main" xmlns:r="http://schemas.openxmlformats.org/officeDocument/2006/relationships" xmlns:p="http://schemas.openxmlformats.org/presentationml/2006/main">
   <p:cSld>
     <p:spTree>
@@ -25539,7 +20334,7 @@
 </p:sld>
 </file>
 
-<file path=ppt/slides/slide28.xml><?xml version="1.0" encoding="utf-8"?>
+<file path=ppt/slides/slide21.xml><?xml version="1.0" encoding="utf-8"?>
 <p:sld xmlns:a="http://schemas.openxmlformats.org/drawingml/2006/main" xmlns:r="http://schemas.openxmlformats.org/officeDocument/2006/relationships" xmlns:p="http://schemas.openxmlformats.org/presentationml/2006/main">
   <p:cSld>
     <p:spTree>
@@ -26298,7 +21093,7 @@
 </p:sld>
 </file>
 
-<file path=ppt/slides/slide29.xml><?xml version="1.0" encoding="utf-8"?>
+<file path=ppt/slides/slide22.xml><?xml version="1.0" encoding="utf-8"?>
 <p:sld xmlns:a="http://schemas.openxmlformats.org/drawingml/2006/main" xmlns:r="http://schemas.openxmlformats.org/officeDocument/2006/relationships" xmlns:p="http://schemas.openxmlformats.org/presentationml/2006/main">
   <p:cSld>
     <p:spTree>
@@ -26603,871 +21398,7 @@
 </p:sld>
 </file>
 
-<file path=ppt/slides/slide3.xml><?xml version="1.0" encoding="utf-8"?>
-<p:sld xmlns:a="http://schemas.openxmlformats.org/drawingml/2006/main" xmlns:r="http://schemas.openxmlformats.org/officeDocument/2006/relationships" xmlns:p="http://schemas.openxmlformats.org/presentationml/2006/main">
-  <p:cSld>
-    <p:spTree>
-      <p:nvGrpSpPr>
-        <p:cNvPr id="1" name="Shape 99"/>
-        <p:cNvGrpSpPr/>
-        <p:nvPr/>
-      </p:nvGrpSpPr>
-      <p:grpSpPr>
-        <a:xfrm>
-          <a:off x="0" y="0"/>
-          <a:ext cx="0" cy="0"/>
-          <a:chOff x="0" y="0"/>
-          <a:chExt cx="0" cy="0"/>
-        </a:xfrm>
-      </p:grpSpPr>
-      <p:sp>
-        <p:nvSpPr>
-          <p:cNvPr id="100" name="Google Shape;100;p3"/>
-          <p:cNvSpPr txBox="1">
-            <a:spLocks noGrp="1"/>
-          </p:cNvSpPr>
-          <p:nvPr>
-            <p:ph type="title"/>
-          </p:nvPr>
-        </p:nvSpPr>
-        <p:spPr>
-          <a:xfrm>
-            <a:off x="4633823" y="0"/>
-            <a:ext cx="7093788" cy="1339940"/>
-          </a:xfrm>
-          <a:prstGeom prst="rect">
-            <a:avLst/>
-          </a:prstGeom>
-          <a:noFill/>
-          <a:ln>
-            <a:noFill/>
-          </a:ln>
-        </p:spPr>
-        <p:txBody>
-          <a:bodyPr spcFirstLastPara="1" wrap="square" lIns="91425" tIns="45700" rIns="91425" bIns="45700" anchor="ctr" anchorCtr="0">
-            <a:normAutofit/>
-          </a:bodyPr>
-          <a:lstStyle/>
-          <a:p>
-            <a:pPr marL="0" lvl="0" indent="0" algn="l" rtl="0">
-              <a:lnSpc>
-                <a:spcPct val="90000"/>
-              </a:lnSpc>
-              <a:spcBef>
-                <a:spcPts val="0"/>
-              </a:spcBef>
-              <a:spcAft>
-                <a:spcPts val="0"/>
-              </a:spcAft>
-              <a:buClr>
-                <a:schemeClr val="dk1"/>
-              </a:buClr>
-              <a:buSzPts val="4400"/>
-              <a:buFont typeface="Calibri"/>
-              <a:buNone/>
-            </a:pPr>
-            <a:r>
-              <a:rPr lang="pt-BR" dirty="0"/>
-              <a:t>Vantagens React Native</a:t>
-            </a:r>
-            <a:endParaRPr dirty="0"/>
-          </a:p>
-        </p:txBody>
-      </p:sp>
-      <p:sp>
-        <p:nvSpPr>
-          <p:cNvPr id="101" name="Google Shape;101;p3"/>
-          <p:cNvSpPr txBox="1">
-            <a:spLocks noGrp="1"/>
-          </p:cNvSpPr>
-          <p:nvPr>
-            <p:ph type="body" idx="1"/>
-          </p:nvPr>
-        </p:nvSpPr>
-        <p:spPr>
-          <a:xfrm>
-            <a:off x="4633823" y="1231736"/>
-            <a:ext cx="7093788" cy="1339940"/>
-          </a:xfrm>
-          <a:prstGeom prst="rect">
-            <a:avLst/>
-          </a:prstGeom>
-          <a:noFill/>
-          <a:ln>
-            <a:noFill/>
-          </a:ln>
-        </p:spPr>
-        <p:txBody>
-          <a:bodyPr spcFirstLastPara="1" wrap="square" lIns="91425" tIns="45700" rIns="91425" bIns="45700" anchor="t" anchorCtr="0">
-            <a:normAutofit fontScale="92500" lnSpcReduction="20000"/>
-          </a:bodyPr>
-          <a:lstStyle/>
-          <a:p>
-            <a:pPr marL="228600" lvl="0" indent="-228600" algn="l" rtl="0">
-              <a:lnSpc>
-                <a:spcPct val="90000"/>
-              </a:lnSpc>
-              <a:spcBef>
-                <a:spcPts val="0"/>
-              </a:spcBef>
-              <a:spcAft>
-                <a:spcPts val="0"/>
-              </a:spcAft>
-              <a:buClr>
-                <a:schemeClr val="dk1"/>
-              </a:buClr>
-              <a:buSzPts val="2800"/>
-              <a:buChar char="•"/>
-            </a:pPr>
-            <a:r>
-              <a:rPr lang="pt-BR" dirty="0"/>
-              <a:t>Linguagem para todos os sistemas operacionais, usando a mesma base de código. Escrevemos de uma só maneira, e cada plataforma trata de forma independe.</a:t>
-            </a:r>
-            <a:endParaRPr dirty="0"/>
-          </a:p>
-        </p:txBody>
-      </p:sp>
-      <p:pic>
-        <p:nvPicPr>
-          <p:cNvPr id="102" name="Google Shape;102;p3" descr="Imagem para fundo de slide, faixa azul preenchendo a parte lateral esquerda do slide, formato de onda com logo do Serratec."/>
-          <p:cNvPicPr preferRelativeResize="0"/>
-          <p:nvPr/>
-        </p:nvPicPr>
-        <p:blipFill rotWithShape="1">
-          <a:blip r:embed="rId3">
-            <a:alphaModFix/>
-          </a:blip>
-          <a:srcRect l="-32" t="-65" r="64934" b="65"/>
-          <a:stretch/>
-        </p:blipFill>
-        <p:spPr>
-          <a:xfrm>
-            <a:off x="0" y="1253"/>
-            <a:ext cx="4275937" cy="6856747"/>
-          </a:xfrm>
-          <a:prstGeom prst="rect">
-            <a:avLst/>
-          </a:prstGeom>
-          <a:noFill/>
-          <a:ln>
-            <a:noFill/>
-          </a:ln>
-        </p:spPr>
-      </p:pic>
-      <p:sp>
-        <p:nvSpPr>
-          <p:cNvPr id="5" name="Google Shape;101;p3">
-            <a:extLst>
-              <a:ext uri="{FF2B5EF4-FFF2-40B4-BE49-F238E27FC236}">
-                <a16:creationId xmlns:a16="http://schemas.microsoft.com/office/drawing/2014/main" id="{D6042F3E-0441-F3C6-DBF6-8B0ED3D2280D}"/>
-              </a:ext>
-            </a:extLst>
-          </p:cNvPr>
-          <p:cNvSpPr txBox="1">
-            <a:spLocks/>
-          </p:cNvSpPr>
-          <p:nvPr/>
-        </p:nvSpPr>
-        <p:spPr>
-          <a:xfrm>
-            <a:off x="4633823" y="6056721"/>
-            <a:ext cx="7558177" cy="801279"/>
-          </a:xfrm>
-          <a:prstGeom prst="rect">
-            <a:avLst/>
-          </a:prstGeom>
-          <a:noFill/>
-          <a:ln>
-            <a:noFill/>
-          </a:ln>
-        </p:spPr>
-        <p:txBody>
-          <a:bodyPr spcFirstLastPara="1" wrap="square" lIns="91425" tIns="45700" rIns="91425" bIns="45700" anchor="t" anchorCtr="0">
-            <a:normAutofit/>
-          </a:bodyPr>
-          <a:lstStyle>
-            <a:defPPr marR="0" lvl="0" algn="l" rtl="0">
-              <a:lnSpc>
-                <a:spcPct val="100000"/>
-              </a:lnSpc>
-              <a:spcBef>
-                <a:spcPts val="0"/>
-              </a:spcBef>
-              <a:spcAft>
-                <a:spcPts val="0"/>
-              </a:spcAft>
-            </a:defPPr>
-            <a:lvl1pPr marL="457200" marR="0" lvl="0" indent="-342900" algn="l" rtl="0">
-              <a:lnSpc>
-                <a:spcPct val="90000"/>
-              </a:lnSpc>
-              <a:spcBef>
-                <a:spcPts val="1000"/>
-              </a:spcBef>
-              <a:spcAft>
-                <a:spcPts val="0"/>
-              </a:spcAft>
-              <a:buClr>
-                <a:schemeClr val="dk1"/>
-              </a:buClr>
-              <a:buSzPts val="1800"/>
-              <a:buFont typeface="Arial"/>
-              <a:buChar char="•"/>
-              <a:defRPr sz="2800" b="0" i="0" u="none" strike="noStrike" cap="none">
-                <a:solidFill>
-                  <a:schemeClr val="dk1"/>
-                </a:solidFill>
-                <a:latin typeface="Calibri"/>
-                <a:ea typeface="Calibri"/>
-                <a:cs typeface="Calibri"/>
-                <a:sym typeface="Calibri"/>
-              </a:defRPr>
-            </a:lvl1pPr>
-            <a:lvl2pPr marL="914400" marR="0" lvl="1" indent="-342900" algn="l" rtl="0">
-              <a:lnSpc>
-                <a:spcPct val="90000"/>
-              </a:lnSpc>
-              <a:spcBef>
-                <a:spcPts val="500"/>
-              </a:spcBef>
-              <a:spcAft>
-                <a:spcPts val="0"/>
-              </a:spcAft>
-              <a:buClr>
-                <a:schemeClr val="dk1"/>
-              </a:buClr>
-              <a:buSzPts val="1800"/>
-              <a:buFont typeface="Arial"/>
-              <a:buChar char="•"/>
-              <a:defRPr sz="2400" b="0" i="0" u="none" strike="noStrike" cap="none">
-                <a:solidFill>
-                  <a:schemeClr val="dk1"/>
-                </a:solidFill>
-                <a:latin typeface="Calibri"/>
-                <a:ea typeface="Calibri"/>
-                <a:cs typeface="Calibri"/>
-                <a:sym typeface="Calibri"/>
-              </a:defRPr>
-            </a:lvl2pPr>
-            <a:lvl3pPr marL="1371600" marR="0" lvl="2" indent="-342900" algn="l" rtl="0">
-              <a:lnSpc>
-                <a:spcPct val="90000"/>
-              </a:lnSpc>
-              <a:spcBef>
-                <a:spcPts val="500"/>
-              </a:spcBef>
-              <a:spcAft>
-                <a:spcPts val="0"/>
-              </a:spcAft>
-              <a:buClr>
-                <a:schemeClr val="dk1"/>
-              </a:buClr>
-              <a:buSzPts val="1800"/>
-              <a:buFont typeface="Arial"/>
-              <a:buChar char="•"/>
-              <a:defRPr sz="2000" b="0" i="0" u="none" strike="noStrike" cap="none">
-                <a:solidFill>
-                  <a:schemeClr val="dk1"/>
-                </a:solidFill>
-                <a:latin typeface="Calibri"/>
-                <a:ea typeface="Calibri"/>
-                <a:cs typeface="Calibri"/>
-                <a:sym typeface="Calibri"/>
-              </a:defRPr>
-            </a:lvl3pPr>
-            <a:lvl4pPr marL="1828800" marR="0" lvl="3" indent="-342900" algn="l" rtl="0">
-              <a:lnSpc>
-                <a:spcPct val="90000"/>
-              </a:lnSpc>
-              <a:spcBef>
-                <a:spcPts val="500"/>
-              </a:spcBef>
-              <a:spcAft>
-                <a:spcPts val="0"/>
-              </a:spcAft>
-              <a:buClr>
-                <a:schemeClr val="dk1"/>
-              </a:buClr>
-              <a:buSzPts val="1800"/>
-              <a:buFont typeface="Arial"/>
-              <a:buChar char="•"/>
-              <a:defRPr sz="1800" b="0" i="0" u="none" strike="noStrike" cap="none">
-                <a:solidFill>
-                  <a:schemeClr val="dk1"/>
-                </a:solidFill>
-                <a:latin typeface="Calibri"/>
-                <a:ea typeface="Calibri"/>
-                <a:cs typeface="Calibri"/>
-                <a:sym typeface="Calibri"/>
-              </a:defRPr>
-            </a:lvl4pPr>
-            <a:lvl5pPr marL="2286000" marR="0" lvl="4" indent="-342900" algn="l" rtl="0">
-              <a:lnSpc>
-                <a:spcPct val="90000"/>
-              </a:lnSpc>
-              <a:spcBef>
-                <a:spcPts val="500"/>
-              </a:spcBef>
-              <a:spcAft>
-                <a:spcPts val="0"/>
-              </a:spcAft>
-              <a:buClr>
-                <a:schemeClr val="dk1"/>
-              </a:buClr>
-              <a:buSzPts val="1800"/>
-              <a:buFont typeface="Arial"/>
-              <a:buChar char="•"/>
-              <a:defRPr sz="1800" b="0" i="0" u="none" strike="noStrike" cap="none">
-                <a:solidFill>
-                  <a:schemeClr val="dk1"/>
-                </a:solidFill>
-                <a:latin typeface="Calibri"/>
-                <a:ea typeface="Calibri"/>
-                <a:cs typeface="Calibri"/>
-                <a:sym typeface="Calibri"/>
-              </a:defRPr>
-            </a:lvl5pPr>
-            <a:lvl6pPr marL="2743200" marR="0" lvl="5" indent="-342900" algn="l" rtl="0">
-              <a:lnSpc>
-                <a:spcPct val="90000"/>
-              </a:lnSpc>
-              <a:spcBef>
-                <a:spcPts val="500"/>
-              </a:spcBef>
-              <a:spcAft>
-                <a:spcPts val="0"/>
-              </a:spcAft>
-              <a:buClr>
-                <a:schemeClr val="dk1"/>
-              </a:buClr>
-              <a:buSzPts val="1800"/>
-              <a:buFont typeface="Arial"/>
-              <a:buChar char="•"/>
-              <a:defRPr sz="1800" b="0" i="0" u="none" strike="noStrike" cap="none">
-                <a:solidFill>
-                  <a:schemeClr val="dk1"/>
-                </a:solidFill>
-                <a:latin typeface="Calibri"/>
-                <a:ea typeface="Calibri"/>
-                <a:cs typeface="Calibri"/>
-                <a:sym typeface="Calibri"/>
-              </a:defRPr>
-            </a:lvl6pPr>
-            <a:lvl7pPr marL="3200400" marR="0" lvl="6" indent="-342900" algn="l" rtl="0">
-              <a:lnSpc>
-                <a:spcPct val="90000"/>
-              </a:lnSpc>
-              <a:spcBef>
-                <a:spcPts val="500"/>
-              </a:spcBef>
-              <a:spcAft>
-                <a:spcPts val="0"/>
-              </a:spcAft>
-              <a:buClr>
-                <a:schemeClr val="dk1"/>
-              </a:buClr>
-              <a:buSzPts val="1800"/>
-              <a:buFont typeface="Arial"/>
-              <a:buChar char="•"/>
-              <a:defRPr sz="1800" b="0" i="0" u="none" strike="noStrike" cap="none">
-                <a:solidFill>
-                  <a:schemeClr val="dk1"/>
-                </a:solidFill>
-                <a:latin typeface="Calibri"/>
-                <a:ea typeface="Calibri"/>
-                <a:cs typeface="Calibri"/>
-                <a:sym typeface="Calibri"/>
-              </a:defRPr>
-            </a:lvl7pPr>
-            <a:lvl8pPr marL="3657600" marR="0" lvl="7" indent="-342900" algn="l" rtl="0">
-              <a:lnSpc>
-                <a:spcPct val="90000"/>
-              </a:lnSpc>
-              <a:spcBef>
-                <a:spcPts val="500"/>
-              </a:spcBef>
-              <a:spcAft>
-                <a:spcPts val="0"/>
-              </a:spcAft>
-              <a:buClr>
-                <a:schemeClr val="dk1"/>
-              </a:buClr>
-              <a:buSzPts val="1800"/>
-              <a:buFont typeface="Arial"/>
-              <a:buChar char="•"/>
-              <a:defRPr sz="1800" b="0" i="0" u="none" strike="noStrike" cap="none">
-                <a:solidFill>
-                  <a:schemeClr val="dk1"/>
-                </a:solidFill>
-                <a:latin typeface="Calibri"/>
-                <a:ea typeface="Calibri"/>
-                <a:cs typeface="Calibri"/>
-                <a:sym typeface="Calibri"/>
-              </a:defRPr>
-            </a:lvl8pPr>
-            <a:lvl9pPr marL="4114800" marR="0" lvl="8" indent="-342900" algn="l" rtl="0">
-              <a:lnSpc>
-                <a:spcPct val="90000"/>
-              </a:lnSpc>
-              <a:spcBef>
-                <a:spcPts val="500"/>
-              </a:spcBef>
-              <a:spcAft>
-                <a:spcPts val="0"/>
-              </a:spcAft>
-              <a:buClr>
-                <a:schemeClr val="dk1"/>
-              </a:buClr>
-              <a:buSzPts val="1800"/>
-              <a:buFont typeface="Arial"/>
-              <a:buChar char="•"/>
-              <a:defRPr sz="1800" b="0" i="0" u="none" strike="noStrike" cap="none">
-                <a:solidFill>
-                  <a:schemeClr val="dk1"/>
-                </a:solidFill>
-                <a:latin typeface="Calibri"/>
-                <a:ea typeface="Calibri"/>
-                <a:cs typeface="Calibri"/>
-                <a:sym typeface="Calibri"/>
-              </a:defRPr>
-            </a:lvl9pPr>
-          </a:lstStyle>
-          <a:p>
-            <a:pPr marL="228600" indent="-228600">
-              <a:spcBef>
-                <a:spcPts val="0"/>
-              </a:spcBef>
-              <a:buSzPts val="2800"/>
-            </a:pPr>
-            <a:r>
-              <a:rPr lang="pt-BR" sz="2000" u="sng" dirty="0"/>
-              <a:t>Documentação:</a:t>
-            </a:r>
-            <a:br>
-              <a:rPr lang="pt-BR" sz="2000" u="sng" dirty="0"/>
-            </a:br>
-            <a:r>
-              <a:rPr lang="pt-BR" sz="2000" u="sng" dirty="0"/>
-              <a:t>https://reactnative.dev/docs/intro-react-native-components</a:t>
-            </a:r>
-          </a:p>
-        </p:txBody>
-      </p:sp>
-      <p:sp>
-        <p:nvSpPr>
-          <p:cNvPr id="2" name="Google Shape;101;p3">
-            <a:extLst>
-              <a:ext uri="{FF2B5EF4-FFF2-40B4-BE49-F238E27FC236}">
-                <a16:creationId xmlns:a16="http://schemas.microsoft.com/office/drawing/2014/main" id="{4A290B1C-9A0A-901F-CAF0-93B74FA17CE0}"/>
-              </a:ext>
-            </a:extLst>
-          </p:cNvPr>
-          <p:cNvSpPr txBox="1">
-            <a:spLocks/>
-          </p:cNvSpPr>
-          <p:nvPr/>
-        </p:nvSpPr>
-        <p:spPr>
-          <a:xfrm>
-            <a:off x="4633823" y="2571676"/>
-            <a:ext cx="7093788" cy="2923279"/>
-          </a:xfrm>
-          <a:prstGeom prst="rect">
-            <a:avLst/>
-          </a:prstGeom>
-          <a:noFill/>
-          <a:ln>
-            <a:noFill/>
-          </a:ln>
-        </p:spPr>
-        <p:txBody>
-          <a:bodyPr spcFirstLastPara="1" wrap="square" lIns="91425" tIns="45700" rIns="91425" bIns="45700" anchor="t" anchorCtr="0">
-            <a:normAutofit fontScale="85000" lnSpcReduction="20000"/>
-          </a:bodyPr>
-          <a:lstStyle>
-            <a:defPPr marR="0" lvl="0" algn="l" rtl="0">
-              <a:lnSpc>
-                <a:spcPct val="100000"/>
-              </a:lnSpc>
-              <a:spcBef>
-                <a:spcPts val="0"/>
-              </a:spcBef>
-              <a:spcAft>
-                <a:spcPts val="0"/>
-              </a:spcAft>
-            </a:defPPr>
-            <a:lvl1pPr marL="457200" marR="0" lvl="0" indent="-342900" algn="l" rtl="0">
-              <a:lnSpc>
-                <a:spcPct val="90000"/>
-              </a:lnSpc>
-              <a:spcBef>
-                <a:spcPts val="1000"/>
-              </a:spcBef>
-              <a:spcAft>
-                <a:spcPts val="0"/>
-              </a:spcAft>
-              <a:buClr>
-                <a:schemeClr val="dk1"/>
-              </a:buClr>
-              <a:buSzPts val="1800"/>
-              <a:buFont typeface="Arial"/>
-              <a:buChar char="•"/>
-              <a:defRPr sz="2800" b="0" i="0" u="none" strike="noStrike" cap="none">
-                <a:solidFill>
-                  <a:schemeClr val="dk1"/>
-                </a:solidFill>
-                <a:latin typeface="Calibri"/>
-                <a:ea typeface="Calibri"/>
-                <a:cs typeface="Calibri"/>
-                <a:sym typeface="Calibri"/>
-              </a:defRPr>
-            </a:lvl1pPr>
-            <a:lvl2pPr marL="914400" marR="0" lvl="1" indent="-342900" algn="l" rtl="0">
-              <a:lnSpc>
-                <a:spcPct val="90000"/>
-              </a:lnSpc>
-              <a:spcBef>
-                <a:spcPts val="500"/>
-              </a:spcBef>
-              <a:spcAft>
-                <a:spcPts val="0"/>
-              </a:spcAft>
-              <a:buClr>
-                <a:schemeClr val="dk1"/>
-              </a:buClr>
-              <a:buSzPts val="1800"/>
-              <a:buFont typeface="Arial"/>
-              <a:buChar char="•"/>
-              <a:defRPr sz="2400" b="0" i="0" u="none" strike="noStrike" cap="none">
-                <a:solidFill>
-                  <a:schemeClr val="dk1"/>
-                </a:solidFill>
-                <a:latin typeface="Calibri"/>
-                <a:ea typeface="Calibri"/>
-                <a:cs typeface="Calibri"/>
-                <a:sym typeface="Calibri"/>
-              </a:defRPr>
-            </a:lvl2pPr>
-            <a:lvl3pPr marL="1371600" marR="0" lvl="2" indent="-342900" algn="l" rtl="0">
-              <a:lnSpc>
-                <a:spcPct val="90000"/>
-              </a:lnSpc>
-              <a:spcBef>
-                <a:spcPts val="500"/>
-              </a:spcBef>
-              <a:spcAft>
-                <a:spcPts val="0"/>
-              </a:spcAft>
-              <a:buClr>
-                <a:schemeClr val="dk1"/>
-              </a:buClr>
-              <a:buSzPts val="1800"/>
-              <a:buFont typeface="Arial"/>
-              <a:buChar char="•"/>
-              <a:defRPr sz="2000" b="0" i="0" u="none" strike="noStrike" cap="none">
-                <a:solidFill>
-                  <a:schemeClr val="dk1"/>
-                </a:solidFill>
-                <a:latin typeface="Calibri"/>
-                <a:ea typeface="Calibri"/>
-                <a:cs typeface="Calibri"/>
-                <a:sym typeface="Calibri"/>
-              </a:defRPr>
-            </a:lvl3pPr>
-            <a:lvl4pPr marL="1828800" marR="0" lvl="3" indent="-342900" algn="l" rtl="0">
-              <a:lnSpc>
-                <a:spcPct val="90000"/>
-              </a:lnSpc>
-              <a:spcBef>
-                <a:spcPts val="500"/>
-              </a:spcBef>
-              <a:spcAft>
-                <a:spcPts val="0"/>
-              </a:spcAft>
-              <a:buClr>
-                <a:schemeClr val="dk1"/>
-              </a:buClr>
-              <a:buSzPts val="1800"/>
-              <a:buFont typeface="Arial"/>
-              <a:buChar char="•"/>
-              <a:defRPr sz="1800" b="0" i="0" u="none" strike="noStrike" cap="none">
-                <a:solidFill>
-                  <a:schemeClr val="dk1"/>
-                </a:solidFill>
-                <a:latin typeface="Calibri"/>
-                <a:ea typeface="Calibri"/>
-                <a:cs typeface="Calibri"/>
-                <a:sym typeface="Calibri"/>
-              </a:defRPr>
-            </a:lvl4pPr>
-            <a:lvl5pPr marL="2286000" marR="0" lvl="4" indent="-342900" algn="l" rtl="0">
-              <a:lnSpc>
-                <a:spcPct val="90000"/>
-              </a:lnSpc>
-              <a:spcBef>
-                <a:spcPts val="500"/>
-              </a:spcBef>
-              <a:spcAft>
-                <a:spcPts val="0"/>
-              </a:spcAft>
-              <a:buClr>
-                <a:schemeClr val="dk1"/>
-              </a:buClr>
-              <a:buSzPts val="1800"/>
-              <a:buFont typeface="Arial"/>
-              <a:buChar char="•"/>
-              <a:defRPr sz="1800" b="0" i="0" u="none" strike="noStrike" cap="none">
-                <a:solidFill>
-                  <a:schemeClr val="dk1"/>
-                </a:solidFill>
-                <a:latin typeface="Calibri"/>
-                <a:ea typeface="Calibri"/>
-                <a:cs typeface="Calibri"/>
-                <a:sym typeface="Calibri"/>
-              </a:defRPr>
-            </a:lvl5pPr>
-            <a:lvl6pPr marL="2743200" marR="0" lvl="5" indent="-342900" algn="l" rtl="0">
-              <a:lnSpc>
-                <a:spcPct val="90000"/>
-              </a:lnSpc>
-              <a:spcBef>
-                <a:spcPts val="500"/>
-              </a:spcBef>
-              <a:spcAft>
-                <a:spcPts val="0"/>
-              </a:spcAft>
-              <a:buClr>
-                <a:schemeClr val="dk1"/>
-              </a:buClr>
-              <a:buSzPts val="1800"/>
-              <a:buFont typeface="Arial"/>
-              <a:buChar char="•"/>
-              <a:defRPr sz="1800" b="0" i="0" u="none" strike="noStrike" cap="none">
-                <a:solidFill>
-                  <a:schemeClr val="dk1"/>
-                </a:solidFill>
-                <a:latin typeface="Calibri"/>
-                <a:ea typeface="Calibri"/>
-                <a:cs typeface="Calibri"/>
-                <a:sym typeface="Calibri"/>
-              </a:defRPr>
-            </a:lvl6pPr>
-            <a:lvl7pPr marL="3200400" marR="0" lvl="6" indent="-342900" algn="l" rtl="0">
-              <a:lnSpc>
-                <a:spcPct val="90000"/>
-              </a:lnSpc>
-              <a:spcBef>
-                <a:spcPts val="500"/>
-              </a:spcBef>
-              <a:spcAft>
-                <a:spcPts val="0"/>
-              </a:spcAft>
-              <a:buClr>
-                <a:schemeClr val="dk1"/>
-              </a:buClr>
-              <a:buSzPts val="1800"/>
-              <a:buFont typeface="Arial"/>
-              <a:buChar char="•"/>
-              <a:defRPr sz="1800" b="0" i="0" u="none" strike="noStrike" cap="none">
-                <a:solidFill>
-                  <a:schemeClr val="dk1"/>
-                </a:solidFill>
-                <a:latin typeface="Calibri"/>
-                <a:ea typeface="Calibri"/>
-                <a:cs typeface="Calibri"/>
-                <a:sym typeface="Calibri"/>
-              </a:defRPr>
-            </a:lvl7pPr>
-            <a:lvl8pPr marL="3657600" marR="0" lvl="7" indent="-342900" algn="l" rtl="0">
-              <a:lnSpc>
-                <a:spcPct val="90000"/>
-              </a:lnSpc>
-              <a:spcBef>
-                <a:spcPts val="500"/>
-              </a:spcBef>
-              <a:spcAft>
-                <a:spcPts val="0"/>
-              </a:spcAft>
-              <a:buClr>
-                <a:schemeClr val="dk1"/>
-              </a:buClr>
-              <a:buSzPts val="1800"/>
-              <a:buFont typeface="Arial"/>
-              <a:buChar char="•"/>
-              <a:defRPr sz="1800" b="0" i="0" u="none" strike="noStrike" cap="none">
-                <a:solidFill>
-                  <a:schemeClr val="dk1"/>
-                </a:solidFill>
-                <a:latin typeface="Calibri"/>
-                <a:ea typeface="Calibri"/>
-                <a:cs typeface="Calibri"/>
-                <a:sym typeface="Calibri"/>
-              </a:defRPr>
-            </a:lvl8pPr>
-            <a:lvl9pPr marL="4114800" marR="0" lvl="8" indent="-342900" algn="l" rtl="0">
-              <a:lnSpc>
-                <a:spcPct val="90000"/>
-              </a:lnSpc>
-              <a:spcBef>
-                <a:spcPts val="500"/>
-              </a:spcBef>
-              <a:spcAft>
-                <a:spcPts val="0"/>
-              </a:spcAft>
-              <a:buClr>
-                <a:schemeClr val="dk1"/>
-              </a:buClr>
-              <a:buSzPts val="1800"/>
-              <a:buFont typeface="Arial"/>
-              <a:buChar char="•"/>
-              <a:defRPr sz="1800" b="0" i="0" u="none" strike="noStrike" cap="none">
-                <a:solidFill>
-                  <a:schemeClr val="dk1"/>
-                </a:solidFill>
-                <a:latin typeface="Calibri"/>
-                <a:ea typeface="Calibri"/>
-                <a:cs typeface="Calibri"/>
-                <a:sym typeface="Calibri"/>
-              </a:defRPr>
-            </a:lvl9pPr>
-          </a:lstStyle>
-          <a:p>
-            <a:pPr marL="457200" lvl="1" indent="0">
-              <a:spcBef>
-                <a:spcPts val="0"/>
-              </a:spcBef>
-              <a:buSzPts val="2800"/>
-              <a:buNone/>
-            </a:pPr>
-            <a:r>
-              <a:rPr lang="pt-BR" dirty="0"/>
-              <a:t>Inserimos um &lt;Text&gt; para texto</a:t>
-            </a:r>
-            <a:br>
-              <a:rPr lang="pt-BR" dirty="0"/>
-            </a:br>
-            <a:r>
-              <a:rPr lang="pt-BR" dirty="0"/>
-              <a:t>Inserimos um &lt;Image&gt; para imagens</a:t>
-            </a:r>
-          </a:p>
-          <a:p>
-            <a:pPr marL="0" indent="0">
-              <a:spcBef>
-                <a:spcPts val="0"/>
-              </a:spcBef>
-              <a:buSzPts val="2800"/>
-              <a:buNone/>
-            </a:pPr>
-            <a:endParaRPr lang="pt-BR" dirty="0"/>
-          </a:p>
-          <a:p>
-            <a:pPr marL="457200" lvl="1" indent="0">
-              <a:spcBef>
-                <a:spcPts val="0"/>
-              </a:spcBef>
-              <a:buSzPts val="2800"/>
-              <a:buNone/>
-            </a:pPr>
-            <a:r>
-              <a:rPr lang="pt-BR" dirty="0"/>
-              <a:t>Dentro de cada plataforma por baixo dos panos, é convertido cada um para a sua forma:</a:t>
-            </a:r>
-          </a:p>
-          <a:p>
-            <a:pPr lvl="1" indent="-457200">
-              <a:spcBef>
-                <a:spcPts val="0"/>
-              </a:spcBef>
-              <a:buSzPts val="2800"/>
-              <a:buFontTx/>
-              <a:buChar char="-"/>
-            </a:pPr>
-            <a:endParaRPr lang="pt-BR" dirty="0"/>
-          </a:p>
-          <a:p>
-            <a:pPr marL="457200" lvl="1" indent="0">
-              <a:spcBef>
-                <a:spcPts val="0"/>
-              </a:spcBef>
-              <a:buSzPts val="2800"/>
-              <a:buNone/>
-            </a:pPr>
-            <a:r>
-              <a:rPr lang="pt-BR" dirty="0"/>
-              <a:t>1. IOS</a:t>
-            </a:r>
-            <a:br>
-              <a:rPr lang="pt-BR" dirty="0"/>
-            </a:br>
-            <a:r>
-              <a:rPr lang="pt-BR" dirty="0"/>
-              <a:t>  - UIImageView</a:t>
-            </a:r>
-            <a:br>
-              <a:rPr lang="pt-BR" dirty="0"/>
-            </a:br>
-            <a:r>
-              <a:rPr lang="pt-BR" dirty="0"/>
-              <a:t>  - UITextView</a:t>
-            </a:r>
-          </a:p>
-          <a:p>
-            <a:pPr marL="1143000" lvl="2" indent="-228600">
-              <a:spcBef>
-                <a:spcPts val="0"/>
-              </a:spcBef>
-              <a:buSzPts val="2800"/>
-            </a:pPr>
-            <a:endParaRPr lang="pt-BR" dirty="0"/>
-          </a:p>
-          <a:p>
-            <a:pPr marL="457200" lvl="1" indent="0">
-              <a:spcBef>
-                <a:spcPts val="0"/>
-              </a:spcBef>
-              <a:buSzPts val="2800"/>
-              <a:buNone/>
-            </a:pPr>
-            <a:r>
-              <a:rPr lang="pt-BR" dirty="0"/>
-              <a:t>2. Android</a:t>
-            </a:r>
-            <a:br>
-              <a:rPr lang="pt-BR" dirty="0"/>
-            </a:br>
-            <a:r>
-              <a:rPr lang="pt-BR" dirty="0"/>
-              <a:t>  - ImageView</a:t>
-            </a:r>
-            <a:br>
-              <a:rPr lang="pt-BR" dirty="0"/>
-            </a:br>
-            <a:r>
-              <a:rPr lang="pt-BR" dirty="0"/>
-              <a:t>  - TextView</a:t>
-            </a:r>
-          </a:p>
-          <a:p>
-            <a:pPr marL="685800" lvl="1" indent="-228600">
-              <a:spcBef>
-                <a:spcPts val="0"/>
-              </a:spcBef>
-              <a:buSzPts val="2800"/>
-            </a:pPr>
-            <a:endParaRPr lang="pt-BR" dirty="0"/>
-          </a:p>
-        </p:txBody>
-      </p:sp>
-    </p:spTree>
-  </p:cSld>
-  <p:clrMapOvr>
-    <a:masterClrMapping/>
-  </p:clrMapOvr>
-</p:sld>
-</file>
-
-<file path=ppt/slides/slide30.xml><?xml version="1.0" encoding="utf-8"?>
+<file path=ppt/slides/slide23.xml><?xml version="1.0" encoding="utf-8"?>
 <p:sld xmlns:a="http://schemas.openxmlformats.org/drawingml/2006/main" xmlns:r="http://schemas.openxmlformats.org/officeDocument/2006/relationships" xmlns:p="http://schemas.openxmlformats.org/presentationml/2006/main">
   <p:cSld>
     <p:spTree>
@@ -27991,7 +21922,7 @@
 </p:sld>
 </file>
 
-<file path=ppt/slides/slide31.xml><?xml version="1.0" encoding="utf-8"?>
+<file path=ppt/slides/slide24.xml><?xml version="1.0" encoding="utf-8"?>
 <p:sld xmlns:a="http://schemas.openxmlformats.org/drawingml/2006/main" xmlns:r="http://schemas.openxmlformats.org/officeDocument/2006/relationships" xmlns:p="http://schemas.openxmlformats.org/presentationml/2006/main">
   <p:cSld>
     <p:spTree>
@@ -28095,6 +22026,870 @@
         <p14:creationId xmlns:p14="http://schemas.microsoft.com/office/powerpoint/2010/main" val="2778834578"/>
       </p:ext>
     </p:extLst>
+  </p:cSld>
+  <p:clrMapOvr>
+    <a:masterClrMapping/>
+  </p:clrMapOvr>
+</p:sld>
+</file>
+
+<file path=ppt/slides/slide3.xml><?xml version="1.0" encoding="utf-8"?>
+<p:sld xmlns:a="http://schemas.openxmlformats.org/drawingml/2006/main" xmlns:r="http://schemas.openxmlformats.org/officeDocument/2006/relationships" xmlns:p="http://schemas.openxmlformats.org/presentationml/2006/main">
+  <p:cSld>
+    <p:spTree>
+      <p:nvGrpSpPr>
+        <p:cNvPr id="1" name="Shape 99"/>
+        <p:cNvGrpSpPr/>
+        <p:nvPr/>
+      </p:nvGrpSpPr>
+      <p:grpSpPr>
+        <a:xfrm>
+          <a:off x="0" y="0"/>
+          <a:ext cx="0" cy="0"/>
+          <a:chOff x="0" y="0"/>
+          <a:chExt cx="0" cy="0"/>
+        </a:xfrm>
+      </p:grpSpPr>
+      <p:sp>
+        <p:nvSpPr>
+          <p:cNvPr id="100" name="Google Shape;100;p3"/>
+          <p:cNvSpPr txBox="1">
+            <a:spLocks noGrp="1"/>
+          </p:cNvSpPr>
+          <p:nvPr>
+            <p:ph type="title"/>
+          </p:nvPr>
+        </p:nvSpPr>
+        <p:spPr>
+          <a:xfrm>
+            <a:off x="4633823" y="0"/>
+            <a:ext cx="7093788" cy="1339940"/>
+          </a:xfrm>
+          <a:prstGeom prst="rect">
+            <a:avLst/>
+          </a:prstGeom>
+          <a:noFill/>
+          <a:ln>
+            <a:noFill/>
+          </a:ln>
+        </p:spPr>
+        <p:txBody>
+          <a:bodyPr spcFirstLastPara="1" wrap="square" lIns="91425" tIns="45700" rIns="91425" bIns="45700" anchor="ctr" anchorCtr="0">
+            <a:normAutofit/>
+          </a:bodyPr>
+          <a:lstStyle/>
+          <a:p>
+            <a:pPr marL="0" lvl="0" indent="0" algn="l" rtl="0">
+              <a:lnSpc>
+                <a:spcPct val="90000"/>
+              </a:lnSpc>
+              <a:spcBef>
+                <a:spcPts val="0"/>
+              </a:spcBef>
+              <a:spcAft>
+                <a:spcPts val="0"/>
+              </a:spcAft>
+              <a:buClr>
+                <a:schemeClr val="dk1"/>
+              </a:buClr>
+              <a:buSzPts val="4400"/>
+              <a:buFont typeface="Calibri"/>
+              <a:buNone/>
+            </a:pPr>
+            <a:r>
+              <a:rPr lang="pt-BR" dirty="0"/>
+              <a:t>Vantagens React Native</a:t>
+            </a:r>
+            <a:endParaRPr dirty="0"/>
+          </a:p>
+        </p:txBody>
+      </p:sp>
+      <p:sp>
+        <p:nvSpPr>
+          <p:cNvPr id="101" name="Google Shape;101;p3"/>
+          <p:cNvSpPr txBox="1">
+            <a:spLocks noGrp="1"/>
+          </p:cNvSpPr>
+          <p:nvPr>
+            <p:ph type="body" idx="1"/>
+          </p:nvPr>
+        </p:nvSpPr>
+        <p:spPr>
+          <a:xfrm>
+            <a:off x="4633823" y="1231736"/>
+            <a:ext cx="7093788" cy="1339940"/>
+          </a:xfrm>
+          <a:prstGeom prst="rect">
+            <a:avLst/>
+          </a:prstGeom>
+          <a:noFill/>
+          <a:ln>
+            <a:noFill/>
+          </a:ln>
+        </p:spPr>
+        <p:txBody>
+          <a:bodyPr spcFirstLastPara="1" wrap="square" lIns="91425" tIns="45700" rIns="91425" bIns="45700" anchor="t" anchorCtr="0">
+            <a:normAutofit fontScale="92500" lnSpcReduction="20000"/>
+          </a:bodyPr>
+          <a:lstStyle/>
+          <a:p>
+            <a:pPr marL="228600" lvl="0" indent="-228600" algn="l" rtl="0">
+              <a:lnSpc>
+                <a:spcPct val="90000"/>
+              </a:lnSpc>
+              <a:spcBef>
+                <a:spcPts val="0"/>
+              </a:spcBef>
+              <a:spcAft>
+                <a:spcPts val="0"/>
+              </a:spcAft>
+              <a:buClr>
+                <a:schemeClr val="dk1"/>
+              </a:buClr>
+              <a:buSzPts val="2800"/>
+              <a:buChar char="•"/>
+            </a:pPr>
+            <a:r>
+              <a:rPr lang="pt-BR" dirty="0"/>
+              <a:t>Linguagem para todos os sistemas operacionais, usando a mesma base de código. Escrevemos de uma só maneira, e cada plataforma trata de forma independe.</a:t>
+            </a:r>
+            <a:endParaRPr dirty="0"/>
+          </a:p>
+        </p:txBody>
+      </p:sp>
+      <p:pic>
+        <p:nvPicPr>
+          <p:cNvPr id="102" name="Google Shape;102;p3" descr="Imagem para fundo de slide, faixa azul preenchendo a parte lateral esquerda do slide, formato de onda com logo do Serratec."/>
+          <p:cNvPicPr preferRelativeResize="0"/>
+          <p:nvPr/>
+        </p:nvPicPr>
+        <p:blipFill rotWithShape="1">
+          <a:blip r:embed="rId3">
+            <a:alphaModFix/>
+          </a:blip>
+          <a:srcRect l="-32" t="-65" r="64934" b="65"/>
+          <a:stretch/>
+        </p:blipFill>
+        <p:spPr>
+          <a:xfrm>
+            <a:off x="0" y="1253"/>
+            <a:ext cx="4275937" cy="6856747"/>
+          </a:xfrm>
+          <a:prstGeom prst="rect">
+            <a:avLst/>
+          </a:prstGeom>
+          <a:noFill/>
+          <a:ln>
+            <a:noFill/>
+          </a:ln>
+        </p:spPr>
+      </p:pic>
+      <p:sp>
+        <p:nvSpPr>
+          <p:cNvPr id="5" name="Google Shape;101;p3">
+            <a:extLst>
+              <a:ext uri="{FF2B5EF4-FFF2-40B4-BE49-F238E27FC236}">
+                <a16:creationId xmlns:a16="http://schemas.microsoft.com/office/drawing/2014/main" id="{D6042F3E-0441-F3C6-DBF6-8B0ED3D2280D}"/>
+              </a:ext>
+            </a:extLst>
+          </p:cNvPr>
+          <p:cNvSpPr txBox="1">
+            <a:spLocks/>
+          </p:cNvSpPr>
+          <p:nvPr/>
+        </p:nvSpPr>
+        <p:spPr>
+          <a:xfrm>
+            <a:off x="4633823" y="6056721"/>
+            <a:ext cx="7558177" cy="801279"/>
+          </a:xfrm>
+          <a:prstGeom prst="rect">
+            <a:avLst/>
+          </a:prstGeom>
+          <a:noFill/>
+          <a:ln>
+            <a:noFill/>
+          </a:ln>
+        </p:spPr>
+        <p:txBody>
+          <a:bodyPr spcFirstLastPara="1" wrap="square" lIns="91425" tIns="45700" rIns="91425" bIns="45700" anchor="t" anchorCtr="0">
+            <a:normAutofit/>
+          </a:bodyPr>
+          <a:lstStyle>
+            <a:defPPr marR="0" lvl="0" algn="l" rtl="0">
+              <a:lnSpc>
+                <a:spcPct val="100000"/>
+              </a:lnSpc>
+              <a:spcBef>
+                <a:spcPts val="0"/>
+              </a:spcBef>
+              <a:spcAft>
+                <a:spcPts val="0"/>
+              </a:spcAft>
+            </a:defPPr>
+            <a:lvl1pPr marL="457200" marR="0" lvl="0" indent="-342900" algn="l" rtl="0">
+              <a:lnSpc>
+                <a:spcPct val="90000"/>
+              </a:lnSpc>
+              <a:spcBef>
+                <a:spcPts val="1000"/>
+              </a:spcBef>
+              <a:spcAft>
+                <a:spcPts val="0"/>
+              </a:spcAft>
+              <a:buClr>
+                <a:schemeClr val="dk1"/>
+              </a:buClr>
+              <a:buSzPts val="1800"/>
+              <a:buFont typeface="Arial"/>
+              <a:buChar char="•"/>
+              <a:defRPr sz="2800" b="0" i="0" u="none" strike="noStrike" cap="none">
+                <a:solidFill>
+                  <a:schemeClr val="dk1"/>
+                </a:solidFill>
+                <a:latin typeface="Calibri"/>
+                <a:ea typeface="Calibri"/>
+                <a:cs typeface="Calibri"/>
+                <a:sym typeface="Calibri"/>
+              </a:defRPr>
+            </a:lvl1pPr>
+            <a:lvl2pPr marL="914400" marR="0" lvl="1" indent="-342900" algn="l" rtl="0">
+              <a:lnSpc>
+                <a:spcPct val="90000"/>
+              </a:lnSpc>
+              <a:spcBef>
+                <a:spcPts val="500"/>
+              </a:spcBef>
+              <a:spcAft>
+                <a:spcPts val="0"/>
+              </a:spcAft>
+              <a:buClr>
+                <a:schemeClr val="dk1"/>
+              </a:buClr>
+              <a:buSzPts val="1800"/>
+              <a:buFont typeface="Arial"/>
+              <a:buChar char="•"/>
+              <a:defRPr sz="2400" b="0" i="0" u="none" strike="noStrike" cap="none">
+                <a:solidFill>
+                  <a:schemeClr val="dk1"/>
+                </a:solidFill>
+                <a:latin typeface="Calibri"/>
+                <a:ea typeface="Calibri"/>
+                <a:cs typeface="Calibri"/>
+                <a:sym typeface="Calibri"/>
+              </a:defRPr>
+            </a:lvl2pPr>
+            <a:lvl3pPr marL="1371600" marR="0" lvl="2" indent="-342900" algn="l" rtl="0">
+              <a:lnSpc>
+                <a:spcPct val="90000"/>
+              </a:lnSpc>
+              <a:spcBef>
+                <a:spcPts val="500"/>
+              </a:spcBef>
+              <a:spcAft>
+                <a:spcPts val="0"/>
+              </a:spcAft>
+              <a:buClr>
+                <a:schemeClr val="dk1"/>
+              </a:buClr>
+              <a:buSzPts val="1800"/>
+              <a:buFont typeface="Arial"/>
+              <a:buChar char="•"/>
+              <a:defRPr sz="2000" b="0" i="0" u="none" strike="noStrike" cap="none">
+                <a:solidFill>
+                  <a:schemeClr val="dk1"/>
+                </a:solidFill>
+                <a:latin typeface="Calibri"/>
+                <a:ea typeface="Calibri"/>
+                <a:cs typeface="Calibri"/>
+                <a:sym typeface="Calibri"/>
+              </a:defRPr>
+            </a:lvl3pPr>
+            <a:lvl4pPr marL="1828800" marR="0" lvl="3" indent="-342900" algn="l" rtl="0">
+              <a:lnSpc>
+                <a:spcPct val="90000"/>
+              </a:lnSpc>
+              <a:spcBef>
+                <a:spcPts val="500"/>
+              </a:spcBef>
+              <a:spcAft>
+                <a:spcPts val="0"/>
+              </a:spcAft>
+              <a:buClr>
+                <a:schemeClr val="dk1"/>
+              </a:buClr>
+              <a:buSzPts val="1800"/>
+              <a:buFont typeface="Arial"/>
+              <a:buChar char="•"/>
+              <a:defRPr sz="1800" b="0" i="0" u="none" strike="noStrike" cap="none">
+                <a:solidFill>
+                  <a:schemeClr val="dk1"/>
+                </a:solidFill>
+                <a:latin typeface="Calibri"/>
+                <a:ea typeface="Calibri"/>
+                <a:cs typeface="Calibri"/>
+                <a:sym typeface="Calibri"/>
+              </a:defRPr>
+            </a:lvl4pPr>
+            <a:lvl5pPr marL="2286000" marR="0" lvl="4" indent="-342900" algn="l" rtl="0">
+              <a:lnSpc>
+                <a:spcPct val="90000"/>
+              </a:lnSpc>
+              <a:spcBef>
+                <a:spcPts val="500"/>
+              </a:spcBef>
+              <a:spcAft>
+                <a:spcPts val="0"/>
+              </a:spcAft>
+              <a:buClr>
+                <a:schemeClr val="dk1"/>
+              </a:buClr>
+              <a:buSzPts val="1800"/>
+              <a:buFont typeface="Arial"/>
+              <a:buChar char="•"/>
+              <a:defRPr sz="1800" b="0" i="0" u="none" strike="noStrike" cap="none">
+                <a:solidFill>
+                  <a:schemeClr val="dk1"/>
+                </a:solidFill>
+                <a:latin typeface="Calibri"/>
+                <a:ea typeface="Calibri"/>
+                <a:cs typeface="Calibri"/>
+                <a:sym typeface="Calibri"/>
+              </a:defRPr>
+            </a:lvl5pPr>
+            <a:lvl6pPr marL="2743200" marR="0" lvl="5" indent="-342900" algn="l" rtl="0">
+              <a:lnSpc>
+                <a:spcPct val="90000"/>
+              </a:lnSpc>
+              <a:spcBef>
+                <a:spcPts val="500"/>
+              </a:spcBef>
+              <a:spcAft>
+                <a:spcPts val="0"/>
+              </a:spcAft>
+              <a:buClr>
+                <a:schemeClr val="dk1"/>
+              </a:buClr>
+              <a:buSzPts val="1800"/>
+              <a:buFont typeface="Arial"/>
+              <a:buChar char="•"/>
+              <a:defRPr sz="1800" b="0" i="0" u="none" strike="noStrike" cap="none">
+                <a:solidFill>
+                  <a:schemeClr val="dk1"/>
+                </a:solidFill>
+                <a:latin typeface="Calibri"/>
+                <a:ea typeface="Calibri"/>
+                <a:cs typeface="Calibri"/>
+                <a:sym typeface="Calibri"/>
+              </a:defRPr>
+            </a:lvl6pPr>
+            <a:lvl7pPr marL="3200400" marR="0" lvl="6" indent="-342900" algn="l" rtl="0">
+              <a:lnSpc>
+                <a:spcPct val="90000"/>
+              </a:lnSpc>
+              <a:spcBef>
+                <a:spcPts val="500"/>
+              </a:spcBef>
+              <a:spcAft>
+                <a:spcPts val="0"/>
+              </a:spcAft>
+              <a:buClr>
+                <a:schemeClr val="dk1"/>
+              </a:buClr>
+              <a:buSzPts val="1800"/>
+              <a:buFont typeface="Arial"/>
+              <a:buChar char="•"/>
+              <a:defRPr sz="1800" b="0" i="0" u="none" strike="noStrike" cap="none">
+                <a:solidFill>
+                  <a:schemeClr val="dk1"/>
+                </a:solidFill>
+                <a:latin typeface="Calibri"/>
+                <a:ea typeface="Calibri"/>
+                <a:cs typeface="Calibri"/>
+                <a:sym typeface="Calibri"/>
+              </a:defRPr>
+            </a:lvl7pPr>
+            <a:lvl8pPr marL="3657600" marR="0" lvl="7" indent="-342900" algn="l" rtl="0">
+              <a:lnSpc>
+                <a:spcPct val="90000"/>
+              </a:lnSpc>
+              <a:spcBef>
+                <a:spcPts val="500"/>
+              </a:spcBef>
+              <a:spcAft>
+                <a:spcPts val="0"/>
+              </a:spcAft>
+              <a:buClr>
+                <a:schemeClr val="dk1"/>
+              </a:buClr>
+              <a:buSzPts val="1800"/>
+              <a:buFont typeface="Arial"/>
+              <a:buChar char="•"/>
+              <a:defRPr sz="1800" b="0" i="0" u="none" strike="noStrike" cap="none">
+                <a:solidFill>
+                  <a:schemeClr val="dk1"/>
+                </a:solidFill>
+                <a:latin typeface="Calibri"/>
+                <a:ea typeface="Calibri"/>
+                <a:cs typeface="Calibri"/>
+                <a:sym typeface="Calibri"/>
+              </a:defRPr>
+            </a:lvl8pPr>
+            <a:lvl9pPr marL="4114800" marR="0" lvl="8" indent="-342900" algn="l" rtl="0">
+              <a:lnSpc>
+                <a:spcPct val="90000"/>
+              </a:lnSpc>
+              <a:spcBef>
+                <a:spcPts val="500"/>
+              </a:spcBef>
+              <a:spcAft>
+                <a:spcPts val="0"/>
+              </a:spcAft>
+              <a:buClr>
+                <a:schemeClr val="dk1"/>
+              </a:buClr>
+              <a:buSzPts val="1800"/>
+              <a:buFont typeface="Arial"/>
+              <a:buChar char="•"/>
+              <a:defRPr sz="1800" b="0" i="0" u="none" strike="noStrike" cap="none">
+                <a:solidFill>
+                  <a:schemeClr val="dk1"/>
+                </a:solidFill>
+                <a:latin typeface="Calibri"/>
+                <a:ea typeface="Calibri"/>
+                <a:cs typeface="Calibri"/>
+                <a:sym typeface="Calibri"/>
+              </a:defRPr>
+            </a:lvl9pPr>
+          </a:lstStyle>
+          <a:p>
+            <a:pPr marL="228600" indent="-228600">
+              <a:spcBef>
+                <a:spcPts val="0"/>
+              </a:spcBef>
+              <a:buSzPts val="2800"/>
+            </a:pPr>
+            <a:r>
+              <a:rPr lang="pt-BR" sz="2000" u="sng" dirty="0"/>
+              <a:t>Documentação:</a:t>
+            </a:r>
+            <a:br>
+              <a:rPr lang="pt-BR" sz="2000" u="sng" dirty="0"/>
+            </a:br>
+            <a:r>
+              <a:rPr lang="pt-BR" sz="2000" u="sng" dirty="0"/>
+              <a:t>https://reactnative.dev/docs/intro-react-native-components</a:t>
+            </a:r>
+          </a:p>
+        </p:txBody>
+      </p:sp>
+      <p:sp>
+        <p:nvSpPr>
+          <p:cNvPr id="2" name="Google Shape;101;p3">
+            <a:extLst>
+              <a:ext uri="{FF2B5EF4-FFF2-40B4-BE49-F238E27FC236}">
+                <a16:creationId xmlns:a16="http://schemas.microsoft.com/office/drawing/2014/main" id="{4A290B1C-9A0A-901F-CAF0-93B74FA17CE0}"/>
+              </a:ext>
+            </a:extLst>
+          </p:cNvPr>
+          <p:cNvSpPr txBox="1">
+            <a:spLocks/>
+          </p:cNvSpPr>
+          <p:nvPr/>
+        </p:nvSpPr>
+        <p:spPr>
+          <a:xfrm>
+            <a:off x="4633823" y="2571676"/>
+            <a:ext cx="7093788" cy="2923279"/>
+          </a:xfrm>
+          <a:prstGeom prst="rect">
+            <a:avLst/>
+          </a:prstGeom>
+          <a:noFill/>
+          <a:ln>
+            <a:noFill/>
+          </a:ln>
+        </p:spPr>
+        <p:txBody>
+          <a:bodyPr spcFirstLastPara="1" wrap="square" lIns="91425" tIns="45700" rIns="91425" bIns="45700" anchor="t" anchorCtr="0">
+            <a:normAutofit fontScale="85000" lnSpcReduction="20000"/>
+          </a:bodyPr>
+          <a:lstStyle>
+            <a:defPPr marR="0" lvl="0" algn="l" rtl="0">
+              <a:lnSpc>
+                <a:spcPct val="100000"/>
+              </a:lnSpc>
+              <a:spcBef>
+                <a:spcPts val="0"/>
+              </a:spcBef>
+              <a:spcAft>
+                <a:spcPts val="0"/>
+              </a:spcAft>
+            </a:defPPr>
+            <a:lvl1pPr marL="457200" marR="0" lvl="0" indent="-342900" algn="l" rtl="0">
+              <a:lnSpc>
+                <a:spcPct val="90000"/>
+              </a:lnSpc>
+              <a:spcBef>
+                <a:spcPts val="1000"/>
+              </a:spcBef>
+              <a:spcAft>
+                <a:spcPts val="0"/>
+              </a:spcAft>
+              <a:buClr>
+                <a:schemeClr val="dk1"/>
+              </a:buClr>
+              <a:buSzPts val="1800"/>
+              <a:buFont typeface="Arial"/>
+              <a:buChar char="•"/>
+              <a:defRPr sz="2800" b="0" i="0" u="none" strike="noStrike" cap="none">
+                <a:solidFill>
+                  <a:schemeClr val="dk1"/>
+                </a:solidFill>
+                <a:latin typeface="Calibri"/>
+                <a:ea typeface="Calibri"/>
+                <a:cs typeface="Calibri"/>
+                <a:sym typeface="Calibri"/>
+              </a:defRPr>
+            </a:lvl1pPr>
+            <a:lvl2pPr marL="914400" marR="0" lvl="1" indent="-342900" algn="l" rtl="0">
+              <a:lnSpc>
+                <a:spcPct val="90000"/>
+              </a:lnSpc>
+              <a:spcBef>
+                <a:spcPts val="500"/>
+              </a:spcBef>
+              <a:spcAft>
+                <a:spcPts val="0"/>
+              </a:spcAft>
+              <a:buClr>
+                <a:schemeClr val="dk1"/>
+              </a:buClr>
+              <a:buSzPts val="1800"/>
+              <a:buFont typeface="Arial"/>
+              <a:buChar char="•"/>
+              <a:defRPr sz="2400" b="0" i="0" u="none" strike="noStrike" cap="none">
+                <a:solidFill>
+                  <a:schemeClr val="dk1"/>
+                </a:solidFill>
+                <a:latin typeface="Calibri"/>
+                <a:ea typeface="Calibri"/>
+                <a:cs typeface="Calibri"/>
+                <a:sym typeface="Calibri"/>
+              </a:defRPr>
+            </a:lvl2pPr>
+            <a:lvl3pPr marL="1371600" marR="0" lvl="2" indent="-342900" algn="l" rtl="0">
+              <a:lnSpc>
+                <a:spcPct val="90000"/>
+              </a:lnSpc>
+              <a:spcBef>
+                <a:spcPts val="500"/>
+              </a:spcBef>
+              <a:spcAft>
+                <a:spcPts val="0"/>
+              </a:spcAft>
+              <a:buClr>
+                <a:schemeClr val="dk1"/>
+              </a:buClr>
+              <a:buSzPts val="1800"/>
+              <a:buFont typeface="Arial"/>
+              <a:buChar char="•"/>
+              <a:defRPr sz="2000" b="0" i="0" u="none" strike="noStrike" cap="none">
+                <a:solidFill>
+                  <a:schemeClr val="dk1"/>
+                </a:solidFill>
+                <a:latin typeface="Calibri"/>
+                <a:ea typeface="Calibri"/>
+                <a:cs typeface="Calibri"/>
+                <a:sym typeface="Calibri"/>
+              </a:defRPr>
+            </a:lvl3pPr>
+            <a:lvl4pPr marL="1828800" marR="0" lvl="3" indent="-342900" algn="l" rtl="0">
+              <a:lnSpc>
+                <a:spcPct val="90000"/>
+              </a:lnSpc>
+              <a:spcBef>
+                <a:spcPts val="500"/>
+              </a:spcBef>
+              <a:spcAft>
+                <a:spcPts val="0"/>
+              </a:spcAft>
+              <a:buClr>
+                <a:schemeClr val="dk1"/>
+              </a:buClr>
+              <a:buSzPts val="1800"/>
+              <a:buFont typeface="Arial"/>
+              <a:buChar char="•"/>
+              <a:defRPr sz="1800" b="0" i="0" u="none" strike="noStrike" cap="none">
+                <a:solidFill>
+                  <a:schemeClr val="dk1"/>
+                </a:solidFill>
+                <a:latin typeface="Calibri"/>
+                <a:ea typeface="Calibri"/>
+                <a:cs typeface="Calibri"/>
+                <a:sym typeface="Calibri"/>
+              </a:defRPr>
+            </a:lvl4pPr>
+            <a:lvl5pPr marL="2286000" marR="0" lvl="4" indent="-342900" algn="l" rtl="0">
+              <a:lnSpc>
+                <a:spcPct val="90000"/>
+              </a:lnSpc>
+              <a:spcBef>
+                <a:spcPts val="500"/>
+              </a:spcBef>
+              <a:spcAft>
+                <a:spcPts val="0"/>
+              </a:spcAft>
+              <a:buClr>
+                <a:schemeClr val="dk1"/>
+              </a:buClr>
+              <a:buSzPts val="1800"/>
+              <a:buFont typeface="Arial"/>
+              <a:buChar char="•"/>
+              <a:defRPr sz="1800" b="0" i="0" u="none" strike="noStrike" cap="none">
+                <a:solidFill>
+                  <a:schemeClr val="dk1"/>
+                </a:solidFill>
+                <a:latin typeface="Calibri"/>
+                <a:ea typeface="Calibri"/>
+                <a:cs typeface="Calibri"/>
+                <a:sym typeface="Calibri"/>
+              </a:defRPr>
+            </a:lvl5pPr>
+            <a:lvl6pPr marL="2743200" marR="0" lvl="5" indent="-342900" algn="l" rtl="0">
+              <a:lnSpc>
+                <a:spcPct val="90000"/>
+              </a:lnSpc>
+              <a:spcBef>
+                <a:spcPts val="500"/>
+              </a:spcBef>
+              <a:spcAft>
+                <a:spcPts val="0"/>
+              </a:spcAft>
+              <a:buClr>
+                <a:schemeClr val="dk1"/>
+              </a:buClr>
+              <a:buSzPts val="1800"/>
+              <a:buFont typeface="Arial"/>
+              <a:buChar char="•"/>
+              <a:defRPr sz="1800" b="0" i="0" u="none" strike="noStrike" cap="none">
+                <a:solidFill>
+                  <a:schemeClr val="dk1"/>
+                </a:solidFill>
+                <a:latin typeface="Calibri"/>
+                <a:ea typeface="Calibri"/>
+                <a:cs typeface="Calibri"/>
+                <a:sym typeface="Calibri"/>
+              </a:defRPr>
+            </a:lvl6pPr>
+            <a:lvl7pPr marL="3200400" marR="0" lvl="6" indent="-342900" algn="l" rtl="0">
+              <a:lnSpc>
+                <a:spcPct val="90000"/>
+              </a:lnSpc>
+              <a:spcBef>
+                <a:spcPts val="500"/>
+              </a:spcBef>
+              <a:spcAft>
+                <a:spcPts val="0"/>
+              </a:spcAft>
+              <a:buClr>
+                <a:schemeClr val="dk1"/>
+              </a:buClr>
+              <a:buSzPts val="1800"/>
+              <a:buFont typeface="Arial"/>
+              <a:buChar char="•"/>
+              <a:defRPr sz="1800" b="0" i="0" u="none" strike="noStrike" cap="none">
+                <a:solidFill>
+                  <a:schemeClr val="dk1"/>
+                </a:solidFill>
+                <a:latin typeface="Calibri"/>
+                <a:ea typeface="Calibri"/>
+                <a:cs typeface="Calibri"/>
+                <a:sym typeface="Calibri"/>
+              </a:defRPr>
+            </a:lvl7pPr>
+            <a:lvl8pPr marL="3657600" marR="0" lvl="7" indent="-342900" algn="l" rtl="0">
+              <a:lnSpc>
+                <a:spcPct val="90000"/>
+              </a:lnSpc>
+              <a:spcBef>
+                <a:spcPts val="500"/>
+              </a:spcBef>
+              <a:spcAft>
+                <a:spcPts val="0"/>
+              </a:spcAft>
+              <a:buClr>
+                <a:schemeClr val="dk1"/>
+              </a:buClr>
+              <a:buSzPts val="1800"/>
+              <a:buFont typeface="Arial"/>
+              <a:buChar char="•"/>
+              <a:defRPr sz="1800" b="0" i="0" u="none" strike="noStrike" cap="none">
+                <a:solidFill>
+                  <a:schemeClr val="dk1"/>
+                </a:solidFill>
+                <a:latin typeface="Calibri"/>
+                <a:ea typeface="Calibri"/>
+                <a:cs typeface="Calibri"/>
+                <a:sym typeface="Calibri"/>
+              </a:defRPr>
+            </a:lvl8pPr>
+            <a:lvl9pPr marL="4114800" marR="0" lvl="8" indent="-342900" algn="l" rtl="0">
+              <a:lnSpc>
+                <a:spcPct val="90000"/>
+              </a:lnSpc>
+              <a:spcBef>
+                <a:spcPts val="500"/>
+              </a:spcBef>
+              <a:spcAft>
+                <a:spcPts val="0"/>
+              </a:spcAft>
+              <a:buClr>
+                <a:schemeClr val="dk1"/>
+              </a:buClr>
+              <a:buSzPts val="1800"/>
+              <a:buFont typeface="Arial"/>
+              <a:buChar char="•"/>
+              <a:defRPr sz="1800" b="0" i="0" u="none" strike="noStrike" cap="none">
+                <a:solidFill>
+                  <a:schemeClr val="dk1"/>
+                </a:solidFill>
+                <a:latin typeface="Calibri"/>
+                <a:ea typeface="Calibri"/>
+                <a:cs typeface="Calibri"/>
+                <a:sym typeface="Calibri"/>
+              </a:defRPr>
+            </a:lvl9pPr>
+          </a:lstStyle>
+          <a:p>
+            <a:pPr marL="457200" lvl="1" indent="0">
+              <a:spcBef>
+                <a:spcPts val="0"/>
+              </a:spcBef>
+              <a:buSzPts val="2800"/>
+              <a:buNone/>
+            </a:pPr>
+            <a:r>
+              <a:rPr lang="pt-BR" dirty="0"/>
+              <a:t>Inserimos um &lt;Text&gt; para texto</a:t>
+            </a:r>
+            <a:br>
+              <a:rPr lang="pt-BR" dirty="0"/>
+            </a:br>
+            <a:r>
+              <a:rPr lang="pt-BR" dirty="0"/>
+              <a:t>Inserimos um &lt;Image&gt; para imagens</a:t>
+            </a:r>
+          </a:p>
+          <a:p>
+            <a:pPr marL="0" indent="0">
+              <a:spcBef>
+                <a:spcPts val="0"/>
+              </a:spcBef>
+              <a:buSzPts val="2800"/>
+              <a:buNone/>
+            </a:pPr>
+            <a:endParaRPr lang="pt-BR" dirty="0"/>
+          </a:p>
+          <a:p>
+            <a:pPr marL="457200" lvl="1" indent="0">
+              <a:spcBef>
+                <a:spcPts val="0"/>
+              </a:spcBef>
+              <a:buSzPts val="2800"/>
+              <a:buNone/>
+            </a:pPr>
+            <a:r>
+              <a:rPr lang="pt-BR" dirty="0"/>
+              <a:t>Dentro de cada plataforma por baixo dos panos, é convertido cada um para a sua forma:</a:t>
+            </a:r>
+          </a:p>
+          <a:p>
+            <a:pPr lvl="1" indent="-457200">
+              <a:spcBef>
+                <a:spcPts val="0"/>
+              </a:spcBef>
+              <a:buSzPts val="2800"/>
+              <a:buFontTx/>
+              <a:buChar char="-"/>
+            </a:pPr>
+            <a:endParaRPr lang="pt-BR" dirty="0"/>
+          </a:p>
+          <a:p>
+            <a:pPr marL="457200" lvl="1" indent="0">
+              <a:spcBef>
+                <a:spcPts val="0"/>
+              </a:spcBef>
+              <a:buSzPts val="2800"/>
+              <a:buNone/>
+            </a:pPr>
+            <a:r>
+              <a:rPr lang="pt-BR" dirty="0"/>
+              <a:t>1. IOS</a:t>
+            </a:r>
+            <a:br>
+              <a:rPr lang="pt-BR" dirty="0"/>
+            </a:br>
+            <a:r>
+              <a:rPr lang="pt-BR" dirty="0"/>
+              <a:t>  - UIImageView</a:t>
+            </a:r>
+            <a:br>
+              <a:rPr lang="pt-BR" dirty="0"/>
+            </a:br>
+            <a:r>
+              <a:rPr lang="pt-BR" dirty="0"/>
+              <a:t>  - UITextView</a:t>
+            </a:r>
+          </a:p>
+          <a:p>
+            <a:pPr marL="1143000" lvl="2" indent="-228600">
+              <a:spcBef>
+                <a:spcPts val="0"/>
+              </a:spcBef>
+              <a:buSzPts val="2800"/>
+            </a:pPr>
+            <a:endParaRPr lang="pt-BR" dirty="0"/>
+          </a:p>
+          <a:p>
+            <a:pPr marL="457200" lvl="1" indent="0">
+              <a:spcBef>
+                <a:spcPts val="0"/>
+              </a:spcBef>
+              <a:buSzPts val="2800"/>
+              <a:buNone/>
+            </a:pPr>
+            <a:r>
+              <a:rPr lang="pt-BR" dirty="0"/>
+              <a:t>2. Android</a:t>
+            </a:r>
+            <a:br>
+              <a:rPr lang="pt-BR" dirty="0"/>
+            </a:br>
+            <a:r>
+              <a:rPr lang="pt-BR" dirty="0"/>
+              <a:t>  - ImageView</a:t>
+            </a:r>
+            <a:br>
+              <a:rPr lang="pt-BR" dirty="0"/>
+            </a:br>
+            <a:r>
+              <a:rPr lang="pt-BR" dirty="0"/>
+              <a:t>  - TextView</a:t>
+            </a:r>
+          </a:p>
+          <a:p>
+            <a:pPr marL="685800" lvl="1" indent="-228600">
+              <a:spcBef>
+                <a:spcPts val="0"/>
+              </a:spcBef>
+              <a:buSzPts val="2800"/>
+            </a:pPr>
+            <a:endParaRPr lang="pt-BR" dirty="0"/>
+          </a:p>
+        </p:txBody>
+      </p:sp>
+    </p:spTree>
   </p:cSld>
   <p:clrMapOvr>
     <a:masterClrMapping/>
